--- a/Day3_MixedModels_ModelSelection/FW536_Day3_Afternoon_hypothesis test and model selection_accessible.pptx
+++ b/Day3_MixedModels_ModelSelection/FW536_Day3_Afternoon_hypothesis test and model selection_accessible.pptx
@@ -26841,101 +26841,6 @@
           </a:p>
         </p:txBody>
       </p:sp>
-      <p:graphicFrame>
-        <p:nvGraphicFramePr>
-          <p:cNvPr id="29698" name="Object 5"/>
-          <p:cNvGraphicFramePr>
-            <a:graphicFrameLocks noGrp="1" noChangeAspect="1"/>
-          </p:cNvGraphicFramePr>
-          <p:nvPr>
-            <p:ph idx="1"/>
-          </p:nvPr>
-        </p:nvGraphicFramePr>
-        <p:xfrm>
-          <a:off x="6937376" y="1298576"/>
-          <a:ext cx="2093913" cy="454025"/>
-        </p:xfrm>
-        <a:graphic>
-          <a:graphicData uri="http://schemas.openxmlformats.org/presentationml/2006/ole">
-            <mc:AlternateContent xmlns:mc="http://schemas.openxmlformats.org/markup-compatibility/2006">
-              <mc:Choice xmlns:v="urn:schemas-microsoft-com:vml" Requires="v">
-                <p:oleObj name="Equation" r:id="rId3" imgW="1054100" imgH="228600" progId="Equation.DSMT4">
-                  <p:embed/>
-                </p:oleObj>
-              </mc:Choice>
-              <mc:Fallback>
-                <p:oleObj name="Equation" r:id="rId3" imgW="1054100" imgH="228600" progId="Equation.DSMT4">
-                  <p:embed/>
-                  <p:pic>
-                    <p:nvPicPr>
-                      <p:cNvPr id="0" name=""/>
-                      <p:cNvPicPr>
-                        <a:picLocks noGrp="1" noChangeAspect="1" noChangeArrowheads="1"/>
-                      </p:cNvPicPr>
-                      <p:nvPr/>
-                    </p:nvPicPr>
-                    <p:blipFill>
-                      <a:blip r:embed="rId4">
-                        <a:extLst>
-                          <a:ext uri="{28A0092B-C50C-407E-A947-70E740481C1C}">
-                            <a14:useLocalDpi xmlns:a14="http://schemas.microsoft.com/office/drawing/2010/main" val="0"/>
-                          </a:ext>
-                        </a:extLst>
-                      </a:blip>
-                      <a:srcRect/>
-                      <a:stretch>
-                        <a:fillRect/>
-                      </a:stretch>
-                    </p:blipFill>
-                    <p:spPr bwMode="auto">
-                      <a:xfrm>
-                        <a:off x="6937376" y="1298576"/>
-                        <a:ext cx="2093913" cy="454025"/>
-                      </a:xfrm>
-                      <a:prstGeom prst="rect">
-                        <a:avLst/>
-                      </a:prstGeom>
-                      <a:noFill/>
-                      <a:ln>
-                        <a:noFill/>
-                      </a:ln>
-                      <a:effectLst/>
-                      <a:extLst>
-                        <a:ext uri="{909E8E84-426E-40DD-AFC4-6F175D3DCCD1}">
-                          <a14:hiddenFill xmlns:a14="http://schemas.microsoft.com/office/drawing/2010/main">
-                            <a:solidFill>
-                              <a:srgbClr val="FFFFFF"/>
-                            </a:solidFill>
-                          </a14:hiddenFill>
-                        </a:ext>
-                        <a:ext uri="{91240B29-F687-4F45-9708-019B960494DF}">
-                          <a14:hiddenLine xmlns:a14="http://schemas.microsoft.com/office/drawing/2010/main" w="9525">
-                            <a:solidFill>
-                              <a:srgbClr val="000000"/>
-                            </a:solidFill>
-                            <a:miter lim="800000"/>
-                            <a:headEnd/>
-                            <a:tailEnd/>
-                          </a14:hiddenLine>
-                        </a:ext>
-                        <a:ext uri="{AF507438-7753-43E0-B8FC-AC1667EBCBE1}">
-                          <a14:hiddenEffects xmlns:a14="http://schemas.microsoft.com/office/drawing/2010/main">
-                            <a:effectLst>
-                              <a:outerShdw dist="35921" dir="2700000" algn="ctr" rotWithShape="0">
-                                <a:srgbClr val="808080"/>
-                              </a:outerShdw>
-                            </a:effectLst>
-                          </a14:hiddenEffects>
-                        </a:ext>
-                      </a:extLst>
-                    </p:spPr>
-                  </p:pic>
-                </p:oleObj>
-              </mc:Fallback>
-            </mc:AlternateContent>
-          </a:graphicData>
-        </a:graphic>
-      </p:graphicFrame>
       <p:sp>
         <p:nvSpPr>
           <p:cNvPr id="8197" name="Slide Number Placeholder 1"/>
@@ -27406,6 +27311,61 @@
                 <a:latin typeface="Tahoma" charset="0"/>
               </a:rPr>
               <a:t>Compute the likelihood ratio</a:t>
+            </a:r>
+          </a:p>
+        </p:txBody>
+      </p:sp>
+      <p:sp>
+        <p:nvSpPr>
+          <p:cNvPr id="29703" name="TextBox 29702"/>
+          <p:cNvSpPr txBox="1"/>
+          <p:nvPr/>
+        </p:nvSpPr>
+        <p:spPr>
+          <a:xfrm>
+            <a:off x="6937376" y="1298576"/>
+            <a:ext cx="2093913" cy="454025"/>
+          </a:xfrm>
+          <a:prstGeom prst="rect">
+            <a:avLst/>
+          </a:prstGeom>
+          <a:noFill/>
+        </p:spPr>
+        <p:txBody>
+          <a:bodyPr wrap="square" anchor="ctr" lIns="0" rIns="0" tIns="0" bIns="0">
+            <a:spAutoFit/>
+          </a:bodyPr>
+          <a:lstStyle/>
+          <a:p>
+            <a:r>
+              <a:rPr sz="1400">
+                <a:latin typeface="Cambria"/>
+              </a:rPr>
+              <a:t>( −ln L</a:t>
+            </a:r>
+            <a:r>
+              <a:rPr sz="1400" baseline="-25000">
+                <a:latin typeface="Cambria"/>
+              </a:rPr>
+              <a:t>A</a:t>
+            </a:r>
+            <a:r>
+              <a:rPr sz="1400">
+                <a:latin typeface="Cambria"/>
+              </a:rPr>
+              <a:t> − (−ln L</a:t>
+            </a:r>
+            <a:r>
+              <a:rPr sz="1400" baseline="-25000">
+                <a:latin typeface="Cambria"/>
+              </a:rPr>
+              <a:t>B</a:t>
+            </a:r>
+            <a:r>
+              <a:rPr sz="1400">
+                <a:latin typeface="Cambria"/>
+              </a:rPr>
+              <a:t>) )</a:t>
             </a:r>
           </a:p>
         </p:txBody>
@@ -27722,101 +27682,6 @@
           </a:p>
         </p:txBody>
       </p:sp>
-      <p:graphicFrame>
-        <p:nvGraphicFramePr>
-          <p:cNvPr id="33794" name="Object 5"/>
-          <p:cNvGraphicFramePr>
-            <a:graphicFrameLocks noGrp="1" noChangeAspect="1"/>
-          </p:cNvGraphicFramePr>
-          <p:nvPr>
-            <p:ph idx="1"/>
-          </p:nvPr>
-        </p:nvGraphicFramePr>
-        <p:xfrm>
-          <a:off x="4148139" y="3276601"/>
-          <a:ext cx="3468687" cy="481013"/>
-        </p:xfrm>
-        <a:graphic>
-          <a:graphicData uri="http://schemas.openxmlformats.org/presentationml/2006/ole">
-            <mc:AlternateContent xmlns:mc="http://schemas.openxmlformats.org/markup-compatibility/2006">
-              <mc:Choice xmlns:v="urn:schemas-microsoft-com:vml" Requires="v">
-                <p:oleObj name="Equation" r:id="rId3" imgW="1739900" imgH="241300" progId="Equation.DSMT4">
-                  <p:embed/>
-                </p:oleObj>
-              </mc:Choice>
-              <mc:Fallback>
-                <p:oleObj name="Equation" r:id="rId3" imgW="1739900" imgH="241300" progId="Equation.DSMT4">
-                  <p:embed/>
-                  <p:pic>
-                    <p:nvPicPr>
-                      <p:cNvPr id="0" name=""/>
-                      <p:cNvPicPr>
-                        <a:picLocks noGrp="1" noChangeAspect="1" noChangeArrowheads="1"/>
-                      </p:cNvPicPr>
-                      <p:nvPr/>
-                    </p:nvPicPr>
-                    <p:blipFill>
-                      <a:blip r:embed="rId4">
-                        <a:extLst>
-                          <a:ext uri="{28A0092B-C50C-407E-A947-70E740481C1C}">
-                            <a14:useLocalDpi xmlns:a14="http://schemas.microsoft.com/office/drawing/2010/main" val="0"/>
-                          </a:ext>
-                        </a:extLst>
-                      </a:blip>
-                      <a:srcRect/>
-                      <a:stretch>
-                        <a:fillRect/>
-                      </a:stretch>
-                    </p:blipFill>
-                    <p:spPr bwMode="auto">
-                      <a:xfrm>
-                        <a:off x="4148139" y="3276601"/>
-                        <a:ext cx="3468687" cy="481013"/>
-                      </a:xfrm>
-                      <a:prstGeom prst="rect">
-                        <a:avLst/>
-                      </a:prstGeom>
-                      <a:noFill/>
-                      <a:ln>
-                        <a:noFill/>
-                      </a:ln>
-                      <a:effectLst/>
-                      <a:extLst>
-                        <a:ext uri="{909E8E84-426E-40DD-AFC4-6F175D3DCCD1}">
-                          <a14:hiddenFill xmlns:a14="http://schemas.microsoft.com/office/drawing/2010/main">
-                            <a:solidFill>
-                              <a:srgbClr val="FFFFFF"/>
-                            </a:solidFill>
-                          </a14:hiddenFill>
-                        </a:ext>
-                        <a:ext uri="{91240B29-F687-4F45-9708-019B960494DF}">
-                          <a14:hiddenLine xmlns:a14="http://schemas.microsoft.com/office/drawing/2010/main" w="9525">
-                            <a:solidFill>
-                              <a:srgbClr val="000000"/>
-                            </a:solidFill>
-                            <a:miter lim="800000"/>
-                            <a:headEnd/>
-                            <a:tailEnd/>
-                          </a14:hiddenLine>
-                        </a:ext>
-                        <a:ext uri="{AF507438-7753-43E0-B8FC-AC1667EBCBE1}">
-                          <a14:hiddenEffects xmlns:a14="http://schemas.microsoft.com/office/drawing/2010/main">
-                            <a:effectLst>
-                              <a:outerShdw dist="35921" dir="2700000" algn="ctr" rotWithShape="0">
-                                <a:srgbClr val="808080"/>
-                              </a:outerShdw>
-                            </a:effectLst>
-                          </a14:hiddenEffects>
-                        </a:ext>
-                      </a:extLst>
-                    </p:spPr>
-                  </p:pic>
-                </p:oleObj>
-              </mc:Fallback>
-            </mc:AlternateContent>
-          </a:graphicData>
-        </a:graphic>
-      </p:graphicFrame>
       <p:sp>
         <p:nvSpPr>
           <p:cNvPr id="9221" name="Slide Number Placeholder 1"/>
@@ -28286,6 +28151,115 @@
             <a:r>
               <a:rPr lang="en-AU" altLang="en-US" dirty="0"/>
               <a:t> more parameters)</a:t>
+            </a:r>
+          </a:p>
+        </p:txBody>
+      </p:sp>
+      <p:sp>
+        <p:nvSpPr>
+          <p:cNvPr id="33794" name="TextBox 33793"/>
+          <p:cNvSpPr txBox="1"/>
+          <p:nvPr/>
+        </p:nvSpPr>
+        <p:spPr>
+          <a:xfrm>
+            <a:off x="4148139" y="3276601"/>
+            <a:ext cx="4923692" cy="481013"/>
+          </a:xfrm>
+          <a:prstGeom prst="rect">
+            <a:avLst/>
+          </a:prstGeom>
+          <a:noFill/>
+        </p:spPr>
+        <p:txBody>
+          <a:bodyPr wrap="square" anchor="ctr" lIns="0" rIns="0" tIns="0" bIns="0">
+            <a:spAutoFit/>
+          </a:bodyPr>
+          <a:lstStyle/>
+          <a:p>
+            <a:r>
+              <a:rPr sz="1900">
+                <a:latin typeface="Cambria"/>
+              </a:rPr>
+              <a:t>L = P</a:t>
+            </a:r>
+            <a:r>
+              <a:rPr sz="1900" baseline="-25000">
+                <a:latin typeface="Cambria"/>
+              </a:rPr>
+              <a:t>1</a:t>
+            </a:r>
+            <a:r>
+              <a:rPr sz="1900" baseline="30000">
+                <a:latin typeface="Cambria"/>
+              </a:rPr>
+              <a:t>30</a:t>
+            </a:r>
+            <a:r>
+              <a:rPr sz="1900">
+                <a:latin typeface="Cambria"/>
+              </a:rPr>
+              <a:t> (1 − P</a:t>
+            </a:r>
+            <a:r>
+              <a:rPr sz="1900" baseline="-25000">
+                <a:latin typeface="Cambria"/>
+              </a:rPr>
+              <a:t>1</a:t>
+            </a:r>
+            <a:r>
+              <a:rPr sz="1900">
+                <a:latin typeface="Cambria"/>
+              </a:rPr>
+              <a:t>)</a:t>
+            </a:r>
+            <a:r>
+              <a:rPr sz="1900" baseline="30000">
+                <a:latin typeface="Cambria"/>
+              </a:rPr>
+              <a:t>20</a:t>
+            </a:r>
+            <a:r>
+              <a:rPr sz="1900">
+                <a:latin typeface="Cambria"/>
+              </a:rPr>
+              <a:t> P</a:t>
+            </a:r>
+            <a:r>
+              <a:rPr sz="1900" baseline="-25000">
+                <a:latin typeface="Cambria"/>
+              </a:rPr>
+              <a:t>2</a:t>
+            </a:r>
+            <a:r>
+              <a:rPr sz="1900" baseline="30000">
+                <a:latin typeface="Cambria"/>
+              </a:rPr>
+              <a:t>10</a:t>
+            </a:r>
+            <a:r>
+              <a:rPr sz="1900">
+                <a:latin typeface="Cambria"/>
+              </a:rPr>
+              <a:t> (1 − P</a:t>
+            </a:r>
+            <a:r>
+              <a:rPr sz="1900" baseline="-25000">
+                <a:latin typeface="Cambria"/>
+              </a:rPr>
+              <a:t>2</a:t>
+            </a:r>
+            <a:r>
+              <a:rPr sz="1900">
+                <a:latin typeface="Cambria"/>
+              </a:rPr>
+              <a:t>)</a:t>
+            </a:r>
+            <a:r>
+              <a:rPr sz="1900" baseline="30000">
+                <a:latin typeface="Cambria"/>
+              </a:rPr>
+              <a:t>40</a:t>
             </a:r>
           </a:p>
         </p:txBody>
@@ -28348,291 +28322,6 @@
           </a:p>
         </p:txBody>
       </p:sp>
-      <p:graphicFrame>
-        <p:nvGraphicFramePr>
-          <p:cNvPr id="35842" name="Object 6"/>
-          <p:cNvGraphicFramePr>
-            <a:graphicFrameLocks noGrp="1" noChangeAspect="1"/>
-          </p:cNvGraphicFramePr>
-          <p:nvPr>
-            <p:ph sz="half" idx="1"/>
-          </p:nvPr>
-        </p:nvGraphicFramePr>
-        <p:xfrm>
-          <a:off x="5484814" y="2201864"/>
-          <a:ext cx="306387" cy="511175"/>
-        </p:xfrm>
-        <a:graphic>
-          <a:graphicData uri="http://schemas.openxmlformats.org/presentationml/2006/ole">
-            <mc:AlternateContent xmlns:mc="http://schemas.openxmlformats.org/markup-compatibility/2006">
-              <mc:Choice xmlns:v="urn:schemas-microsoft-com:vml" Requires="v">
-                <p:oleObj name="Equation" r:id="rId3" imgW="152268" imgH="253780" progId="Equation.DSMT4">
-                  <p:embed/>
-                </p:oleObj>
-              </mc:Choice>
-              <mc:Fallback>
-                <p:oleObj name="Equation" r:id="rId3" imgW="152268" imgH="253780" progId="Equation.DSMT4">
-                  <p:embed/>
-                  <p:pic>
-                    <p:nvPicPr>
-                      <p:cNvPr id="0" name=""/>
-                      <p:cNvPicPr>
-                        <a:picLocks noGrp="1" noChangeAspect="1" noChangeArrowheads="1"/>
-                      </p:cNvPicPr>
-                      <p:nvPr/>
-                    </p:nvPicPr>
-                    <p:blipFill>
-                      <a:blip r:embed="rId4">
-                        <a:extLst>
-                          <a:ext uri="{28A0092B-C50C-407E-A947-70E740481C1C}">
-                            <a14:useLocalDpi xmlns:a14="http://schemas.microsoft.com/office/drawing/2010/main" val="0"/>
-                          </a:ext>
-                        </a:extLst>
-                      </a:blip>
-                      <a:srcRect/>
-                      <a:stretch>
-                        <a:fillRect/>
-                      </a:stretch>
-                    </p:blipFill>
-                    <p:spPr bwMode="auto">
-                      <a:xfrm>
-                        <a:off x="5484814" y="2201864"/>
-                        <a:ext cx="306387" cy="511175"/>
-                      </a:xfrm>
-                      <a:prstGeom prst="rect">
-                        <a:avLst/>
-                      </a:prstGeom>
-                      <a:noFill/>
-                      <a:ln>
-                        <a:noFill/>
-                      </a:ln>
-                      <a:effectLst/>
-                      <a:extLst>
-                        <a:ext uri="{909E8E84-426E-40DD-AFC4-6F175D3DCCD1}">
-                          <a14:hiddenFill xmlns:a14="http://schemas.microsoft.com/office/drawing/2010/main">
-                            <a:solidFill>
-                              <a:srgbClr val="FFFFFF"/>
-                            </a:solidFill>
-                          </a14:hiddenFill>
-                        </a:ext>
-                        <a:ext uri="{91240B29-F687-4F45-9708-019B960494DF}">
-                          <a14:hiddenLine xmlns:a14="http://schemas.microsoft.com/office/drawing/2010/main" w="9525">
-                            <a:solidFill>
-                              <a:srgbClr val="000000"/>
-                            </a:solidFill>
-                            <a:miter lim="800000"/>
-                            <a:headEnd/>
-                            <a:tailEnd/>
-                          </a14:hiddenLine>
-                        </a:ext>
-                        <a:ext uri="{AF507438-7753-43E0-B8FC-AC1667EBCBE1}">
-                          <a14:hiddenEffects xmlns:a14="http://schemas.microsoft.com/office/drawing/2010/main">
-                            <a:effectLst>
-                              <a:outerShdw dist="35921" dir="2700000" algn="ctr" rotWithShape="0">
-                                <a:srgbClr val="808080"/>
-                              </a:outerShdw>
-                            </a:effectLst>
-                          </a14:hiddenEffects>
-                        </a:ext>
-                      </a:extLst>
-                    </p:spPr>
-                  </p:pic>
-                </p:oleObj>
-              </mc:Fallback>
-            </mc:AlternateContent>
-          </a:graphicData>
-        </a:graphic>
-      </p:graphicFrame>
-      <p:graphicFrame>
-        <p:nvGraphicFramePr>
-          <p:cNvPr id="35843" name="Object 8"/>
-          <p:cNvGraphicFramePr>
-            <a:graphicFrameLocks noGrp="1" noChangeAspect="1"/>
-          </p:cNvGraphicFramePr>
-          <p:nvPr>
-            <p:ph sz="quarter" idx="2"/>
-          </p:nvPr>
-        </p:nvGraphicFramePr>
-        <p:xfrm>
-          <a:off x="6705600" y="2201864"/>
-          <a:ext cx="331788" cy="511175"/>
-        </p:xfrm>
-        <a:graphic>
-          <a:graphicData uri="http://schemas.openxmlformats.org/presentationml/2006/ole">
-            <mc:AlternateContent xmlns:mc="http://schemas.openxmlformats.org/markup-compatibility/2006">
-              <mc:Choice xmlns:v="urn:schemas-microsoft-com:vml" Requires="v">
-                <p:oleObj name="Equation" r:id="rId5" imgW="164957" imgH="253780" progId="Equation.DSMT4">
-                  <p:embed/>
-                </p:oleObj>
-              </mc:Choice>
-              <mc:Fallback>
-                <p:oleObj name="Equation" r:id="rId5" imgW="164957" imgH="253780" progId="Equation.DSMT4">
-                  <p:embed/>
-                  <p:pic>
-                    <p:nvPicPr>
-                      <p:cNvPr id="0" name=""/>
-                      <p:cNvPicPr>
-                        <a:picLocks noGrp="1" noChangeAspect="1" noChangeArrowheads="1"/>
-                      </p:cNvPicPr>
-                      <p:nvPr/>
-                    </p:nvPicPr>
-                    <p:blipFill>
-                      <a:blip r:embed="rId6">
-                        <a:extLst>
-                          <a:ext uri="{28A0092B-C50C-407E-A947-70E740481C1C}">
-                            <a14:useLocalDpi xmlns:a14="http://schemas.microsoft.com/office/drawing/2010/main" val="0"/>
-                          </a:ext>
-                        </a:extLst>
-                      </a:blip>
-                      <a:srcRect/>
-                      <a:stretch>
-                        <a:fillRect/>
-                      </a:stretch>
-                    </p:blipFill>
-                    <p:spPr bwMode="auto">
-                      <a:xfrm>
-                        <a:off x="6705600" y="2201864"/>
-                        <a:ext cx="331788" cy="511175"/>
-                      </a:xfrm>
-                      <a:prstGeom prst="rect">
-                        <a:avLst/>
-                      </a:prstGeom>
-                      <a:noFill/>
-                      <a:ln>
-                        <a:noFill/>
-                      </a:ln>
-                      <a:effectLst/>
-                      <a:extLst>
-                        <a:ext uri="{909E8E84-426E-40DD-AFC4-6F175D3DCCD1}">
-                          <a14:hiddenFill xmlns:a14="http://schemas.microsoft.com/office/drawing/2010/main">
-                            <a:solidFill>
-                              <a:srgbClr val="FFFFFF"/>
-                            </a:solidFill>
-                          </a14:hiddenFill>
-                        </a:ext>
-                        <a:ext uri="{91240B29-F687-4F45-9708-019B960494DF}">
-                          <a14:hiddenLine xmlns:a14="http://schemas.microsoft.com/office/drawing/2010/main" w="9525">
-                            <a:solidFill>
-                              <a:srgbClr val="000000"/>
-                            </a:solidFill>
-                            <a:miter lim="800000"/>
-                            <a:headEnd/>
-                            <a:tailEnd/>
-                          </a14:hiddenLine>
-                        </a:ext>
-                        <a:ext uri="{AF507438-7753-43E0-B8FC-AC1667EBCBE1}">
-                          <a14:hiddenEffects xmlns:a14="http://schemas.microsoft.com/office/drawing/2010/main">
-                            <a:effectLst>
-                              <a:outerShdw dist="35921" dir="2700000" algn="ctr" rotWithShape="0">
-                                <a:srgbClr val="808080"/>
-                              </a:outerShdw>
-                            </a:effectLst>
-                          </a14:hiddenEffects>
-                        </a:ext>
-                      </a:extLst>
-                    </p:spPr>
-                  </p:pic>
-                </p:oleObj>
-              </mc:Fallback>
-            </mc:AlternateContent>
-          </a:graphicData>
-        </a:graphic>
-      </p:graphicFrame>
-      <p:graphicFrame>
-        <p:nvGraphicFramePr>
-          <p:cNvPr id="35844" name="Object 10"/>
-          <p:cNvGraphicFramePr>
-            <a:graphicFrameLocks noGrp="1" noChangeAspect="1"/>
-          </p:cNvGraphicFramePr>
-          <p:nvPr>
-            <p:ph sz="quarter" idx="3"/>
-          </p:nvPr>
-        </p:nvGraphicFramePr>
-        <p:xfrm>
-          <a:off x="8305800" y="2278063"/>
-          <a:ext cx="736600" cy="355600"/>
-        </p:xfrm>
-        <a:graphic>
-          <a:graphicData uri="http://schemas.openxmlformats.org/presentationml/2006/ole">
-            <mc:AlternateContent xmlns:mc="http://schemas.openxmlformats.org/markup-compatibility/2006">
-              <mc:Choice xmlns:v="urn:schemas-microsoft-com:vml" Requires="v">
-                <p:oleObj name="Equation" r:id="rId7" imgW="368140" imgH="177723" progId="Equation.DSMT4">
-                  <p:embed/>
-                </p:oleObj>
-              </mc:Choice>
-              <mc:Fallback>
-                <p:oleObj name="Equation" r:id="rId7" imgW="368140" imgH="177723" progId="Equation.DSMT4">
-                  <p:embed/>
-                  <p:pic>
-                    <p:nvPicPr>
-                      <p:cNvPr id="0" name=""/>
-                      <p:cNvPicPr>
-                        <a:picLocks noGrp="1" noChangeAspect="1" noChangeArrowheads="1"/>
-                      </p:cNvPicPr>
-                      <p:nvPr/>
-                    </p:nvPicPr>
-                    <p:blipFill>
-                      <a:blip r:embed="rId8">
-                        <a:extLst>
-                          <a:ext uri="{28A0092B-C50C-407E-A947-70E740481C1C}">
-                            <a14:useLocalDpi xmlns:a14="http://schemas.microsoft.com/office/drawing/2010/main" val="0"/>
-                          </a:ext>
-                        </a:extLst>
-                      </a:blip>
-                      <a:srcRect/>
-                      <a:stretch>
-                        <a:fillRect/>
-                      </a:stretch>
-                    </p:blipFill>
-                    <p:spPr bwMode="auto">
-                      <a:xfrm>
-                        <a:off x="8305800" y="2278063"/>
-                        <a:ext cx="736600" cy="355600"/>
-                      </a:xfrm>
-                      <a:prstGeom prst="rect">
-                        <a:avLst/>
-                      </a:prstGeom>
-                      <a:noFill/>
-                      <a:ln>
-                        <a:noFill/>
-                      </a:ln>
-                      <a:effectLst/>
-                      <a:extLst>
-                        <a:ext uri="{909E8E84-426E-40DD-AFC4-6F175D3DCCD1}">
-                          <a14:hiddenFill xmlns:a14="http://schemas.microsoft.com/office/drawing/2010/main">
-                            <a:solidFill>
-                              <a:srgbClr val="FFFFFF"/>
-                            </a:solidFill>
-                          </a14:hiddenFill>
-                        </a:ext>
-                        <a:ext uri="{91240B29-F687-4F45-9708-019B960494DF}">
-                          <a14:hiddenLine xmlns:a14="http://schemas.microsoft.com/office/drawing/2010/main" w="9525">
-                            <a:solidFill>
-                              <a:srgbClr val="000000"/>
-                            </a:solidFill>
-                            <a:miter lim="800000"/>
-                            <a:headEnd/>
-                            <a:tailEnd/>
-                          </a14:hiddenLine>
-                        </a:ext>
-                        <a:ext uri="{AF507438-7753-43E0-B8FC-AC1667EBCBE1}">
-                          <a14:hiddenEffects xmlns:a14="http://schemas.microsoft.com/office/drawing/2010/main">
-                            <a:effectLst>
-                              <a:outerShdw dist="35921" dir="2700000" algn="ctr" rotWithShape="0">
-                                <a:srgbClr val="808080"/>
-                              </a:outerShdw>
-                            </a:effectLst>
-                          </a14:hiddenEffects>
-                        </a:ext>
-                      </a:extLst>
-                    </p:spPr>
-                  </p:pic>
-                </p:oleObj>
-              </mc:Fallback>
-            </mc:AlternateContent>
-          </a:graphicData>
-        </a:graphic>
-      </p:graphicFrame>
       <p:sp>
         <p:nvSpPr>
           <p:cNvPr id="10245" name="Text Box 4"/>
@@ -29178,6 +28867,111 @@
             <a:r>
               <a:rPr lang="en-AU" altLang="en-US" dirty="0"/>
               <a:t>Is this significant given the difference in parameters is 1?</a:t>
+            </a:r>
+          </a:p>
+        </p:txBody>
+      </p:sp>
+      <p:sp>
+        <p:nvSpPr>
+          <p:cNvPr id="35845" name="TextBox 35844"/>
+          <p:cNvSpPr txBox="1"/>
+          <p:nvPr/>
+        </p:nvSpPr>
+        <p:spPr>
+          <a:xfrm>
+            <a:off x="5484814" y="2201864"/>
+            <a:ext cx="306387" cy="511175"/>
+          </a:xfrm>
+          <a:prstGeom prst="rect">
+            <a:avLst/>
+          </a:prstGeom>
+          <a:noFill/>
+        </p:spPr>
+        <p:txBody>
+          <a:bodyPr wrap="square" anchor="ctr" lIns="0" rIns="0" tIns="0" bIns="0">
+            <a:spAutoFit/>
+          </a:bodyPr>
+          <a:lstStyle/>
+          <a:p>
+            <a:r>
+              <a:rPr sz="2400">
+                <a:latin typeface="Cambria"/>
+              </a:rPr>
+              <a:t>P̂</a:t>
+            </a:r>
+            <a:r>
+              <a:rPr sz="2400" baseline="-25000">
+                <a:latin typeface="Cambria"/>
+              </a:rPr>
+              <a:t>1</a:t>
+            </a:r>
+          </a:p>
+        </p:txBody>
+      </p:sp>
+      <p:sp>
+        <p:nvSpPr>
+          <p:cNvPr id="35846" name="TextBox 35845"/>
+          <p:cNvSpPr txBox="1"/>
+          <p:nvPr/>
+        </p:nvSpPr>
+        <p:spPr>
+          <a:xfrm>
+            <a:off x="6705600" y="2201864"/>
+            <a:ext cx="331788" cy="511175"/>
+          </a:xfrm>
+          <a:prstGeom prst="rect">
+            <a:avLst/>
+          </a:prstGeom>
+          <a:noFill/>
+        </p:spPr>
+        <p:txBody>
+          <a:bodyPr wrap="square" anchor="ctr" lIns="0" rIns="0" tIns="0" bIns="0">
+            <a:spAutoFit/>
+          </a:bodyPr>
+          <a:lstStyle/>
+          <a:p>
+            <a:r>
+              <a:rPr sz="2400">
+                <a:latin typeface="Cambria"/>
+              </a:rPr>
+              <a:t>P̂</a:t>
+            </a:r>
+            <a:r>
+              <a:rPr sz="2400" baseline="-25000">
+                <a:latin typeface="Cambria"/>
+              </a:rPr>
+              <a:t>2</a:t>
+            </a:r>
+          </a:p>
+        </p:txBody>
+      </p:sp>
+      <p:sp>
+        <p:nvSpPr>
+          <p:cNvPr id="35847" name="TextBox 35846"/>
+          <p:cNvSpPr txBox="1"/>
+          <p:nvPr/>
+        </p:nvSpPr>
+        <p:spPr>
+          <a:xfrm>
+            <a:off x="8305800" y="2278063"/>
+            <a:ext cx="736600" cy="355600"/>
+          </a:xfrm>
+          <a:prstGeom prst="rect">
+            <a:avLst/>
+          </a:prstGeom>
+          <a:noFill/>
+        </p:spPr>
+        <p:txBody>
+          <a:bodyPr wrap="square" anchor="ctr" lIns="0" rIns="0" tIns="0" bIns="0">
+            <a:spAutoFit/>
+          </a:bodyPr>
+          <a:lstStyle/>
+          <a:p>
+            <a:r>
+              <a:rPr sz="2400">
+                <a:latin typeface="Cambria"/>
+              </a:rPr>
+              <a:t>−ln L</a:t>
             </a:r>
           </a:p>
         </p:txBody>

--- a/Day3_MixedModels_ModelSelection/FW536_Day3_Afternoon_hypothesis test and model selection_accessible.pptx
+++ b/Day3_MixedModels_ModelSelection/FW536_Day3_Afternoon_hypothesis test and model selection_accessible.pptx
@@ -5,13 +5,13 @@
     <p:sldMasterId id="2147483648" r:id="rId1"/>
   </p:sldMasterIdLst>
   <p:notesMasterIdLst>
-    <p:notesMasterId r:id="rId49"/>
+    <p:notesMasterId r:id="rId54"/>
   </p:notesMasterIdLst>
   <p:sldIdLst>
     <p:sldId id="257" r:id="rId2"/>
     <p:sldId id="403" r:id="rId3"/>
     <p:sldId id="404" r:id="rId4"/>
-    <p:sldId id="392" r:id="rId5"/>
+    <p:sldId id="415" r:id="rId5"/>
     <p:sldId id="394" r:id="rId6"/>
     <p:sldId id="396" r:id="rId7"/>
     <p:sldId id="258" r:id="rId8"/>
@@ -50,11 +50,16 @@
     <p:sldId id="338" r:id="rId41"/>
     <p:sldId id="414" r:id="rId42"/>
     <p:sldId id="345" r:id="rId43"/>
-    <p:sldId id="341" r:id="rId44"/>
-    <p:sldId id="354" r:id="rId45"/>
-    <p:sldId id="348" r:id="rId46"/>
-    <p:sldId id="349" r:id="rId47"/>
-    <p:sldId id="350" r:id="rId48"/>
+    <p:sldId id="447" r:id="rId44"/>
+    <p:sldId id="454" r:id="rId45"/>
+    <p:sldId id="448" r:id="rId46"/>
+    <p:sldId id="453" r:id="rId47"/>
+    <p:sldId id="451" r:id="rId48"/>
+    <p:sldId id="348" r:id="rId49"/>
+    <p:sldId id="349" r:id="rId50"/>
+    <p:sldId id="350" r:id="rId51"/>
+    <p:sldId id="354" r:id="rId52"/>
+    <p:sldId id="341" r:id="rId53"/>
   </p:sldIdLst>
   <p:sldSz cx="12192000" cy="6858000"/>
   <p:notesSz cx="6858000" cy="9144000"/>
@@ -243,7 +248,7 @@
           <a:p>
             <a:fld id="{44D06378-EEEF-5A4B-8DAF-16D302AF37FE}" type="datetimeFigureOut">
               <a:rPr lang="en-US" smtClean="0"/>
-              <a:t>7/16/26</a:t>
+              <a:t>8/31/26</a:t>
             </a:fld>
             <a:endParaRPr lang="en-US"/>
           </a:p>
@@ -1762,7 +1767,7 @@
           <a:p>
             <a:fld id="{72473B21-E302-D241-B3CE-A2BEEB9F76FE}" type="datetimeFigureOut">
               <a:rPr lang="en-US" smtClean="0"/>
-              <a:t>7/16/26</a:t>
+              <a:t>8/31/26</a:t>
             </a:fld>
             <a:endParaRPr lang="en-US"/>
           </a:p>
@@ -1930,7 +1935,7 @@
           <a:p>
             <a:fld id="{72473B21-E302-D241-B3CE-A2BEEB9F76FE}" type="datetimeFigureOut">
               <a:rPr lang="en-US" smtClean="0"/>
-              <a:t>7/16/26</a:t>
+              <a:t>8/31/26</a:t>
             </a:fld>
             <a:endParaRPr lang="en-US"/>
           </a:p>
@@ -2108,7 +2113,7 @@
           <a:p>
             <a:fld id="{72473B21-E302-D241-B3CE-A2BEEB9F76FE}" type="datetimeFigureOut">
               <a:rPr lang="en-US" smtClean="0"/>
-              <a:t>7/16/26</a:t>
+              <a:t>8/31/26</a:t>
             </a:fld>
             <a:endParaRPr lang="en-US"/>
           </a:p>
@@ -2590,7 +2595,7 @@
           <a:p>
             <a:fld id="{72473B21-E302-D241-B3CE-A2BEEB9F76FE}" type="datetimeFigureOut">
               <a:rPr lang="en-US" smtClean="0"/>
-              <a:t>7/16/26</a:t>
+              <a:t>8/31/26</a:t>
             </a:fld>
             <a:endParaRPr lang="en-US"/>
           </a:p>
@@ -2835,7 +2840,7 @@
           <a:p>
             <a:fld id="{72473B21-E302-D241-B3CE-A2BEEB9F76FE}" type="datetimeFigureOut">
               <a:rPr lang="en-US" smtClean="0"/>
-              <a:t>7/16/26</a:t>
+              <a:t>8/31/26</a:t>
             </a:fld>
             <a:endParaRPr lang="en-US"/>
           </a:p>
@@ -3064,7 +3069,7 @@
           <a:p>
             <a:fld id="{72473B21-E302-D241-B3CE-A2BEEB9F76FE}" type="datetimeFigureOut">
               <a:rPr lang="en-US" smtClean="0"/>
-              <a:t>7/16/26</a:t>
+              <a:t>8/31/26</a:t>
             </a:fld>
             <a:endParaRPr lang="en-US"/>
           </a:p>
@@ -3428,7 +3433,7 @@
           <a:p>
             <a:fld id="{72473B21-E302-D241-B3CE-A2BEEB9F76FE}" type="datetimeFigureOut">
               <a:rPr lang="en-US" smtClean="0"/>
-              <a:t>7/16/26</a:t>
+              <a:t>8/31/26</a:t>
             </a:fld>
             <a:endParaRPr lang="en-US"/>
           </a:p>
@@ -3545,7 +3550,7 @@
           <a:p>
             <a:fld id="{72473B21-E302-D241-B3CE-A2BEEB9F76FE}" type="datetimeFigureOut">
               <a:rPr lang="en-US" smtClean="0"/>
-              <a:t>7/16/26</a:t>
+              <a:t>8/31/26</a:t>
             </a:fld>
             <a:endParaRPr lang="en-US"/>
           </a:p>
@@ -3640,7 +3645,7 @@
           <a:p>
             <a:fld id="{72473B21-E302-D241-B3CE-A2BEEB9F76FE}" type="datetimeFigureOut">
               <a:rPr lang="en-US" smtClean="0"/>
-              <a:t>7/16/26</a:t>
+              <a:t>8/31/26</a:t>
             </a:fld>
             <a:endParaRPr lang="en-US"/>
           </a:p>
@@ -3915,7 +3920,7 @@
           <a:p>
             <a:fld id="{72473B21-E302-D241-B3CE-A2BEEB9F76FE}" type="datetimeFigureOut">
               <a:rPr lang="en-US" smtClean="0"/>
-              <a:t>7/16/26</a:t>
+              <a:t>8/31/26</a:t>
             </a:fld>
             <a:endParaRPr lang="en-US"/>
           </a:p>
@@ -4167,7 +4172,7 @@
           <a:p>
             <a:fld id="{72473B21-E302-D241-B3CE-A2BEEB9F76FE}" type="datetimeFigureOut">
               <a:rPr lang="en-US" smtClean="0"/>
-              <a:t>7/16/26</a:t>
+              <a:t>8/31/26</a:t>
             </a:fld>
             <a:endParaRPr lang="en-US"/>
           </a:p>
@@ -4378,7 +4383,7 @@
           <a:p>
             <a:fld id="{72473B21-E302-D241-B3CE-A2BEEB9F76FE}" type="datetimeFigureOut">
               <a:rPr lang="en-US" smtClean="0"/>
-              <a:t>7/16/26</a:t>
+              <a:t>8/31/26</a:t>
             </a:fld>
             <a:endParaRPr lang="en-US"/>
           </a:p>
@@ -5915,8 +5920,8 @@
         </p:nvSpPr>
         <p:spPr>
           <a:xfrm>
-            <a:off x="1439130" y="5824836"/>
-            <a:ext cx="8792308" cy="461665"/>
+            <a:off x="1439130" y="5470912"/>
+            <a:ext cx="8792308" cy="1200329"/>
           </a:xfrm>
           <a:prstGeom prst="rect">
             <a:avLst/>
@@ -5949,6 +5954,12 @@
               <a:rPr lang="en-US" sz="2400" dirty="0"/>
               <a:t> objects in R: </a:t>
             </a:r>
+          </a:p>
+          <a:p>
+            <a:r>
+              <a:rPr lang="en-US" sz="2400" dirty="0"/>
+              <a:t>   </a:t>
+            </a:r>
             <a:r>
               <a:rPr lang="en-US" sz="2400" dirty="0" err="1"/>
               <a:t>lrtest</a:t>
@@ -5971,7 +5982,34 @@
             </a:r>
             <a:r>
               <a:rPr lang="en-US" sz="2400" dirty="0"/>
-              <a:t>)</a:t>
+              <a:t>) from </a:t>
+            </a:r>
+            <a:r>
+              <a:rPr lang="en-US" sz="2400" i="1" dirty="0" err="1"/>
+              <a:t>lmtest</a:t>
+            </a:r>
+            <a:endParaRPr lang="en-US" sz="2400" i="1" dirty="0"/>
+          </a:p>
+          <a:p>
+            <a:r>
+              <a:rPr lang="en-US" sz="2400" i="1" dirty="0"/>
+              <a:t>   </a:t>
+            </a:r>
+            <a:r>
+              <a:rPr lang="en-US" sz="2400" dirty="0" err="1"/>
+              <a:t>anova</a:t>
+            </a:r>
+            <a:r>
+              <a:rPr lang="en-US" sz="2400" dirty="0"/>
+              <a:t>(reduced, full, test = "</a:t>
+            </a:r>
+            <a:r>
+              <a:rPr lang="en-US" sz="2400" dirty="0" err="1"/>
+              <a:t>Chisq</a:t>
+            </a:r>
+            <a:r>
+              <a:rPr lang="en-US" sz="2400" dirty="0"/>
+              <a:t>") in base R</a:t>
             </a:r>
           </a:p>
         </p:txBody>
@@ -8638,7 +8676,7 @@
               <a:buNone/>
             </a:pPr>
             <a:r>
-              <a:rPr lang="en-US" altLang="en-US" sz="2400">
+              <a:rPr lang="en-US" altLang="en-US" sz="2400" dirty="0">
                 <a:latin typeface="Tahoma" charset="0"/>
               </a:rPr>
               <a:t>REJECT THE NULL</a:t>
@@ -8656,10 +8694,10 @@
               <a:buNone/>
             </a:pPr>
             <a:r>
-              <a:rPr lang="en-US" altLang="en-US" sz="1600">
+              <a:rPr lang="en-US" altLang="en-US" sz="1600" dirty="0">
                 <a:latin typeface="Tahoma" charset="0"/>
               </a:rPr>
-              <a:t>That the one parameter model fits that data. Much better to use two parameters, indicating that the probability of running the red light has changed! </a:t>
+              <a:t>That the one parameter model fits the data. Much better to use two parameters, indicating that the probability of running the red light has changed! </a:t>
             </a:r>
           </a:p>
         </p:txBody>
@@ -9561,7 +9599,7 @@
         <p:spPr bwMode="auto">
           <a:xfrm>
             <a:off x="5576888" y="1331913"/>
-            <a:ext cx="5264150" cy="830262"/>
+            <a:ext cx="6074338" cy="830997"/>
           </a:xfrm>
           <a:prstGeom prst="rect">
             <a:avLst/>
@@ -9591,7 +9629,7 @@
           </a:extLst>
         </p:spPr>
         <p:txBody>
-          <a:bodyPr>
+          <a:bodyPr wrap="square">
             <a:spAutoFit/>
           </a:bodyPr>
           <a:lstStyle>
@@ -9764,10 +9802,22 @@
               <a:buNone/>
             </a:pPr>
             <a:r>
-              <a:rPr lang="en-US" altLang="en-US" sz="2400">
+              <a:rPr lang="en-US" altLang="en-US" sz="2400" dirty="0">
                 <a:latin typeface="Tahoma" charset="0"/>
               </a:rPr>
-              <a:t>Compare to chi.sq distribution with degrees of freedom = # parameters</a:t>
+              <a:t>Compare to </a:t>
+            </a:r>
+            <a:r>
+              <a:rPr lang="en-US" altLang="en-US" sz="2400" dirty="0" err="1">
+                <a:latin typeface="Tahoma" charset="0"/>
+              </a:rPr>
+              <a:t>chi.sq</a:t>
+            </a:r>
+            <a:r>
+              <a:rPr lang="en-US" altLang="en-US" sz="2400" dirty="0">
+                <a:latin typeface="Tahoma" charset="0"/>
+              </a:rPr>
+              <a:t> distribution with degrees of freedom = difference in # parameters</a:t>
             </a:r>
           </a:p>
         </p:txBody>
@@ -10220,228 +10270,6 @@
           <a:chExt cx="0" cy="0"/>
         </a:xfrm>
       </p:grpSpPr>
-      <p:sp>
-        <p:nvSpPr>
-          <p:cNvPr id="47108" name="TextBox 8"/>
-          <p:cNvSpPr txBox="1">
-            <a:spLocks noChangeArrowheads="1"/>
-          </p:cNvSpPr>
-          <p:nvPr/>
-        </p:nvSpPr>
-        <p:spPr bwMode="auto">
-          <a:xfrm>
-            <a:off x="4995217" y="932238"/>
-            <a:ext cx="5264150" cy="831850"/>
-          </a:xfrm>
-          <a:prstGeom prst="rect">
-            <a:avLst/>
-          </a:prstGeom>
-          <a:noFill/>
-          <a:ln>
-            <a:noFill/>
-          </a:ln>
-          <a:extLst>
-            <a:ext uri="{909E8E84-426E-40DD-AFC4-6F175D3DCCD1}">
-              <a14:hiddenFill xmlns:a14="http://schemas.microsoft.com/office/drawing/2010/main">
-                <a:solidFill>
-                  <a:srgbClr val="FFFFFF"/>
-                </a:solidFill>
-              </a14:hiddenFill>
-            </a:ext>
-            <a:ext uri="{91240B29-F687-4F45-9708-019B960494DF}">
-              <a14:hiddenLine xmlns:a14="http://schemas.microsoft.com/office/drawing/2010/main" w="9525">
-                <a:solidFill>
-                  <a:srgbClr val="000000"/>
-                </a:solidFill>
-                <a:miter lim="800000"/>
-                <a:headEnd/>
-                <a:tailEnd/>
-              </a14:hiddenLine>
-            </a:ext>
-          </a:extLst>
-        </p:spPr>
-        <p:txBody>
-          <a:bodyPr>
-            <a:spAutoFit/>
-          </a:bodyPr>
-          <a:lstStyle>
-            <a:lvl1pPr>
-              <a:lnSpc>
-                <a:spcPct val="90000"/>
-              </a:lnSpc>
-              <a:spcBef>
-                <a:spcPts val="1000"/>
-              </a:spcBef>
-              <a:buFont typeface="Arial" charset="0"/>
-              <a:buChar char="•"/>
-              <a:defRPr sz="2800">
-                <a:solidFill>
-                  <a:schemeClr val="tx1"/>
-                </a:solidFill>
-                <a:latin typeface="Calibri" charset="0"/>
-              </a:defRPr>
-            </a:lvl1pPr>
-            <a:lvl2pPr marL="742950" indent="-285750">
-              <a:lnSpc>
-                <a:spcPct val="90000"/>
-              </a:lnSpc>
-              <a:spcBef>
-                <a:spcPts val="500"/>
-              </a:spcBef>
-              <a:buFont typeface="Arial" charset="0"/>
-              <a:buChar char="•"/>
-              <a:defRPr sz="2400">
-                <a:solidFill>
-                  <a:schemeClr val="tx1"/>
-                </a:solidFill>
-                <a:latin typeface="Calibri" charset="0"/>
-              </a:defRPr>
-            </a:lvl2pPr>
-            <a:lvl3pPr marL="1143000" indent="-228600">
-              <a:lnSpc>
-                <a:spcPct val="90000"/>
-              </a:lnSpc>
-              <a:spcBef>
-                <a:spcPts val="500"/>
-              </a:spcBef>
-              <a:buFont typeface="Arial" charset="0"/>
-              <a:buChar char="•"/>
-              <a:defRPr sz="2000">
-                <a:solidFill>
-                  <a:schemeClr val="tx1"/>
-                </a:solidFill>
-                <a:latin typeface="Calibri" charset="0"/>
-              </a:defRPr>
-            </a:lvl3pPr>
-            <a:lvl4pPr marL="1600200" indent="-228600">
-              <a:lnSpc>
-                <a:spcPct val="90000"/>
-              </a:lnSpc>
-              <a:spcBef>
-                <a:spcPts val="500"/>
-              </a:spcBef>
-              <a:buFont typeface="Arial" charset="0"/>
-              <a:buChar char="•"/>
-              <a:defRPr>
-                <a:solidFill>
-                  <a:schemeClr val="tx1"/>
-                </a:solidFill>
-                <a:latin typeface="Calibri" charset="0"/>
-              </a:defRPr>
-            </a:lvl4pPr>
-            <a:lvl5pPr marL="2057400" indent="-228600">
-              <a:lnSpc>
-                <a:spcPct val="90000"/>
-              </a:lnSpc>
-              <a:spcBef>
-                <a:spcPts val="500"/>
-              </a:spcBef>
-              <a:buFont typeface="Arial" charset="0"/>
-              <a:buChar char="•"/>
-              <a:defRPr>
-                <a:solidFill>
-                  <a:schemeClr val="tx1"/>
-                </a:solidFill>
-                <a:latin typeface="Calibri" charset="0"/>
-              </a:defRPr>
-            </a:lvl5pPr>
-            <a:lvl6pPr marL="2514600" indent="-228600" fontAlgn="base">
-              <a:lnSpc>
-                <a:spcPct val="90000"/>
-              </a:lnSpc>
-              <a:spcBef>
-                <a:spcPts val="500"/>
-              </a:spcBef>
-              <a:spcAft>
-                <a:spcPct val="0"/>
-              </a:spcAft>
-              <a:buFont typeface="Arial" charset="0"/>
-              <a:buChar char="•"/>
-              <a:defRPr>
-                <a:solidFill>
-                  <a:schemeClr val="tx1"/>
-                </a:solidFill>
-                <a:latin typeface="Calibri" charset="0"/>
-              </a:defRPr>
-            </a:lvl6pPr>
-            <a:lvl7pPr marL="2971800" indent="-228600" fontAlgn="base">
-              <a:lnSpc>
-                <a:spcPct val="90000"/>
-              </a:lnSpc>
-              <a:spcBef>
-                <a:spcPts val="500"/>
-              </a:spcBef>
-              <a:spcAft>
-                <a:spcPct val="0"/>
-              </a:spcAft>
-              <a:buFont typeface="Arial" charset="0"/>
-              <a:buChar char="•"/>
-              <a:defRPr>
-                <a:solidFill>
-                  <a:schemeClr val="tx1"/>
-                </a:solidFill>
-                <a:latin typeface="Calibri" charset="0"/>
-              </a:defRPr>
-            </a:lvl7pPr>
-            <a:lvl8pPr marL="3429000" indent="-228600" fontAlgn="base">
-              <a:lnSpc>
-                <a:spcPct val="90000"/>
-              </a:lnSpc>
-              <a:spcBef>
-                <a:spcPts val="500"/>
-              </a:spcBef>
-              <a:spcAft>
-                <a:spcPct val="0"/>
-              </a:spcAft>
-              <a:buFont typeface="Arial" charset="0"/>
-              <a:buChar char="•"/>
-              <a:defRPr>
-                <a:solidFill>
-                  <a:schemeClr val="tx1"/>
-                </a:solidFill>
-                <a:latin typeface="Calibri" charset="0"/>
-              </a:defRPr>
-            </a:lvl8pPr>
-            <a:lvl9pPr marL="3886200" indent="-228600" fontAlgn="base">
-              <a:lnSpc>
-                <a:spcPct val="90000"/>
-              </a:lnSpc>
-              <a:spcBef>
-                <a:spcPts val="500"/>
-              </a:spcBef>
-              <a:spcAft>
-                <a:spcPct val="0"/>
-              </a:spcAft>
-              <a:buFont typeface="Arial" charset="0"/>
-              <a:buChar char="•"/>
-              <a:defRPr>
-                <a:solidFill>
-                  <a:schemeClr val="tx1"/>
-                </a:solidFill>
-                <a:latin typeface="Calibri" charset="0"/>
-              </a:defRPr>
-            </a:lvl9pPr>
-          </a:lstStyle>
-          <a:p>
-            <a:pPr>
-              <a:lnSpc>
-                <a:spcPct val="100000"/>
-              </a:lnSpc>
-              <a:spcBef>
-                <a:spcPct val="0"/>
-              </a:spcBef>
-              <a:buFontTx/>
-              <a:buNone/>
-            </a:pPr>
-            <a:r>
-              <a:rPr lang="en-US" altLang="en-US" sz="2400">
-                <a:latin typeface="Tahoma" charset="0"/>
-              </a:rPr>
-              <a:t>Compare to chi.sq distribution with degrees of freedom = # parameters</a:t>
-            </a:r>
-          </a:p>
-        </p:txBody>
-      </p:sp>
       <p:sp>
         <p:nvSpPr>
           <p:cNvPr id="47109" name="TextBox 6"/>
@@ -11024,6 +10852,246 @@
           </a:p>
         </p:txBody>
       </p:sp>
+      <p:sp>
+        <p:nvSpPr>
+          <p:cNvPr id="2" name="TextBox 8">
+            <a:extLst>
+              <a:ext uri="{FF2B5EF4-FFF2-40B4-BE49-F238E27FC236}">
+                <a16:creationId xmlns:a16="http://schemas.microsoft.com/office/drawing/2014/main" id="{11339A72-1970-F680-4D6D-B8F1D15700E4}"/>
+              </a:ext>
+            </a:extLst>
+          </p:cNvPr>
+          <p:cNvSpPr txBox="1">
+            <a:spLocks noChangeArrowheads="1"/>
+          </p:cNvSpPr>
+          <p:nvPr/>
+        </p:nvSpPr>
+        <p:spPr bwMode="auto">
+          <a:xfrm>
+            <a:off x="5337484" y="1061061"/>
+            <a:ext cx="6074338" cy="830997"/>
+          </a:xfrm>
+          <a:prstGeom prst="rect">
+            <a:avLst/>
+          </a:prstGeom>
+          <a:noFill/>
+          <a:ln>
+            <a:noFill/>
+          </a:ln>
+          <a:extLst>
+            <a:ext uri="{909E8E84-426E-40DD-AFC4-6F175D3DCCD1}">
+              <a14:hiddenFill xmlns:a14="http://schemas.microsoft.com/office/drawing/2010/main">
+                <a:solidFill>
+                  <a:srgbClr val="FFFFFF"/>
+                </a:solidFill>
+              </a14:hiddenFill>
+            </a:ext>
+            <a:ext uri="{91240B29-F687-4F45-9708-019B960494DF}">
+              <a14:hiddenLine xmlns:a14="http://schemas.microsoft.com/office/drawing/2010/main" w="9525">
+                <a:solidFill>
+                  <a:srgbClr val="000000"/>
+                </a:solidFill>
+                <a:miter lim="800000"/>
+                <a:headEnd/>
+                <a:tailEnd/>
+              </a14:hiddenLine>
+            </a:ext>
+          </a:extLst>
+        </p:spPr>
+        <p:txBody>
+          <a:bodyPr wrap="square">
+            <a:spAutoFit/>
+          </a:bodyPr>
+          <a:lstStyle>
+            <a:lvl1pPr>
+              <a:lnSpc>
+                <a:spcPct val="90000"/>
+              </a:lnSpc>
+              <a:spcBef>
+                <a:spcPts val="1000"/>
+              </a:spcBef>
+              <a:buFont typeface="Arial" charset="0"/>
+              <a:buChar char="•"/>
+              <a:defRPr sz="2800">
+                <a:solidFill>
+                  <a:schemeClr val="tx1"/>
+                </a:solidFill>
+                <a:latin typeface="Calibri" charset="0"/>
+              </a:defRPr>
+            </a:lvl1pPr>
+            <a:lvl2pPr marL="742950" indent="-285750">
+              <a:lnSpc>
+                <a:spcPct val="90000"/>
+              </a:lnSpc>
+              <a:spcBef>
+                <a:spcPts val="500"/>
+              </a:spcBef>
+              <a:buFont typeface="Arial" charset="0"/>
+              <a:buChar char="•"/>
+              <a:defRPr sz="2400">
+                <a:solidFill>
+                  <a:schemeClr val="tx1"/>
+                </a:solidFill>
+                <a:latin typeface="Calibri" charset="0"/>
+              </a:defRPr>
+            </a:lvl2pPr>
+            <a:lvl3pPr marL="1143000" indent="-228600">
+              <a:lnSpc>
+                <a:spcPct val="90000"/>
+              </a:lnSpc>
+              <a:spcBef>
+                <a:spcPts val="500"/>
+              </a:spcBef>
+              <a:buFont typeface="Arial" charset="0"/>
+              <a:buChar char="•"/>
+              <a:defRPr sz="2000">
+                <a:solidFill>
+                  <a:schemeClr val="tx1"/>
+                </a:solidFill>
+                <a:latin typeface="Calibri" charset="0"/>
+              </a:defRPr>
+            </a:lvl3pPr>
+            <a:lvl4pPr marL="1600200" indent="-228600">
+              <a:lnSpc>
+                <a:spcPct val="90000"/>
+              </a:lnSpc>
+              <a:spcBef>
+                <a:spcPts val="500"/>
+              </a:spcBef>
+              <a:buFont typeface="Arial" charset="0"/>
+              <a:buChar char="•"/>
+              <a:defRPr>
+                <a:solidFill>
+                  <a:schemeClr val="tx1"/>
+                </a:solidFill>
+                <a:latin typeface="Calibri" charset="0"/>
+              </a:defRPr>
+            </a:lvl4pPr>
+            <a:lvl5pPr marL="2057400" indent="-228600">
+              <a:lnSpc>
+                <a:spcPct val="90000"/>
+              </a:lnSpc>
+              <a:spcBef>
+                <a:spcPts val="500"/>
+              </a:spcBef>
+              <a:buFont typeface="Arial" charset="0"/>
+              <a:buChar char="•"/>
+              <a:defRPr>
+                <a:solidFill>
+                  <a:schemeClr val="tx1"/>
+                </a:solidFill>
+                <a:latin typeface="Calibri" charset="0"/>
+              </a:defRPr>
+            </a:lvl5pPr>
+            <a:lvl6pPr marL="2514600" indent="-228600" fontAlgn="base">
+              <a:lnSpc>
+                <a:spcPct val="90000"/>
+              </a:lnSpc>
+              <a:spcBef>
+                <a:spcPts val="500"/>
+              </a:spcBef>
+              <a:spcAft>
+                <a:spcPct val="0"/>
+              </a:spcAft>
+              <a:buFont typeface="Arial" charset="0"/>
+              <a:buChar char="•"/>
+              <a:defRPr>
+                <a:solidFill>
+                  <a:schemeClr val="tx1"/>
+                </a:solidFill>
+                <a:latin typeface="Calibri" charset="0"/>
+              </a:defRPr>
+            </a:lvl6pPr>
+            <a:lvl7pPr marL="2971800" indent="-228600" fontAlgn="base">
+              <a:lnSpc>
+                <a:spcPct val="90000"/>
+              </a:lnSpc>
+              <a:spcBef>
+                <a:spcPts val="500"/>
+              </a:spcBef>
+              <a:spcAft>
+                <a:spcPct val="0"/>
+              </a:spcAft>
+              <a:buFont typeface="Arial" charset="0"/>
+              <a:buChar char="•"/>
+              <a:defRPr>
+                <a:solidFill>
+                  <a:schemeClr val="tx1"/>
+                </a:solidFill>
+                <a:latin typeface="Calibri" charset="0"/>
+              </a:defRPr>
+            </a:lvl7pPr>
+            <a:lvl8pPr marL="3429000" indent="-228600" fontAlgn="base">
+              <a:lnSpc>
+                <a:spcPct val="90000"/>
+              </a:lnSpc>
+              <a:spcBef>
+                <a:spcPts val="500"/>
+              </a:spcBef>
+              <a:spcAft>
+                <a:spcPct val="0"/>
+              </a:spcAft>
+              <a:buFont typeface="Arial" charset="0"/>
+              <a:buChar char="•"/>
+              <a:defRPr>
+                <a:solidFill>
+                  <a:schemeClr val="tx1"/>
+                </a:solidFill>
+                <a:latin typeface="Calibri" charset="0"/>
+              </a:defRPr>
+            </a:lvl8pPr>
+            <a:lvl9pPr marL="3886200" indent="-228600" fontAlgn="base">
+              <a:lnSpc>
+                <a:spcPct val="90000"/>
+              </a:lnSpc>
+              <a:spcBef>
+                <a:spcPts val="500"/>
+              </a:spcBef>
+              <a:spcAft>
+                <a:spcPct val="0"/>
+              </a:spcAft>
+              <a:buFont typeface="Arial" charset="0"/>
+              <a:buChar char="•"/>
+              <a:defRPr>
+                <a:solidFill>
+                  <a:schemeClr val="tx1"/>
+                </a:solidFill>
+                <a:latin typeface="Calibri" charset="0"/>
+              </a:defRPr>
+            </a:lvl9pPr>
+          </a:lstStyle>
+          <a:p>
+            <a:pPr>
+              <a:lnSpc>
+                <a:spcPct val="100000"/>
+              </a:lnSpc>
+              <a:spcBef>
+                <a:spcPct val="0"/>
+              </a:spcBef>
+              <a:buFontTx/>
+              <a:buNone/>
+            </a:pPr>
+            <a:r>
+              <a:rPr lang="en-US" altLang="en-US" sz="2400" dirty="0">
+                <a:latin typeface="Tahoma" charset="0"/>
+              </a:rPr>
+              <a:t>Compare to </a:t>
+            </a:r>
+            <a:r>
+              <a:rPr lang="en-US" altLang="en-US" sz="2400" dirty="0" err="1">
+                <a:latin typeface="Tahoma" charset="0"/>
+              </a:rPr>
+              <a:t>chi.sq</a:t>
+            </a:r>
+            <a:r>
+              <a:rPr lang="en-US" altLang="en-US" sz="2400" dirty="0">
+                <a:latin typeface="Tahoma" charset="0"/>
+              </a:rPr>
+              <a:t> distribution with degrees of freedom = difference in # parameters</a:t>
+            </a:r>
+          </a:p>
+        </p:txBody>
+      </p:sp>
     </p:spTree>
     <p:extLst>
       <p:ext uri="{BB962C8B-B14F-4D97-AF65-F5344CB8AC3E}">
@@ -11562,7 +11630,7 @@
               <a:rPr lang="en-US" altLang="en-US" sz="2400" dirty="0">
                 <a:latin typeface="Tahoma" charset="0"/>
               </a:rPr>
-              <a:t>Convention within&gt;2 AIC units are “considered competitive”, and this is approximately the same as frequentist model selection using LRT</a:t>
+              <a:t>Convention within &lt;2 AIC units are “considered competitive”, and this is approximately the same as frequentist model selection using LRT</a:t>
             </a:r>
           </a:p>
         </p:txBody>
@@ -14682,7 +14750,7 @@
             <a:pPr lvl="1"/>
             <a:r>
               <a:rPr lang="en-US" dirty="0"/>
-              <a:t>More complex model only “significantly better” is it’s AIC score is &gt;2 units </a:t>
+              <a:t>More complex model only “significantly better” if its AIC score is &gt;2 units </a:t>
             </a:r>
             <a:r>
               <a:rPr lang="en-US" b="1" dirty="0"/>
@@ -14703,7 +14771,7 @@
           <a:p>
             <a:r>
               <a:rPr lang="en-US" dirty="0"/>
-              <a:t>Penalty for adding parameter is 2 units and fit improves with complexity, so models with random data as predictor will be within 2 AIC. The complex model has not support even if within 2 AIC units</a:t>
+              <a:t>Penalty for adding parameter is 2 units and fit improves with complexity, so models with random data as predictor will be within 2 AIC. The complex model has no support even if within 2 AIC units</a:t>
             </a:r>
           </a:p>
           <a:p>
@@ -19124,16 +19192,6 @@
             <a:r>
               <a:rPr lang="en-US" altLang="en-US" dirty="0"/>
               <a:t>	</a:t>
-            </a:r>
-          </a:p>
-          <a:p>
-            <a:pPr marL="457200" indent="-457200">
-              <a:buFont typeface="Calibri Light" charset="0"/>
-              <a:buAutoNum type="arabicPeriod"/>
-            </a:pPr>
-            <a:r>
-              <a:rPr lang="en-US" altLang="en-US" dirty="0"/>
-              <a:t>Useful when you have lots of potentially correlated predictors</a:t>
             </a:r>
           </a:p>
           <a:p>
@@ -23850,7 +23908,7 @@
             </a:pPr>
             <a:r>
               <a:rPr lang="en-US" altLang="en-US" dirty="0"/>
-              <a:t>BIC chooses the “correct” model if it is in the set.</a:t>
+              <a:t>BIC chooses the “correct” model if it is in the set (asymptotically).</a:t>
             </a:r>
           </a:p>
         </p:txBody>
@@ -24053,7 +24111,7 @@
           <a:p>
             <a:pPr marL="457200" indent="-457200">
               <a:spcBef>
-                <a:spcPts val="1200"/>
+                <a:spcPts val="1000"/>
               </a:spcBef>
               <a:buFont typeface="Arial"/>
               <a:buChar char="•"/>
@@ -24080,7 +24138,7 @@
           <a:p>
             <a:pPr marL="457200" indent="-457200">
               <a:spcBef>
-                <a:spcPts val="1200"/>
+                <a:spcPts val="1000"/>
               </a:spcBef>
               <a:buFont typeface="Arial"/>
               <a:buChar char="•"/>
@@ -24101,78 +24159,110 @@
                 </a:solidFill>
                 <a:latin typeface="Arial"/>
               </a:rPr>
-              <a:t>They will (almost certainly) be correlated.</a:t>
+              <a:t>Extra predictors cost precision, and they are almost always correlated.</a:t>
             </a:r>
           </a:p>
           <a:p>
             <a:pPr marL="0" indent="0">
               <a:spcBef>
-                <a:spcPts val="1200"/>
+                <a:spcPts val="1000"/>
               </a:spcBef>
               <a:buNone/>
             </a:pPr>
             <a:r>
-              <a:rPr lang="en-US" sz="2200" dirty="0">
-                <a:solidFill>
-                  <a:srgbClr val="202040"/>
+              <a:rPr lang="en-US" sz="2000" b="1" dirty="0">
+                <a:solidFill>
+                  <a:srgbClr val="FF0000"/>
                 </a:solidFill>
                 <a:latin typeface="Arial"/>
               </a:rPr>
-              <a:t>Correlation between explanatory variables…</a:t>
+              <a:t>Too many predictors relative to sample size…</a:t>
             </a:r>
           </a:p>
           <a:p>
             <a:pPr marL="914400" indent="-457200">
               <a:spcBef>
-                <a:spcPts val="1200"/>
+                <a:spcPts val="600"/>
               </a:spcBef>
               <a:buFont typeface="Arial"/>
               <a:buChar char="–"/>
             </a:pPr>
             <a:r>
-              <a:rPr lang="en-US" sz="2200" dirty="0">
-                <a:solidFill>
-                  <a:srgbClr val="2E3192"/>
+              <a:rPr lang="en-US" sz="2000" dirty="0">
+                <a:solidFill>
+                  <a:srgbClr val="FF0000"/>
                 </a:solidFill>
                 <a:latin typeface="Arial"/>
               </a:rPr>
-              <a:t>makes it hard to identify important effects;</a:t>
+              <a:t>fits noise as if it were signal (overfitting), so out-of-sample prediction gets worse;</a:t>
             </a:r>
           </a:p>
           <a:p>
             <a:pPr marL="914400" indent="-457200">
               <a:spcBef>
-                <a:spcPts val="1200"/>
+                <a:spcPts val="600"/>
               </a:spcBef>
               <a:buFont typeface="Arial"/>
               <a:buChar char="–"/>
             </a:pPr>
             <a:r>
-              <a:rPr lang="en-US" sz="2200" dirty="0">
-                <a:solidFill>
-                  <a:srgbClr val="202040"/>
+              <a:rPr lang="en-US" sz="2000" dirty="0">
+                <a:solidFill>
+                  <a:srgbClr val="FF0000"/>
                 </a:solidFill>
                 <a:latin typeface="Arial"/>
               </a:rPr>
-              <a:t>causes bias in effect sizes/parameter estimates;</a:t>
+              <a:t>spends degrees of freedom, inflating variance of estimates and predictions.</a:t>
+            </a:r>
+          </a:p>
+          <a:p>
+            <a:pPr marL="0" indent="0">
+              <a:spcBef>
+                <a:spcPts val="1000"/>
+              </a:spcBef>
+              <a:buNone/>
+            </a:pPr>
+            <a:r>
+              <a:rPr lang="en-US" sz="2000" b="1" dirty="0">
+                <a:solidFill>
+                  <a:srgbClr val="2E3192"/>
+                </a:solidFill>
+                <a:latin typeface="Arial"/>
+              </a:rPr>
+              <a:t>Correlation among explanatory variables (collinearity)…</a:t>
             </a:r>
           </a:p>
           <a:p>
             <a:pPr marL="914400" indent="-457200">
               <a:spcBef>
-                <a:spcPts val="1200"/>
+                <a:spcPts val="600"/>
               </a:spcBef>
               <a:buFont typeface="Arial"/>
               <a:buChar char="–"/>
             </a:pPr>
             <a:r>
-              <a:rPr lang="en-US" sz="2200" dirty="0">
-                <a:solidFill>
-                  <a:srgbClr val="FF0000"/>
+              <a:rPr lang="en-US" sz="2000" dirty="0">
+                <a:solidFill>
+                  <a:srgbClr val="2E3192"/>
                 </a:solidFill>
                 <a:latin typeface="Arial"/>
               </a:rPr>
-              <a:t>leads to overfitting, and poor out-of-sample prediction.</a:t>
+              <a:t>inflates standard errors, so real effects are hard to detect;</a:t>
+            </a:r>
+          </a:p>
+          <a:p>
+            <a:pPr marL="914400" indent="-457200">
+              <a:spcBef>
+                <a:spcPts val="600"/>
+              </a:spcBef>
+              <a:buFont typeface="Arial"/>
+              <a:buChar char="–"/>
+            </a:pPr>
+            <a:r>
+              <a:rPr lang="en-US" sz="2000" dirty="0">
+                <a:latin typeface="Arial"/>
+              </a:rPr>
+              <a:t>makes individual coefficients unstable and hard to interpret — estimates are imprecise.</a:t>
             </a:r>
           </a:p>
         </p:txBody>
@@ -24180,7 +24270,7 @@
     </p:spTree>
     <p:extLst>
       <p:ext uri="{BB962C8B-B14F-4D97-AF65-F5344CB8AC3E}">
-        <p14:creationId xmlns:p14="http://schemas.microsoft.com/office/powerpoint/2010/main" val="688000367"/>
+        <p14:creationId xmlns:p14="http://schemas.microsoft.com/office/powerpoint/2010/main" val="3979102057"/>
       </p:ext>
     </p:extLst>
   </p:cSld>
@@ -25076,7 +25166,7 @@
           <p:nvPr>
             <p:extLst>
               <p:ext uri="{D42A27DB-BD31-4B8C-83A1-F6EECF244321}">
-                <p14:modId xmlns:p14="http://schemas.microsoft.com/office/powerpoint/2010/main" val="1009989168"/>
+                <p14:modId xmlns:p14="http://schemas.microsoft.com/office/powerpoint/2010/main" val="2337557339"/>
               </p:ext>
             </p:extLst>
           </p:nvPr>
@@ -25415,7 +25505,7 @@
                           <a:effectLst/>
                           <a:latin typeface="Arial" panose="020B0604020202020204" pitchFamily="34" charset="0"/>
                         </a:rPr>
-                        <a:t>None; compares improvement in likelihood to chi^2 distribution</a:t>
+                        <a:t>compares improvement in likelihood to chi^2 distribution</a:t>
                       </a:r>
                     </a:p>
                   </a:txBody>
@@ -27373,6 +27463,2403 @@
       </p:grpSpPr>
       <p:sp>
         <p:nvSpPr>
+          <p:cNvPr id="2" name="Title 1">
+            <a:extLst>
+              <a:ext uri="{FF2B5EF4-FFF2-40B4-BE49-F238E27FC236}">
+                <a16:creationId xmlns:a16="http://schemas.microsoft.com/office/drawing/2014/main" id="{AB9877AE-0C7C-1C8E-E668-89F57B9C7FBC}"/>
+              </a:ext>
+            </a:extLst>
+          </p:cNvPr>
+          <p:cNvSpPr>
+            <a:spLocks noGrp="1"/>
+          </p:cNvSpPr>
+          <p:nvPr>
+            <p:ph type="title"/>
+          </p:nvPr>
+        </p:nvSpPr>
+        <p:spPr/>
+        <p:txBody>
+          <a:bodyPr/>
+          <a:lstStyle/>
+          <a:p>
+            <a:pPr algn="ctr"/>
+            <a:r>
+              <a:rPr lang="en-US" sz="3600" dirty="0">
+                <a:solidFill>
+                  <a:srgbClr val="2E3192"/>
+                </a:solidFill>
+                <a:latin typeface="Arial"/>
+              </a:rPr>
+              <a:t>If the goal is prediction, is a linear model the right tool?</a:t>
+            </a:r>
+          </a:p>
+        </p:txBody>
+      </p:sp>
+      <p:sp>
+        <p:nvSpPr>
+          <p:cNvPr id="3" name="Content Placeholder 2">
+            <a:extLst>
+              <a:ext uri="{FF2B5EF4-FFF2-40B4-BE49-F238E27FC236}">
+                <a16:creationId xmlns:a16="http://schemas.microsoft.com/office/drawing/2014/main" id="{CFC3D346-BBD8-60E2-17C6-F31304EF519B}"/>
+              </a:ext>
+            </a:extLst>
+          </p:cNvPr>
+          <p:cNvSpPr>
+            <a:spLocks noGrp="1"/>
+          </p:cNvSpPr>
+          <p:nvPr>
+            <p:ph idx="1"/>
+          </p:nvPr>
+        </p:nvSpPr>
+        <p:spPr/>
+        <p:txBody>
+          <a:bodyPr/>
+          <a:lstStyle/>
+          <a:p>
+            <a:pPr marL="457200" indent="-457200">
+              <a:spcBef>
+                <a:spcPts val="1400"/>
+              </a:spcBef>
+              <a:buFont typeface="Arial"/>
+              <a:buChar char="•"/>
+            </a:pPr>
+            <a:r>
+              <a:rPr lang="en-US" sz="2200" dirty="0">
+                <a:solidFill>
+                  <a:srgbClr val="202040"/>
+                </a:solidFill>
+                <a:latin typeface="Arial"/>
+              </a:rPr>
+              <a:t>Cross-validation asks the right question: how well does this model predict data it has never seen?</a:t>
+            </a:r>
+          </a:p>
+          <a:p>
+            <a:pPr marL="457200" indent="-457200">
+              <a:spcBef>
+                <a:spcPts val="1400"/>
+              </a:spcBef>
+              <a:buFont typeface="Arial"/>
+              <a:buChar char="•"/>
+            </a:pPr>
+            <a:r>
+              <a:rPr lang="en-US" sz="2200" dirty="0">
+                <a:solidFill>
+                  <a:srgbClr val="202040"/>
+                </a:solidFill>
+                <a:latin typeface="Arial"/>
+              </a:rPr>
+              <a:t>But it can only compare the models you wrote down \u2014 and every one of them is a straight-line combination of the terms you chose.</a:t>
+            </a:r>
+          </a:p>
+          <a:p>
+            <a:pPr marL="457200" indent="-457200">
+              <a:spcBef>
+                <a:spcPts val="1400"/>
+              </a:spcBef>
+              <a:buFont typeface="Arial"/>
+              <a:buChar char="•"/>
+            </a:pPr>
+            <a:r>
+              <a:rPr lang="en-US" sz="2200" dirty="0">
+                <a:solidFill>
+                  <a:srgbClr val="202040"/>
+                </a:solidFill>
+                <a:latin typeface="Arial"/>
+              </a:rPr>
+              <a:t>Ecological responses are often nonlinear, full of thresholds, and full of interactions we would never think to write down.</a:t>
+            </a:r>
+          </a:p>
+          <a:p>
+            <a:pPr marL="457200" indent="0">
+              <a:spcBef>
+                <a:spcPts val="1800"/>
+              </a:spcBef>
+              <a:buNone/>
+            </a:pPr>
+            <a:r>
+              <a:rPr lang="en-US" sz="2200" b="1" dirty="0">
+                <a:solidFill>
+                  <a:srgbClr val="202040"/>
+                </a:solidFill>
+                <a:latin typeface="Arial"/>
+              </a:rPr>
+              <a:t>When prediction is the goal, there are tools built for that job. You should know they exist.</a:t>
+            </a:r>
+          </a:p>
+        </p:txBody>
+      </p:sp>
+    </p:spTree>
+    <p:extLst>
+      <p:ext uri="{BB962C8B-B14F-4D97-AF65-F5344CB8AC3E}">
+        <p14:creationId xmlns:p14="http://schemas.microsoft.com/office/powerpoint/2010/main" val="2403740663"/>
+      </p:ext>
+    </p:extLst>
+  </p:cSld>
+  <p:clrMapOvr>
+    <a:masterClrMapping/>
+  </p:clrMapOvr>
+</p:sld>
+</file>
+
+<file path=ppt/slides/slide44.xml><?xml version="1.0" encoding="utf-8"?>
+<p:sld xmlns:a="http://schemas.openxmlformats.org/drawingml/2006/main" xmlns:r="http://schemas.openxmlformats.org/officeDocument/2006/relationships" xmlns:p="http://schemas.openxmlformats.org/presentationml/2006/main">
+  <p:cSld>
+    <p:spTree>
+      <p:nvGrpSpPr>
+        <p:cNvPr id="1" name=""/>
+        <p:cNvGrpSpPr/>
+        <p:nvPr/>
+      </p:nvGrpSpPr>
+      <p:grpSpPr>
+        <a:xfrm>
+          <a:off x="0" y="0"/>
+          <a:ext cx="0" cy="0"/>
+          <a:chOff x="0" y="0"/>
+          <a:chExt cx="0" cy="0"/>
+        </a:xfrm>
+      </p:grpSpPr>
+      <p:sp>
+        <p:nvSpPr>
+          <p:cNvPr id="2" name="Title 1">
+            <a:extLst>
+              <a:ext uri="{FF2B5EF4-FFF2-40B4-BE49-F238E27FC236}">
+                <a16:creationId xmlns:a16="http://schemas.microsoft.com/office/drawing/2014/main" id="{B0EB9709-F652-79AD-E838-ED3130CE2C5F}"/>
+              </a:ext>
+            </a:extLst>
+          </p:cNvPr>
+          <p:cNvSpPr>
+            <a:spLocks noGrp="1"/>
+          </p:cNvSpPr>
+          <p:nvPr>
+            <p:ph type="title"/>
+          </p:nvPr>
+        </p:nvSpPr>
+        <p:spPr/>
+        <p:txBody>
+          <a:bodyPr/>
+          <a:lstStyle/>
+          <a:p>
+            <a:pPr algn="ctr">
+              <a:buNone/>
+            </a:pPr>
+            <a:r>
+              <a:rPr lang="en-US" sz="4000" dirty="0">
+                <a:solidFill>
+                  <a:srgbClr val="2E3192"/>
+                </a:solidFill>
+                <a:latin typeface="Arial"/>
+              </a:rPr>
+              <a:t>What a tree actually does</a:t>
+            </a:r>
+          </a:p>
+        </p:txBody>
+      </p:sp>
+      <p:sp>
+        <p:nvSpPr>
+          <p:cNvPr id="20" name="Label 21"/>
+          <p:cNvSpPr txBox="1"/>
+          <p:nvPr/>
+        </p:nvSpPr>
+        <p:spPr>
+          <a:xfrm>
+            <a:off x="508000" y="1739900"/>
+            <a:ext cx="11176000" cy="330200"/>
+          </a:xfrm>
+          <a:prstGeom prst="rect">
+            <a:avLst/>
+          </a:prstGeom>
+          <a:noFill/>
+        </p:spPr>
+        <p:txBody>
+          <a:bodyPr lIns="0" tIns="0" rIns="0" bIns="0" anchor="ctr">
+            <a:noAutofit/>
+          </a:bodyPr>
+          <a:lstStyle/>
+          <a:p>
+            <a:pPr algn="ctr">
+              <a:buNone/>
+            </a:pPr>
+            <a:r>
+              <a:rPr lang="en-US" sz="1500" dirty="0">
+                <a:solidFill>
+                  <a:srgbClr val="3A3A48"/>
+                </a:solidFill>
+                <a:latin typeface="Arial"/>
+              </a:rPr>
+              <a:t>Response: juvenile coho density (fish per 100 m²). Predictors: stream temperature, large wood, canopy cover.</a:t>
+            </a:r>
+          </a:p>
+        </p:txBody>
+      </p:sp>
+      <p:sp>
+        <p:nvSpPr>
+          <p:cNvPr id="21" name="Node 22"/>
+          <p:cNvSpPr/>
+          <p:nvPr/>
+        </p:nvSpPr>
+        <p:spPr>
+          <a:xfrm>
+            <a:off x="4826000" y="2133600"/>
+            <a:ext cx="2540000" cy="609600"/>
+          </a:xfrm>
+          <a:prstGeom prst="roundRect">
+            <a:avLst>
+              <a:gd name="adj" fmla="val 12000"/>
+            </a:avLst>
+          </a:prstGeom>
+          <a:solidFill>
+            <a:srgbClr val="E9EBF2"/>
+          </a:solidFill>
+          <a:ln w="12700">
+            <a:solidFill>
+              <a:srgbClr val="9A9AA8"/>
+            </a:solidFill>
+          </a:ln>
+        </p:spPr>
+        <p:txBody>
+          <a:bodyPr lIns="45720" tIns="27432" rIns="45720" bIns="27432" anchor="ctr">
+            <a:noAutofit/>
+          </a:bodyPr>
+          <a:lstStyle/>
+          <a:p>
+            <a:pPr algn="ctr">
+              <a:buNone/>
+            </a:pPr>
+            <a:r>
+              <a:rPr lang="en-US" sz="1600" b="1" dirty="0">
+                <a:solidFill>
+                  <a:srgbClr val="202040"/>
+                </a:solidFill>
+                <a:latin typeface="Arial"/>
+              </a:rPr>
+              <a:t>Temperature &lt; 16.5 °C</a:t>
+            </a:r>
+          </a:p>
+        </p:txBody>
+      </p:sp>
+      <p:sp>
+        <p:nvSpPr>
+          <p:cNvPr id="22" name="Node 23"/>
+          <p:cNvSpPr/>
+          <p:nvPr/>
+        </p:nvSpPr>
+        <p:spPr>
+          <a:xfrm>
+            <a:off x="1651000" y="3276600"/>
+            <a:ext cx="2794000" cy="609600"/>
+          </a:xfrm>
+          <a:prstGeom prst="roundRect">
+            <a:avLst>
+              <a:gd name="adj" fmla="val 12000"/>
+            </a:avLst>
+          </a:prstGeom>
+          <a:solidFill>
+            <a:srgbClr val="E9EBF2"/>
+          </a:solidFill>
+          <a:ln w="12700">
+            <a:solidFill>
+              <a:srgbClr val="9A9AA8"/>
+            </a:solidFill>
+          </a:ln>
+        </p:spPr>
+        <p:txBody>
+          <a:bodyPr lIns="45720" tIns="27432" rIns="45720" bIns="27432" anchor="ctr">
+            <a:noAutofit/>
+          </a:bodyPr>
+          <a:lstStyle/>
+          <a:p>
+            <a:pPr algn="ctr">
+              <a:buNone/>
+            </a:pPr>
+            <a:r>
+              <a:rPr lang="en-US" sz="1600" b="1" dirty="0">
+                <a:solidFill>
+                  <a:srgbClr val="202040"/>
+                </a:solidFill>
+                <a:latin typeface="Arial"/>
+              </a:rPr>
+              <a:t>Large wood ≥ 8 pieces</a:t>
+            </a:r>
+          </a:p>
+        </p:txBody>
+      </p:sp>
+      <p:sp>
+        <p:nvSpPr>
+          <p:cNvPr id="23" name="Node 24"/>
+          <p:cNvSpPr/>
+          <p:nvPr/>
+        </p:nvSpPr>
+        <p:spPr>
+          <a:xfrm>
+            <a:off x="7747000" y="3276600"/>
+            <a:ext cx="2794000" cy="609600"/>
+          </a:xfrm>
+          <a:prstGeom prst="roundRect">
+            <a:avLst>
+              <a:gd name="adj" fmla="val 12000"/>
+            </a:avLst>
+          </a:prstGeom>
+          <a:solidFill>
+            <a:srgbClr val="E9EBF2"/>
+          </a:solidFill>
+          <a:ln w="12700">
+            <a:solidFill>
+              <a:srgbClr val="9A9AA8"/>
+            </a:solidFill>
+          </a:ln>
+        </p:spPr>
+        <p:txBody>
+          <a:bodyPr lIns="45720" tIns="27432" rIns="45720" bIns="27432" anchor="ctr">
+            <a:noAutofit/>
+          </a:bodyPr>
+          <a:lstStyle/>
+          <a:p>
+            <a:pPr algn="ctr">
+              <a:buNone/>
+            </a:pPr>
+            <a:r>
+              <a:rPr lang="en-US" sz="1600" b="1" dirty="0">
+                <a:solidFill>
+                  <a:srgbClr val="202040"/>
+                </a:solidFill>
+                <a:latin typeface="Arial"/>
+              </a:rPr>
+              <a:t>Canopy cover ≥ 45%</a:t>
+            </a:r>
+          </a:p>
+        </p:txBody>
+      </p:sp>
+      <p:sp>
+        <p:nvSpPr>
+          <p:cNvPr id="24" name="Node 25"/>
+          <p:cNvSpPr/>
+          <p:nvPr/>
+        </p:nvSpPr>
+        <p:spPr>
+          <a:xfrm>
+            <a:off x="444500" y="4546600"/>
+            <a:ext cx="2159000" cy="762000"/>
+          </a:xfrm>
+          <a:prstGeom prst="roundRect">
+            <a:avLst>
+              <a:gd name="adj" fmla="val 12000"/>
+            </a:avLst>
+          </a:prstGeom>
+          <a:solidFill>
+            <a:srgbClr val="FFFFFF"/>
+          </a:solidFill>
+          <a:ln w="12700">
+            <a:solidFill>
+              <a:srgbClr val="202040"/>
+            </a:solidFill>
+          </a:ln>
+        </p:spPr>
+        <p:txBody>
+          <a:bodyPr lIns="45720" tIns="27432" rIns="45720" bIns="27432" anchor="ctr">
+            <a:noAutofit/>
+          </a:bodyPr>
+          <a:lstStyle/>
+          <a:p>
+            <a:pPr algn="ctr">
+              <a:buNone/>
+            </a:pPr>
+            <a:r>
+              <a:rPr lang="en-US" sz="1900" b="1" dirty="0">
+                <a:solidFill>
+                  <a:srgbClr val="202040"/>
+                </a:solidFill>
+                <a:latin typeface="Arial"/>
+              </a:rPr>
+              <a:t>24.3</a:t>
+            </a:r>
+          </a:p>
+          <a:p>
+            <a:pPr algn="ctr">
+              <a:buNone/>
+            </a:pPr>
+            <a:r>
+              <a:rPr lang="en-US" sz="1400" dirty="0">
+                <a:solidFill>
+                  <a:srgbClr val="3A3A48"/>
+                </a:solidFill>
+                <a:latin typeface="Arial"/>
+              </a:rPr>
+              <a:t>n = 31</a:t>
+            </a:r>
+          </a:p>
+        </p:txBody>
+      </p:sp>
+      <p:sp>
+        <p:nvSpPr>
+          <p:cNvPr id="25" name="Node 26"/>
+          <p:cNvSpPr/>
+          <p:nvPr/>
+        </p:nvSpPr>
+        <p:spPr>
+          <a:xfrm>
+            <a:off x="3492500" y="4546600"/>
+            <a:ext cx="2159000" cy="762000"/>
+          </a:xfrm>
+          <a:prstGeom prst="roundRect">
+            <a:avLst>
+              <a:gd name="adj" fmla="val 12000"/>
+            </a:avLst>
+          </a:prstGeom>
+          <a:solidFill>
+            <a:srgbClr val="FFFFFF"/>
+          </a:solidFill>
+          <a:ln w="12700">
+            <a:solidFill>
+              <a:srgbClr val="202040"/>
+            </a:solidFill>
+          </a:ln>
+        </p:spPr>
+        <p:txBody>
+          <a:bodyPr lIns="45720" tIns="27432" rIns="45720" bIns="27432" anchor="ctr">
+            <a:noAutofit/>
+          </a:bodyPr>
+          <a:lstStyle/>
+          <a:p>
+            <a:pPr algn="ctr">
+              <a:buNone/>
+            </a:pPr>
+            <a:r>
+              <a:rPr lang="en-US" sz="1900" b="1" dirty="0">
+                <a:solidFill>
+                  <a:srgbClr val="202040"/>
+                </a:solidFill>
+                <a:latin typeface="Arial"/>
+              </a:rPr>
+              <a:t>11.6</a:t>
+            </a:r>
+          </a:p>
+          <a:p>
+            <a:pPr algn="ctr">
+              <a:buNone/>
+            </a:pPr>
+            <a:r>
+              <a:rPr lang="en-US" sz="1400" dirty="0">
+                <a:solidFill>
+                  <a:srgbClr val="3A3A48"/>
+                </a:solidFill>
+                <a:latin typeface="Arial"/>
+              </a:rPr>
+              <a:t>n = 24</a:t>
+            </a:r>
+          </a:p>
+        </p:txBody>
+      </p:sp>
+      <p:sp>
+        <p:nvSpPr>
+          <p:cNvPr id="26" name="Node 27"/>
+          <p:cNvSpPr/>
+          <p:nvPr/>
+        </p:nvSpPr>
+        <p:spPr>
+          <a:xfrm>
+            <a:off x="6540500" y="4546600"/>
+            <a:ext cx="2159000" cy="762000"/>
+          </a:xfrm>
+          <a:prstGeom prst="roundRect">
+            <a:avLst>
+              <a:gd name="adj" fmla="val 12000"/>
+            </a:avLst>
+          </a:prstGeom>
+          <a:solidFill>
+            <a:srgbClr val="FFFFFF"/>
+          </a:solidFill>
+          <a:ln w="12700">
+            <a:solidFill>
+              <a:srgbClr val="202040"/>
+            </a:solidFill>
+          </a:ln>
+        </p:spPr>
+        <p:txBody>
+          <a:bodyPr lIns="45720" tIns="27432" rIns="45720" bIns="27432" anchor="ctr">
+            <a:noAutofit/>
+          </a:bodyPr>
+          <a:lstStyle/>
+          <a:p>
+            <a:pPr algn="ctr">
+              <a:buNone/>
+            </a:pPr>
+            <a:r>
+              <a:rPr lang="en-US" sz="1900" b="1" dirty="0">
+                <a:solidFill>
+                  <a:srgbClr val="202040"/>
+                </a:solidFill>
+                <a:latin typeface="Arial"/>
+              </a:rPr>
+              <a:t>7.2</a:t>
+            </a:r>
+          </a:p>
+          <a:p>
+            <a:pPr algn="ctr">
+              <a:buNone/>
+            </a:pPr>
+            <a:r>
+              <a:rPr lang="en-US" sz="1400" dirty="0">
+                <a:solidFill>
+                  <a:srgbClr val="3A3A48"/>
+                </a:solidFill>
+                <a:latin typeface="Arial"/>
+              </a:rPr>
+              <a:t>n = 38</a:t>
+            </a:r>
+          </a:p>
+        </p:txBody>
+      </p:sp>
+      <p:sp>
+        <p:nvSpPr>
+          <p:cNvPr id="27" name="Node 28"/>
+          <p:cNvSpPr/>
+          <p:nvPr/>
+        </p:nvSpPr>
+        <p:spPr>
+          <a:xfrm>
+            <a:off x="9588500" y="4546600"/>
+            <a:ext cx="2159000" cy="762000"/>
+          </a:xfrm>
+          <a:prstGeom prst="roundRect">
+            <a:avLst>
+              <a:gd name="adj" fmla="val 12000"/>
+            </a:avLst>
+          </a:prstGeom>
+          <a:solidFill>
+            <a:srgbClr val="FFFFFF"/>
+          </a:solidFill>
+          <a:ln w="12700">
+            <a:solidFill>
+              <a:srgbClr val="202040"/>
+            </a:solidFill>
+          </a:ln>
+        </p:spPr>
+        <p:txBody>
+          <a:bodyPr lIns="45720" tIns="27432" rIns="45720" bIns="27432" anchor="ctr">
+            <a:noAutofit/>
+          </a:bodyPr>
+          <a:lstStyle/>
+          <a:p>
+            <a:pPr algn="ctr">
+              <a:buNone/>
+            </a:pPr>
+            <a:r>
+              <a:rPr lang="en-US" sz="1900" b="1" dirty="0">
+                <a:solidFill>
+                  <a:srgbClr val="202040"/>
+                </a:solidFill>
+                <a:latin typeface="Arial"/>
+              </a:rPr>
+              <a:t>2.1</a:t>
+            </a:r>
+          </a:p>
+          <a:p>
+            <a:pPr algn="ctr">
+              <a:buNone/>
+            </a:pPr>
+            <a:r>
+              <a:rPr lang="en-US" sz="1400" dirty="0">
+                <a:solidFill>
+                  <a:srgbClr val="3A3A48"/>
+                </a:solidFill>
+                <a:latin typeface="Arial"/>
+              </a:rPr>
+              <a:t>n = 27</a:t>
+            </a:r>
+          </a:p>
+        </p:txBody>
+      </p:sp>
+      <p:cxnSp>
+        <p:nvCxnSpPr>
+          <p:cNvPr id="28" name="Edge 29"/>
+          <p:cNvCxnSpPr/>
+          <p:nvPr/>
+        </p:nvCxnSpPr>
+        <p:spPr>
+          <a:xfrm flipH="1">
+            <a:off x="3048000" y="2743200"/>
+            <a:ext cx="3048000" cy="533400"/>
+          </a:xfrm>
+          <a:prstGeom prst="line">
+            <a:avLst/>
+          </a:prstGeom>
+          <a:ln w="15875">
+            <a:solidFill>
+              <a:srgbClr val="8A8A96"/>
+            </a:solidFill>
+          </a:ln>
+        </p:spPr>
+      </p:cxnSp>
+      <p:cxnSp>
+        <p:nvCxnSpPr>
+          <p:cNvPr id="29" name="Edge 30"/>
+          <p:cNvCxnSpPr/>
+          <p:nvPr/>
+        </p:nvCxnSpPr>
+        <p:spPr>
+          <a:xfrm>
+            <a:off x="6096000" y="2743200"/>
+            <a:ext cx="3048000" cy="533400"/>
+          </a:xfrm>
+          <a:prstGeom prst="line">
+            <a:avLst/>
+          </a:prstGeom>
+          <a:ln w="15875">
+            <a:solidFill>
+              <a:srgbClr val="8A8A96"/>
+            </a:solidFill>
+          </a:ln>
+        </p:spPr>
+      </p:cxnSp>
+      <p:cxnSp>
+        <p:nvCxnSpPr>
+          <p:cNvPr id="30" name="Edge 31"/>
+          <p:cNvCxnSpPr/>
+          <p:nvPr/>
+        </p:nvCxnSpPr>
+        <p:spPr>
+          <a:xfrm flipH="1">
+            <a:off x="1524000" y="3886200"/>
+            <a:ext cx="1524000" cy="660400"/>
+          </a:xfrm>
+          <a:prstGeom prst="line">
+            <a:avLst/>
+          </a:prstGeom>
+          <a:ln w="15875">
+            <a:solidFill>
+              <a:srgbClr val="8A8A96"/>
+            </a:solidFill>
+          </a:ln>
+        </p:spPr>
+      </p:cxnSp>
+      <p:cxnSp>
+        <p:nvCxnSpPr>
+          <p:cNvPr id="31" name="Edge 32"/>
+          <p:cNvCxnSpPr/>
+          <p:nvPr/>
+        </p:nvCxnSpPr>
+        <p:spPr>
+          <a:xfrm>
+            <a:off x="3048000" y="3886200"/>
+            <a:ext cx="1524000" cy="660400"/>
+          </a:xfrm>
+          <a:prstGeom prst="line">
+            <a:avLst/>
+          </a:prstGeom>
+          <a:ln w="15875">
+            <a:solidFill>
+              <a:srgbClr val="8A8A96"/>
+            </a:solidFill>
+          </a:ln>
+        </p:spPr>
+      </p:cxnSp>
+      <p:cxnSp>
+        <p:nvCxnSpPr>
+          <p:cNvPr id="32" name="Edge 33"/>
+          <p:cNvCxnSpPr/>
+          <p:nvPr/>
+        </p:nvCxnSpPr>
+        <p:spPr>
+          <a:xfrm flipH="1">
+            <a:off x="7620000" y="3886200"/>
+            <a:ext cx="1524000" cy="660400"/>
+          </a:xfrm>
+          <a:prstGeom prst="line">
+            <a:avLst/>
+          </a:prstGeom>
+          <a:ln w="15875">
+            <a:solidFill>
+              <a:srgbClr val="8A8A96"/>
+            </a:solidFill>
+          </a:ln>
+        </p:spPr>
+      </p:cxnSp>
+      <p:cxnSp>
+        <p:nvCxnSpPr>
+          <p:cNvPr id="33" name="Edge 34"/>
+          <p:cNvCxnSpPr/>
+          <p:nvPr/>
+        </p:nvCxnSpPr>
+        <p:spPr>
+          <a:xfrm>
+            <a:off x="9144000" y="3886200"/>
+            <a:ext cx="1524000" cy="660400"/>
+          </a:xfrm>
+          <a:prstGeom prst="line">
+            <a:avLst/>
+          </a:prstGeom>
+          <a:ln w="15875">
+            <a:solidFill>
+              <a:srgbClr val="8A8A96"/>
+            </a:solidFill>
+          </a:ln>
+        </p:spPr>
+      </p:cxnSp>
+      <p:sp>
+        <p:nvSpPr>
+          <p:cNvPr id="34" name="Label 35"/>
+          <p:cNvSpPr txBox="1"/>
+          <p:nvPr/>
+        </p:nvSpPr>
+        <p:spPr>
+          <a:xfrm>
+            <a:off x="4064000" y="2794000"/>
+            <a:ext cx="762000" cy="254000"/>
+          </a:xfrm>
+          <a:prstGeom prst="rect">
+            <a:avLst/>
+          </a:prstGeom>
+          <a:noFill/>
+        </p:spPr>
+        <p:txBody>
+          <a:bodyPr lIns="0" tIns="0" rIns="0" bIns="0" anchor="ctr">
+            <a:noAutofit/>
+          </a:bodyPr>
+          <a:lstStyle/>
+          <a:p>
+            <a:pPr algn="ctr">
+              <a:buNone/>
+            </a:pPr>
+            <a:r>
+              <a:rPr lang="en-US" sz="1400" dirty="0">
+                <a:solidFill>
+                  <a:srgbClr val="3A3A48"/>
+                </a:solidFill>
+                <a:latin typeface="Arial"/>
+              </a:rPr>
+              <a:t>yes</a:t>
+            </a:r>
+          </a:p>
+        </p:txBody>
+      </p:sp>
+      <p:sp>
+        <p:nvSpPr>
+          <p:cNvPr id="35" name="Label 36"/>
+          <p:cNvSpPr txBox="1"/>
+          <p:nvPr/>
+        </p:nvSpPr>
+        <p:spPr>
+          <a:xfrm>
+            <a:off x="7366000" y="2794000"/>
+            <a:ext cx="762000" cy="254000"/>
+          </a:xfrm>
+          <a:prstGeom prst="rect">
+            <a:avLst/>
+          </a:prstGeom>
+          <a:noFill/>
+        </p:spPr>
+        <p:txBody>
+          <a:bodyPr lIns="0" tIns="0" rIns="0" bIns="0" anchor="ctr">
+            <a:noAutofit/>
+          </a:bodyPr>
+          <a:lstStyle/>
+          <a:p>
+            <a:pPr algn="ctr">
+              <a:buNone/>
+            </a:pPr>
+            <a:r>
+              <a:rPr lang="en-US" sz="1400" dirty="0">
+                <a:solidFill>
+                  <a:srgbClr val="3A3A48"/>
+                </a:solidFill>
+                <a:latin typeface="Arial"/>
+              </a:rPr>
+              <a:t>no</a:t>
+            </a:r>
+          </a:p>
+        </p:txBody>
+      </p:sp>
+      <p:sp>
+        <p:nvSpPr>
+          <p:cNvPr id="36" name="Label 37"/>
+          <p:cNvSpPr txBox="1"/>
+          <p:nvPr/>
+        </p:nvSpPr>
+        <p:spPr>
+          <a:xfrm>
+            <a:off x="1879600" y="3987800"/>
+            <a:ext cx="762000" cy="254000"/>
+          </a:xfrm>
+          <a:prstGeom prst="rect">
+            <a:avLst/>
+          </a:prstGeom>
+          <a:noFill/>
+        </p:spPr>
+        <p:txBody>
+          <a:bodyPr lIns="0" tIns="0" rIns="0" bIns="0" anchor="ctr">
+            <a:noAutofit/>
+          </a:bodyPr>
+          <a:lstStyle/>
+          <a:p>
+            <a:pPr algn="ctr">
+              <a:buNone/>
+            </a:pPr>
+            <a:r>
+              <a:rPr lang="en-US" sz="1400" dirty="0">
+                <a:solidFill>
+                  <a:srgbClr val="3A3A48"/>
+                </a:solidFill>
+                <a:latin typeface="Arial"/>
+              </a:rPr>
+              <a:t>yes</a:t>
+            </a:r>
+          </a:p>
+        </p:txBody>
+      </p:sp>
+      <p:sp>
+        <p:nvSpPr>
+          <p:cNvPr id="37" name="Label 38"/>
+          <p:cNvSpPr txBox="1"/>
+          <p:nvPr/>
+        </p:nvSpPr>
+        <p:spPr>
+          <a:xfrm>
+            <a:off x="3454400" y="3987800"/>
+            <a:ext cx="762000" cy="254000"/>
+          </a:xfrm>
+          <a:prstGeom prst="rect">
+            <a:avLst/>
+          </a:prstGeom>
+          <a:noFill/>
+        </p:spPr>
+        <p:txBody>
+          <a:bodyPr lIns="0" tIns="0" rIns="0" bIns="0" anchor="ctr">
+            <a:noAutofit/>
+          </a:bodyPr>
+          <a:lstStyle/>
+          <a:p>
+            <a:pPr algn="ctr">
+              <a:buNone/>
+            </a:pPr>
+            <a:r>
+              <a:rPr lang="en-US" sz="1400" dirty="0">
+                <a:solidFill>
+                  <a:srgbClr val="3A3A48"/>
+                </a:solidFill>
+                <a:latin typeface="Arial"/>
+              </a:rPr>
+              <a:t>no</a:t>
+            </a:r>
+          </a:p>
+        </p:txBody>
+      </p:sp>
+      <p:sp>
+        <p:nvSpPr>
+          <p:cNvPr id="38" name="Label 39"/>
+          <p:cNvSpPr txBox="1"/>
+          <p:nvPr/>
+        </p:nvSpPr>
+        <p:spPr>
+          <a:xfrm>
+            <a:off x="7975600" y="3987800"/>
+            <a:ext cx="762000" cy="254000"/>
+          </a:xfrm>
+          <a:prstGeom prst="rect">
+            <a:avLst/>
+          </a:prstGeom>
+          <a:noFill/>
+        </p:spPr>
+        <p:txBody>
+          <a:bodyPr lIns="0" tIns="0" rIns="0" bIns="0" anchor="ctr">
+            <a:noAutofit/>
+          </a:bodyPr>
+          <a:lstStyle/>
+          <a:p>
+            <a:pPr algn="ctr">
+              <a:buNone/>
+            </a:pPr>
+            <a:r>
+              <a:rPr lang="en-US" sz="1400" dirty="0">
+                <a:solidFill>
+                  <a:srgbClr val="3A3A48"/>
+                </a:solidFill>
+                <a:latin typeface="Arial"/>
+              </a:rPr>
+              <a:t>yes</a:t>
+            </a:r>
+          </a:p>
+        </p:txBody>
+      </p:sp>
+      <p:sp>
+        <p:nvSpPr>
+          <p:cNvPr id="39" name="Label 40"/>
+          <p:cNvSpPr txBox="1"/>
+          <p:nvPr/>
+        </p:nvSpPr>
+        <p:spPr>
+          <a:xfrm>
+            <a:off x="9550400" y="3987800"/>
+            <a:ext cx="762000" cy="254000"/>
+          </a:xfrm>
+          <a:prstGeom prst="rect">
+            <a:avLst/>
+          </a:prstGeom>
+          <a:noFill/>
+        </p:spPr>
+        <p:txBody>
+          <a:bodyPr lIns="0" tIns="0" rIns="0" bIns="0" anchor="ctr">
+            <a:noAutofit/>
+          </a:bodyPr>
+          <a:lstStyle/>
+          <a:p>
+            <a:pPr algn="ctr">
+              <a:buNone/>
+            </a:pPr>
+            <a:r>
+              <a:rPr lang="en-US" sz="1400" dirty="0">
+                <a:solidFill>
+                  <a:srgbClr val="3A3A48"/>
+                </a:solidFill>
+                <a:latin typeface="Arial"/>
+              </a:rPr>
+              <a:t>no</a:t>
+            </a:r>
+          </a:p>
+        </p:txBody>
+      </p:sp>
+      <p:sp>
+        <p:nvSpPr>
+          <p:cNvPr id="40" name="Label 41"/>
+          <p:cNvSpPr txBox="1"/>
+          <p:nvPr/>
+        </p:nvSpPr>
+        <p:spPr>
+          <a:xfrm>
+            <a:off x="508000" y="5537200"/>
+            <a:ext cx="11176000" cy="711200"/>
+          </a:xfrm>
+          <a:prstGeom prst="rect">
+            <a:avLst/>
+          </a:prstGeom>
+          <a:noFill/>
+        </p:spPr>
+        <p:txBody>
+          <a:bodyPr lIns="0" tIns="0" rIns="0" bIns="0" anchor="ctr">
+            <a:noAutofit/>
+          </a:bodyPr>
+          <a:lstStyle/>
+          <a:p>
+            <a:pPr algn="ctr">
+              <a:buNone/>
+            </a:pPr>
+            <a:r>
+              <a:rPr lang="en-US" sz="1600" dirty="0">
+                <a:solidFill>
+                  <a:srgbClr val="202040"/>
+                </a:solidFill>
+                <a:latin typeface="Arial"/>
+              </a:rPr>
+              <a:t>Every observation lands in one leaf; the prediction is the mean of the training data in that leaf.</a:t>
+            </a:r>
+          </a:p>
+          <a:p>
+            <a:pPr algn="ctr">
+              <a:buNone/>
+            </a:pPr>
+            <a:r>
+              <a:rPr lang="en-US" sz="1600" dirty="0">
+                <a:solidFill>
+                  <a:srgbClr val="202040"/>
+                </a:solidFill>
+                <a:latin typeface="Arial"/>
+              </a:rPr>
+              <a:t>The wood split applies only in cold streams — an interaction nobody had to specify.</a:t>
+            </a:r>
+          </a:p>
+        </p:txBody>
+      </p:sp>
+    </p:spTree>
+    <p:extLst>
+      <p:ext uri="{BB962C8B-B14F-4D97-AF65-F5344CB8AC3E}">
+        <p14:creationId xmlns:p14="http://schemas.microsoft.com/office/powerpoint/2010/main" val="3640571853"/>
+      </p:ext>
+    </p:extLst>
+  </p:cSld>
+  <p:clrMapOvr>
+    <a:masterClrMapping/>
+  </p:clrMapOvr>
+</p:sld>
+</file>
+
+<file path=ppt/slides/slide45.xml><?xml version="1.0" encoding="utf-8"?>
+<p:sld xmlns:a="http://schemas.openxmlformats.org/drawingml/2006/main" xmlns:r="http://schemas.openxmlformats.org/officeDocument/2006/relationships" xmlns:p="http://schemas.openxmlformats.org/presentationml/2006/main">
+  <p:cSld>
+    <p:spTree>
+      <p:nvGrpSpPr>
+        <p:cNvPr id="1" name=""/>
+        <p:cNvGrpSpPr/>
+        <p:nvPr/>
+      </p:nvGrpSpPr>
+      <p:grpSpPr>
+        <a:xfrm>
+          <a:off x="0" y="0"/>
+          <a:ext cx="0" cy="0"/>
+          <a:chOff x="0" y="0"/>
+          <a:chExt cx="0" cy="0"/>
+        </a:xfrm>
+      </p:grpSpPr>
+      <p:sp>
+        <p:nvSpPr>
+          <p:cNvPr id="2" name="Title 1">
+            <a:extLst>
+              <a:ext uri="{FF2B5EF4-FFF2-40B4-BE49-F238E27FC236}">
+                <a16:creationId xmlns:a16="http://schemas.microsoft.com/office/drawing/2014/main" id="{A75B0619-0146-6E35-8A65-6FBA5F3242B1}"/>
+              </a:ext>
+            </a:extLst>
+          </p:cNvPr>
+          <p:cNvSpPr>
+            <a:spLocks noGrp="1"/>
+          </p:cNvSpPr>
+          <p:nvPr>
+            <p:ph type="title"/>
+          </p:nvPr>
+        </p:nvSpPr>
+        <p:spPr/>
+        <p:txBody>
+          <a:bodyPr/>
+          <a:lstStyle/>
+          <a:p>
+            <a:pPr algn="ctr">
+              <a:buNone/>
+            </a:pPr>
+            <a:r>
+              <a:rPr lang="en-US" sz="4000" dirty="0">
+                <a:solidFill>
+                  <a:srgbClr val="2E3192"/>
+                </a:solidFill>
+                <a:latin typeface="Arial"/>
+              </a:rPr>
+              <a:t>From one tree to many</a:t>
+            </a:r>
+          </a:p>
+        </p:txBody>
+      </p:sp>
+      <p:sp>
+        <p:nvSpPr>
+          <p:cNvPr id="3" name="Content Placeholder 2">
+            <a:extLst>
+              <a:ext uri="{FF2B5EF4-FFF2-40B4-BE49-F238E27FC236}">
+                <a16:creationId xmlns:a16="http://schemas.microsoft.com/office/drawing/2014/main" id="{4E5BD98B-CE2E-9959-0F16-96FB88A803B0}"/>
+              </a:ext>
+            </a:extLst>
+          </p:cNvPr>
+          <p:cNvSpPr>
+            <a:spLocks noGrp="1"/>
+          </p:cNvSpPr>
+          <p:nvPr>
+            <p:ph idx="1"/>
+          </p:nvPr>
+        </p:nvSpPr>
+        <p:spPr/>
+        <p:txBody>
+          <a:bodyPr/>
+          <a:lstStyle/>
+          <a:p>
+            <a:pPr marL="457200" indent="-457200">
+              <a:spcBef>
+                <a:spcPts val="1400"/>
+              </a:spcBef>
+              <a:buFont typeface="Arial"/>
+              <a:buChar char="•"/>
+            </a:pPr>
+            <a:r>
+              <a:rPr lang="en-US" sz="2200" dirty="0">
+                <a:solidFill>
+                  <a:srgbClr val="202040"/>
+                </a:solidFill>
+                <a:latin typeface="Arial"/>
+              </a:rPr>
+              <a:t>A single tree is easy to read, but unstable — change a few data points and the splits change.</a:t>
+            </a:r>
+          </a:p>
+          <a:p>
+            <a:pPr marL="457200" indent="-457200">
+              <a:spcBef>
+                <a:spcPts val="1400"/>
+              </a:spcBef>
+              <a:buFont typeface="Arial"/>
+              <a:buChar char="•"/>
+            </a:pPr>
+            <a:r>
+              <a:rPr lang="en-US" sz="2200" dirty="0">
+                <a:solidFill>
+                  <a:srgbClr val="202040"/>
+                </a:solidFill>
+                <a:latin typeface="Arial"/>
+              </a:rPr>
+              <a:t>So we use many trees instead of one. Two versions of this idea are everywhere in ecology:</a:t>
+            </a:r>
+          </a:p>
+          <a:p>
+            <a:pPr marL="914400" lvl="1" indent="-457200">
+              <a:spcBef>
+                <a:spcPts val="1000"/>
+              </a:spcBef>
+              <a:buFont typeface="Arial"/>
+              <a:buChar char="–"/>
+            </a:pPr>
+            <a:r>
+              <a:rPr lang="en-US" sz="2000" b="1" dirty="0">
+                <a:solidFill>
+                  <a:srgbClr val="202040"/>
+                </a:solidFill>
+                <a:latin typeface="Arial"/>
+              </a:rPr>
+              <a:t>Random forests: </a:t>
+            </a:r>
+            <a:r>
+              <a:rPr lang="en-US" sz="2000" dirty="0">
+                <a:solidFill>
+                  <a:srgbClr val="202040"/>
+                </a:solidFill>
+                <a:latin typeface="Arial"/>
+              </a:rPr>
+              <a:t>grow hundreds of trees on resampled data, then average them.</a:t>
+            </a:r>
+          </a:p>
+          <a:p>
+            <a:pPr marL="914400" lvl="1" indent="-457200">
+              <a:spcBef>
+                <a:spcPts val="1000"/>
+              </a:spcBef>
+              <a:buFont typeface="Arial"/>
+              <a:buChar char="–"/>
+            </a:pPr>
+            <a:r>
+              <a:rPr lang="en-US" sz="2000" b="1" dirty="0">
+                <a:solidFill>
+                  <a:srgbClr val="202040"/>
+                </a:solidFill>
+                <a:latin typeface="Arial"/>
+              </a:rPr>
+              <a:t>Boosted regression trees: </a:t>
+            </a:r>
+            <a:r>
+              <a:rPr lang="en-US" sz="2000" dirty="0">
+                <a:solidFill>
+                  <a:srgbClr val="202040"/>
+                </a:solidFill>
+                <a:latin typeface="Arial"/>
+              </a:rPr>
+              <a:t>add trees one at a time, each improving on the last.</a:t>
+            </a:r>
+          </a:p>
+          <a:p>
+            <a:pPr marL="457200" indent="0">
+              <a:spcBef>
+                <a:spcPts val="1800"/>
+              </a:spcBef>
+              <a:buNone/>
+            </a:pPr>
+            <a:r>
+              <a:rPr lang="en-US" sz="2200" b="1" dirty="0">
+                <a:solidFill>
+                  <a:srgbClr val="202040"/>
+                </a:solidFill>
+                <a:latin typeface="Arial"/>
+              </a:rPr>
+              <a:t>What you get back is a prediction, not an equation to interpret.</a:t>
+            </a:r>
+          </a:p>
+        </p:txBody>
+      </p:sp>
+    </p:spTree>
+    <p:extLst>
+      <p:ext uri="{BB962C8B-B14F-4D97-AF65-F5344CB8AC3E}">
+        <p14:creationId xmlns:p14="http://schemas.microsoft.com/office/powerpoint/2010/main" val="4075133334"/>
+      </p:ext>
+    </p:extLst>
+  </p:cSld>
+  <p:clrMapOvr>
+    <a:masterClrMapping/>
+  </p:clrMapOvr>
+</p:sld>
+</file>
+
+<file path=ppt/slides/slide46.xml><?xml version="1.0" encoding="utf-8"?>
+<p:sld xmlns:a="http://schemas.openxmlformats.org/drawingml/2006/main" xmlns:r="http://schemas.openxmlformats.org/officeDocument/2006/relationships" xmlns:p="http://schemas.openxmlformats.org/presentationml/2006/main">
+  <p:cSld>
+    <p:spTree>
+      <p:nvGrpSpPr>
+        <p:cNvPr id="1" name=""/>
+        <p:cNvGrpSpPr/>
+        <p:nvPr/>
+      </p:nvGrpSpPr>
+      <p:grpSpPr>
+        <a:xfrm>
+          <a:off x="0" y="0"/>
+          <a:ext cx="0" cy="0"/>
+          <a:chOff x="0" y="0"/>
+          <a:chExt cx="0" cy="0"/>
+        </a:xfrm>
+      </p:grpSpPr>
+      <p:sp>
+        <p:nvSpPr>
+          <p:cNvPr id="2" name="Title 1">
+            <a:extLst>
+              <a:ext uri="{FF2B5EF4-FFF2-40B4-BE49-F238E27FC236}">
+                <a16:creationId xmlns:a16="http://schemas.microsoft.com/office/drawing/2014/main" id="{8BF38C1A-2F69-0587-596C-F3CEB706B2B9}"/>
+              </a:ext>
+            </a:extLst>
+          </p:cNvPr>
+          <p:cNvSpPr>
+            <a:spLocks noGrp="1"/>
+          </p:cNvSpPr>
+          <p:nvPr>
+            <p:ph type="title"/>
+          </p:nvPr>
+        </p:nvSpPr>
+        <p:spPr/>
+        <p:txBody>
+          <a:bodyPr/>
+          <a:lstStyle/>
+          <a:p>
+            <a:pPr algn="ctr">
+              <a:buNone/>
+            </a:pPr>
+            <a:r>
+              <a:rPr lang="en-US" sz="4000" dirty="0">
+                <a:solidFill>
+                  <a:srgbClr val="2E3192"/>
+                </a:solidFill>
+                <a:latin typeface="Arial"/>
+              </a:rPr>
+              <a:t>Two ways to use many trees</a:t>
+            </a:r>
+          </a:p>
+        </p:txBody>
+      </p:sp>
+      <p:cxnSp>
+        <p:nvCxnSpPr>
+          <p:cNvPr id="30" name="Divider"/>
+          <p:cNvCxnSpPr/>
+          <p:nvPr/>
+        </p:nvCxnSpPr>
+        <p:spPr>
+          <a:xfrm>
+            <a:off x="6096000" y="1841500"/>
+            <a:ext cx="0" cy="4064000"/>
+          </a:xfrm>
+          <a:prstGeom prst="line">
+            <a:avLst/>
+          </a:prstGeom>
+          <a:ln w="9525">
+            <a:solidFill>
+              <a:srgbClr val="C8C8D0"/>
+            </a:solidFill>
+          </a:ln>
+        </p:spPr>
+      </p:cxnSp>
+      <p:sp>
+        <p:nvSpPr>
+          <p:cNvPr id="31" name="Text 32"/>
+          <p:cNvSpPr txBox="1"/>
+          <p:nvPr/>
+        </p:nvSpPr>
+        <p:spPr>
+          <a:xfrm>
+            <a:off x="508000" y="1854200"/>
+            <a:ext cx="5461000" cy="304800"/>
+          </a:xfrm>
+          <a:prstGeom prst="rect">
+            <a:avLst/>
+          </a:prstGeom>
+          <a:noFill/>
+        </p:spPr>
+        <p:txBody>
+          <a:bodyPr lIns="0" tIns="0" rIns="0" bIns="0" anchor="t">
+            <a:noAutofit/>
+          </a:bodyPr>
+          <a:lstStyle/>
+          <a:p>
+            <a:pPr algn="ctr">
+              <a:buNone/>
+            </a:pPr>
+            <a:r>
+              <a:rPr lang="en-US" sz="1700" b="1" dirty="0">
+                <a:solidFill>
+                  <a:srgbClr val="202040"/>
+                </a:solidFill>
+                <a:latin typeface="Arial"/>
+              </a:rPr>
+              <a:t>Random forest: many trees, averaged</a:t>
+            </a:r>
+          </a:p>
+        </p:txBody>
+      </p:sp>
+      <p:sp>
+        <p:nvSpPr>
+          <p:cNvPr id="32" name="Box 33"/>
+          <p:cNvSpPr/>
+          <p:nvPr/>
+        </p:nvSpPr>
+        <p:spPr>
+          <a:xfrm>
+            <a:off x="2095500" y="2311400"/>
+            <a:ext cx="2286000" cy="431800"/>
+          </a:xfrm>
+          <a:prstGeom prst="roundRect">
+            <a:avLst>
+              <a:gd name="adj" fmla="val 12000"/>
+            </a:avLst>
+          </a:prstGeom>
+          <a:solidFill>
+            <a:srgbClr val="E9EBF2"/>
+          </a:solidFill>
+          <a:ln w="12700">
+            <a:solidFill>
+              <a:srgbClr val="9A9AA8"/>
+            </a:solidFill>
+          </a:ln>
+        </p:spPr>
+        <p:txBody>
+          <a:bodyPr lIns="45720" tIns="18288" rIns="45720" bIns="18288" anchor="ctr">
+            <a:noAutofit/>
+          </a:bodyPr>
+          <a:lstStyle/>
+          <a:p>
+            <a:pPr algn="ctr">
+              <a:buNone/>
+            </a:pPr>
+            <a:r>
+              <a:rPr lang="en-US" sz="1500" dirty="0">
+                <a:solidFill>
+                  <a:srgbClr val="202040"/>
+                </a:solidFill>
+                <a:latin typeface="Arial"/>
+              </a:rPr>
+              <a:t>Full dataset</a:t>
+            </a:r>
+          </a:p>
+        </p:txBody>
+      </p:sp>
+      <p:cxnSp>
+        <p:nvCxnSpPr>
+          <p:cNvPr id="33" name="Arrow 34"/>
+          <p:cNvCxnSpPr/>
+          <p:nvPr/>
+        </p:nvCxnSpPr>
+        <p:spPr>
+          <a:xfrm flipH="1">
+            <a:off x="1371600" y="2743200"/>
+            <a:ext cx="1866900" cy="431800"/>
+          </a:xfrm>
+          <a:prstGeom prst="line">
+            <a:avLst/>
+          </a:prstGeom>
+          <a:ln w="15875">
+            <a:solidFill>
+              <a:srgbClr val="8A8A96"/>
+            </a:solidFill>
+            <a:tailEnd type="triangle" w="med" len="med"/>
+          </a:ln>
+        </p:spPr>
+      </p:cxnSp>
+      <p:cxnSp>
+        <p:nvCxnSpPr>
+          <p:cNvPr id="34" name="Arrow 35"/>
+          <p:cNvCxnSpPr/>
+          <p:nvPr/>
+        </p:nvCxnSpPr>
+        <p:spPr>
+          <a:xfrm flipH="1">
+            <a:off x="3048000" y="2743200"/>
+            <a:ext cx="190500" cy="431800"/>
+          </a:xfrm>
+          <a:prstGeom prst="line">
+            <a:avLst/>
+          </a:prstGeom>
+          <a:ln w="15875">
+            <a:solidFill>
+              <a:srgbClr val="8A8A96"/>
+            </a:solidFill>
+            <a:tailEnd type="triangle" w="med" len="med"/>
+          </a:ln>
+        </p:spPr>
+      </p:cxnSp>
+      <p:cxnSp>
+        <p:nvCxnSpPr>
+          <p:cNvPr id="35" name="Arrow 36"/>
+          <p:cNvCxnSpPr/>
+          <p:nvPr/>
+        </p:nvCxnSpPr>
+        <p:spPr>
+          <a:xfrm>
+            <a:off x="3238500" y="2743200"/>
+            <a:ext cx="1511300" cy="431800"/>
+          </a:xfrm>
+          <a:prstGeom prst="line">
+            <a:avLst/>
+          </a:prstGeom>
+          <a:ln w="15875">
+            <a:solidFill>
+              <a:srgbClr val="8A8A96"/>
+            </a:solidFill>
+            <a:tailEnd type="triangle" w="med" len="med"/>
+          </a:ln>
+        </p:spPr>
+      </p:cxnSp>
+      <p:sp>
+        <p:nvSpPr>
+          <p:cNvPr id="36" name="Box 37"/>
+          <p:cNvSpPr/>
+          <p:nvPr/>
+        </p:nvSpPr>
+        <p:spPr>
+          <a:xfrm>
+            <a:off x="571500" y="3175000"/>
+            <a:ext cx="1587500" cy="431800"/>
+          </a:xfrm>
+          <a:prstGeom prst="roundRect">
+            <a:avLst>
+              <a:gd name="adj" fmla="val 12000"/>
+            </a:avLst>
+          </a:prstGeom>
+          <a:solidFill>
+            <a:srgbClr val="FFFFFF"/>
+          </a:solidFill>
+          <a:ln w="12700">
+            <a:solidFill>
+              <a:srgbClr val="202040"/>
+            </a:solidFill>
+          </a:ln>
+        </p:spPr>
+        <p:txBody>
+          <a:bodyPr lIns="45720" tIns="18288" rIns="45720" bIns="18288" anchor="ctr">
+            <a:noAutofit/>
+          </a:bodyPr>
+          <a:lstStyle/>
+          <a:p>
+            <a:pPr algn="ctr">
+              <a:buNone/>
+            </a:pPr>
+            <a:r>
+              <a:rPr lang="en-US" sz="1500" b="1" dirty="0">
+                <a:solidFill>
+                  <a:srgbClr val="202040"/>
+                </a:solidFill>
+                <a:latin typeface="Arial"/>
+              </a:rPr>
+              <a:t>Tree 1</a:t>
+            </a:r>
+          </a:p>
+        </p:txBody>
+      </p:sp>
+      <p:sp>
+        <p:nvSpPr>
+          <p:cNvPr id="37" name="Box 38"/>
+          <p:cNvSpPr/>
+          <p:nvPr/>
+        </p:nvSpPr>
+        <p:spPr>
+          <a:xfrm>
+            <a:off x="2260600" y="3175000"/>
+            <a:ext cx="1587500" cy="431800"/>
+          </a:xfrm>
+          <a:prstGeom prst="roundRect">
+            <a:avLst>
+              <a:gd name="adj" fmla="val 12000"/>
+            </a:avLst>
+          </a:prstGeom>
+          <a:solidFill>
+            <a:srgbClr val="FFFFFF"/>
+          </a:solidFill>
+          <a:ln w="12700">
+            <a:solidFill>
+              <a:srgbClr val="202040"/>
+            </a:solidFill>
+          </a:ln>
+        </p:spPr>
+        <p:txBody>
+          <a:bodyPr lIns="45720" tIns="18288" rIns="45720" bIns="18288" anchor="ctr">
+            <a:noAutofit/>
+          </a:bodyPr>
+          <a:lstStyle/>
+          <a:p>
+            <a:pPr algn="ctr">
+              <a:buNone/>
+            </a:pPr>
+            <a:r>
+              <a:rPr lang="en-US" sz="1500" b="1" dirty="0">
+                <a:solidFill>
+                  <a:srgbClr val="202040"/>
+                </a:solidFill>
+                <a:latin typeface="Arial"/>
+              </a:rPr>
+              <a:t>Tree 2</a:t>
+            </a:r>
+          </a:p>
+        </p:txBody>
+      </p:sp>
+      <p:sp>
+        <p:nvSpPr>
+          <p:cNvPr id="38" name="Box 39"/>
+          <p:cNvSpPr/>
+          <p:nvPr/>
+        </p:nvSpPr>
+        <p:spPr>
+          <a:xfrm>
+            <a:off x="3949700" y="3175000"/>
+            <a:ext cx="1587500" cy="431800"/>
+          </a:xfrm>
+          <a:prstGeom prst="roundRect">
+            <a:avLst>
+              <a:gd name="adj" fmla="val 12000"/>
+            </a:avLst>
+          </a:prstGeom>
+          <a:solidFill>
+            <a:srgbClr val="FFFFFF"/>
+          </a:solidFill>
+          <a:ln w="12700">
+            <a:solidFill>
+              <a:srgbClr val="202040"/>
+            </a:solidFill>
+          </a:ln>
+        </p:spPr>
+        <p:txBody>
+          <a:bodyPr lIns="45720" tIns="18288" rIns="45720" bIns="18288" anchor="ctr">
+            <a:noAutofit/>
+          </a:bodyPr>
+          <a:lstStyle/>
+          <a:p>
+            <a:pPr algn="ctr">
+              <a:buNone/>
+            </a:pPr>
+            <a:r>
+              <a:rPr lang="en-US" sz="1500" b="1" dirty="0">
+                <a:solidFill>
+                  <a:srgbClr val="202040"/>
+                </a:solidFill>
+                <a:latin typeface="Arial"/>
+              </a:rPr>
+              <a:t>Tree 3</a:t>
+            </a:r>
+          </a:p>
+        </p:txBody>
+      </p:sp>
+      <p:cxnSp>
+        <p:nvCxnSpPr>
+          <p:cNvPr id="39" name="Arrow 40"/>
+          <p:cNvCxnSpPr/>
+          <p:nvPr/>
+        </p:nvCxnSpPr>
+        <p:spPr>
+          <a:xfrm>
+            <a:off x="1371600" y="3606800"/>
+            <a:ext cx="1549400" cy="660400"/>
+          </a:xfrm>
+          <a:prstGeom prst="line">
+            <a:avLst/>
+          </a:prstGeom>
+          <a:ln w="15875">
+            <a:solidFill>
+              <a:srgbClr val="8A8A96"/>
+            </a:solidFill>
+            <a:tailEnd type="triangle" w="med" len="med"/>
+          </a:ln>
+        </p:spPr>
+      </p:cxnSp>
+      <p:cxnSp>
+        <p:nvCxnSpPr>
+          <p:cNvPr id="40" name="Arrow 41"/>
+          <p:cNvCxnSpPr/>
+          <p:nvPr/>
+        </p:nvCxnSpPr>
+        <p:spPr>
+          <a:xfrm>
+            <a:off x="3048000" y="3606800"/>
+            <a:ext cx="190500" cy="660400"/>
+          </a:xfrm>
+          <a:prstGeom prst="line">
+            <a:avLst/>
+          </a:prstGeom>
+          <a:ln w="15875">
+            <a:solidFill>
+              <a:srgbClr val="8A8A96"/>
+            </a:solidFill>
+            <a:tailEnd type="triangle" w="med" len="med"/>
+          </a:ln>
+        </p:spPr>
+      </p:cxnSp>
+      <p:cxnSp>
+        <p:nvCxnSpPr>
+          <p:cNvPr id="41" name="Arrow 42"/>
+          <p:cNvCxnSpPr/>
+          <p:nvPr/>
+        </p:nvCxnSpPr>
+        <p:spPr>
+          <a:xfrm flipH="1">
+            <a:off x="3556000" y="3606800"/>
+            <a:ext cx="1193800" cy="660400"/>
+          </a:xfrm>
+          <a:prstGeom prst="line">
+            <a:avLst/>
+          </a:prstGeom>
+          <a:ln w="15875">
+            <a:solidFill>
+              <a:srgbClr val="8A8A96"/>
+            </a:solidFill>
+            <a:tailEnd type="triangle" w="med" len="med"/>
+          </a:ln>
+        </p:spPr>
+      </p:cxnSp>
+      <p:sp>
+        <p:nvSpPr>
+          <p:cNvPr id="42" name="Box 43"/>
+          <p:cNvSpPr/>
+          <p:nvPr/>
+        </p:nvSpPr>
+        <p:spPr>
+          <a:xfrm>
+            <a:off x="1651000" y="4267200"/>
+            <a:ext cx="3175000" cy="508000"/>
+          </a:xfrm>
+          <a:prstGeom prst="roundRect">
+            <a:avLst>
+              <a:gd name="adj" fmla="val 12000"/>
+            </a:avLst>
+          </a:prstGeom>
+          <a:solidFill>
+            <a:srgbClr val="E9EBF2"/>
+          </a:solidFill>
+          <a:ln w="12700">
+            <a:solidFill>
+              <a:srgbClr val="9A9AA8"/>
+            </a:solidFill>
+          </a:ln>
+        </p:spPr>
+        <p:txBody>
+          <a:bodyPr lIns="45720" tIns="18288" rIns="45720" bIns="18288" anchor="ctr">
+            <a:noAutofit/>
+          </a:bodyPr>
+          <a:lstStyle/>
+          <a:p>
+            <a:pPr algn="ctr">
+              <a:buNone/>
+            </a:pPr>
+            <a:r>
+              <a:rPr lang="en-US" sz="1600" b="1" dirty="0">
+                <a:solidFill>
+                  <a:srgbClr val="202040"/>
+                </a:solidFill>
+                <a:latin typeface="Arial"/>
+              </a:rPr>
+              <a:t>Average all the trees</a:t>
+            </a:r>
+          </a:p>
+        </p:txBody>
+      </p:sp>
+      <p:sp>
+        <p:nvSpPr>
+          <p:cNvPr id="43" name="Text 44"/>
+          <p:cNvSpPr txBox="1"/>
+          <p:nvPr/>
+        </p:nvSpPr>
+        <p:spPr>
+          <a:xfrm>
+            <a:off x="508000" y="4953000"/>
+            <a:ext cx="5461000" cy="889000"/>
+          </a:xfrm>
+          <a:prstGeom prst="rect">
+            <a:avLst/>
+          </a:prstGeom>
+          <a:noFill/>
+        </p:spPr>
+        <p:txBody>
+          <a:bodyPr lIns="0" tIns="0" rIns="0" bIns="0" anchor="t">
+            <a:noAutofit/>
+          </a:bodyPr>
+          <a:lstStyle/>
+          <a:p>
+            <a:pPr algn="ctr">
+              <a:buNone/>
+            </a:pPr>
+            <a:r>
+              <a:rPr lang="en-US" sz="1400" dirty="0">
+                <a:solidFill>
+                  <a:srgbClr val="3A3A48"/>
+                </a:solidFill>
+                <a:latin typeface="Arial"/>
+              </a:rPr>
+              <a:t>Each tree sees a different random slice of the data. Averaging them gives a steadier prediction than any single tree.</a:t>
+            </a:r>
+          </a:p>
+        </p:txBody>
+      </p:sp>
+      <p:sp>
+        <p:nvSpPr>
+          <p:cNvPr id="44" name="Text 45"/>
+          <p:cNvSpPr txBox="1"/>
+          <p:nvPr/>
+        </p:nvSpPr>
+        <p:spPr>
+          <a:xfrm>
+            <a:off x="6223000" y="1854200"/>
+            <a:ext cx="5461000" cy="304800"/>
+          </a:xfrm>
+          <a:prstGeom prst="rect">
+            <a:avLst/>
+          </a:prstGeom>
+          <a:noFill/>
+        </p:spPr>
+        <p:txBody>
+          <a:bodyPr lIns="0" tIns="0" rIns="0" bIns="0" anchor="t">
+            <a:noAutofit/>
+          </a:bodyPr>
+          <a:lstStyle/>
+          <a:p>
+            <a:pPr algn="ctr">
+              <a:buNone/>
+            </a:pPr>
+            <a:r>
+              <a:rPr lang="en-US" sz="1700" b="1" dirty="0">
+                <a:solidFill>
+                  <a:srgbClr val="202040"/>
+                </a:solidFill>
+                <a:latin typeface="Arial"/>
+              </a:rPr>
+              <a:t>Boosted trees: many trees, added up</a:t>
+            </a:r>
+          </a:p>
+        </p:txBody>
+      </p:sp>
+      <p:sp>
+        <p:nvSpPr>
+          <p:cNvPr id="45" name="Box 46"/>
+          <p:cNvSpPr/>
+          <p:nvPr/>
+        </p:nvSpPr>
+        <p:spPr>
+          <a:xfrm>
+            <a:off x="6350000" y="2311400"/>
+            <a:ext cx="5207000" cy="482600"/>
+          </a:xfrm>
+          <a:prstGeom prst="roundRect">
+            <a:avLst>
+              <a:gd name="adj" fmla="val 12000"/>
+            </a:avLst>
+          </a:prstGeom>
+          <a:solidFill>
+            <a:srgbClr val="FFFFFF"/>
+          </a:solidFill>
+          <a:ln w="12700">
+            <a:solidFill>
+              <a:srgbClr val="202040"/>
+            </a:solidFill>
+          </a:ln>
+        </p:spPr>
+        <p:txBody>
+          <a:bodyPr lIns="45720" tIns="18288" rIns="45720" bIns="18288" anchor="ctr">
+            <a:noAutofit/>
+          </a:bodyPr>
+          <a:lstStyle/>
+          <a:p>
+            <a:pPr algn="ctr">
+              <a:buNone/>
+            </a:pPr>
+            <a:r>
+              <a:rPr lang="en-US" sz="1500" dirty="0">
+                <a:solidFill>
+                  <a:srgbClr val="202040"/>
+                </a:solidFill>
+                <a:latin typeface="Arial"/>
+              </a:rPr>
+              <a:t>Tree 1 makes a rough prediction</a:t>
+            </a:r>
+          </a:p>
+        </p:txBody>
+      </p:sp>
+      <p:sp>
+        <p:nvSpPr>
+          <p:cNvPr id="47" name="Box 48"/>
+          <p:cNvSpPr/>
+          <p:nvPr/>
+        </p:nvSpPr>
+        <p:spPr>
+          <a:xfrm>
+            <a:off x="6350000" y="3048000"/>
+            <a:ext cx="5207000" cy="482600"/>
+          </a:xfrm>
+          <a:prstGeom prst="roundRect">
+            <a:avLst>
+              <a:gd name="adj" fmla="val 12000"/>
+            </a:avLst>
+          </a:prstGeom>
+          <a:solidFill>
+            <a:srgbClr val="FFFFFF"/>
+          </a:solidFill>
+          <a:ln w="12700">
+            <a:solidFill>
+              <a:srgbClr val="202040"/>
+            </a:solidFill>
+          </a:ln>
+        </p:spPr>
+        <p:txBody>
+          <a:bodyPr lIns="45720" tIns="18288" rIns="45720" bIns="18288" anchor="ctr">
+            <a:noAutofit/>
+          </a:bodyPr>
+          <a:lstStyle/>
+          <a:p>
+            <a:pPr algn="ctr">
+              <a:buNone/>
+            </a:pPr>
+            <a:r>
+              <a:rPr lang="en-US" sz="1500" dirty="0">
+                <a:solidFill>
+                  <a:srgbClr val="202040"/>
+                </a:solidFill>
+                <a:latin typeface="Arial"/>
+              </a:rPr>
+              <a:t>Tree 2 fixes what Tree 1 got wrong</a:t>
+            </a:r>
+          </a:p>
+        </p:txBody>
+      </p:sp>
+      <p:sp>
+        <p:nvSpPr>
+          <p:cNvPr id="49" name="Box 50"/>
+          <p:cNvSpPr/>
+          <p:nvPr/>
+        </p:nvSpPr>
+        <p:spPr>
+          <a:xfrm>
+            <a:off x="6350000" y="3784600"/>
+            <a:ext cx="5207000" cy="482600"/>
+          </a:xfrm>
+          <a:prstGeom prst="roundRect">
+            <a:avLst>
+              <a:gd name="adj" fmla="val 12000"/>
+            </a:avLst>
+          </a:prstGeom>
+          <a:solidFill>
+            <a:srgbClr val="FFFFFF"/>
+          </a:solidFill>
+          <a:ln w="12700">
+            <a:solidFill>
+              <a:srgbClr val="202040"/>
+            </a:solidFill>
+          </a:ln>
+        </p:spPr>
+        <p:txBody>
+          <a:bodyPr lIns="45720" tIns="18288" rIns="45720" bIns="18288" anchor="ctr">
+            <a:noAutofit/>
+          </a:bodyPr>
+          <a:lstStyle/>
+          <a:p>
+            <a:pPr algn="ctr">
+              <a:buNone/>
+            </a:pPr>
+            <a:r>
+              <a:rPr lang="en-US" sz="1500" dirty="0">
+                <a:solidFill>
+                  <a:srgbClr val="202040"/>
+                </a:solidFill>
+                <a:latin typeface="Arial"/>
+              </a:rPr>
+              <a:t>Tree 3 fixes what is still wrong</a:t>
+            </a:r>
+          </a:p>
+        </p:txBody>
+      </p:sp>
+      <p:sp>
+        <p:nvSpPr>
+          <p:cNvPr id="51" name="Box 52"/>
+          <p:cNvSpPr/>
+          <p:nvPr/>
+        </p:nvSpPr>
+        <p:spPr>
+          <a:xfrm>
+            <a:off x="6350000" y="4521200"/>
+            <a:ext cx="5207000" cy="508000"/>
+          </a:xfrm>
+          <a:prstGeom prst="roundRect">
+            <a:avLst>
+              <a:gd name="adj" fmla="val 12000"/>
+            </a:avLst>
+          </a:prstGeom>
+          <a:solidFill>
+            <a:srgbClr val="E9EBF2"/>
+          </a:solidFill>
+          <a:ln w="12700">
+            <a:solidFill>
+              <a:srgbClr val="9A9AA8"/>
+            </a:solidFill>
+          </a:ln>
+        </p:spPr>
+        <p:txBody>
+          <a:bodyPr lIns="45720" tIns="18288" rIns="45720" bIns="18288" anchor="ctr">
+            <a:noAutofit/>
+          </a:bodyPr>
+          <a:lstStyle/>
+          <a:p>
+            <a:pPr algn="ctr">
+              <a:buNone/>
+            </a:pPr>
+            <a:r>
+              <a:rPr lang="en-US" sz="1500" b="1" dirty="0">
+                <a:solidFill>
+                  <a:srgbClr val="202040"/>
+                </a:solidFill>
+                <a:latin typeface="Arial"/>
+              </a:rPr>
+              <a:t>Prediction = all the trees added up</a:t>
+            </a:r>
+          </a:p>
+        </p:txBody>
+      </p:sp>
+      <p:sp>
+        <p:nvSpPr>
+          <p:cNvPr id="52" name="Text 53"/>
+          <p:cNvSpPr txBox="1"/>
+          <p:nvPr/>
+        </p:nvSpPr>
+        <p:spPr>
+          <a:xfrm>
+            <a:off x="6223000" y="5207000"/>
+            <a:ext cx="5461000" cy="889000"/>
+          </a:xfrm>
+          <a:prstGeom prst="rect">
+            <a:avLst/>
+          </a:prstGeom>
+          <a:noFill/>
+        </p:spPr>
+        <p:txBody>
+          <a:bodyPr lIns="0" tIns="0" rIns="0" bIns="0" anchor="t">
+            <a:noAutofit/>
+          </a:bodyPr>
+          <a:lstStyle/>
+          <a:p>
+            <a:pPr algn="ctr">
+              <a:buNone/>
+            </a:pPr>
+            <a:r>
+              <a:rPr lang="en-US" sz="1400" dirty="0">
+                <a:solidFill>
+                  <a:srgbClr val="3A3A48"/>
+                </a:solidFill>
+                <a:latin typeface="Arial"/>
+              </a:rPr>
+              <a:t>No single tree is very good. Together they build up a prediction that fits patterns no straight line could.</a:t>
+            </a:r>
+          </a:p>
+        </p:txBody>
+      </p:sp>
+      <p:sp>
+        <p:nvSpPr>
+          <p:cNvPr id="90" name="Flow 91"/>
+          <p:cNvSpPr/>
+          <p:nvPr/>
+        </p:nvSpPr>
+        <p:spPr>
+          <a:xfrm>
+            <a:off x="8826500" y="2806700"/>
+            <a:ext cx="254000" cy="228600"/>
+          </a:xfrm>
+          <a:prstGeom prst="downArrow">
+            <a:avLst>
+              <a:gd name="adj1" fmla="val 45000"/>
+              <a:gd name="adj2" fmla="val 55000"/>
+            </a:avLst>
+          </a:prstGeom>
+          <a:solidFill>
+            <a:srgbClr val="8A8A96"/>
+          </a:solidFill>
+          <a:ln>
+            <a:noFill/>
+          </a:ln>
+        </p:spPr>
+        <p:txBody>
+          <a:bodyPr/>
+          <a:lstStyle/>
+          <a:p>
+            <a:endParaRPr lang="en-US"/>
+          </a:p>
+        </p:txBody>
+      </p:sp>
+      <p:sp>
+        <p:nvSpPr>
+          <p:cNvPr id="91" name="Flow 92"/>
+          <p:cNvSpPr/>
+          <p:nvPr/>
+        </p:nvSpPr>
+        <p:spPr>
+          <a:xfrm>
+            <a:off x="8826500" y="3543300"/>
+            <a:ext cx="254000" cy="228600"/>
+          </a:xfrm>
+          <a:prstGeom prst="downArrow">
+            <a:avLst>
+              <a:gd name="adj1" fmla="val 45000"/>
+              <a:gd name="adj2" fmla="val 55000"/>
+            </a:avLst>
+          </a:prstGeom>
+          <a:solidFill>
+            <a:srgbClr val="8A8A96"/>
+          </a:solidFill>
+          <a:ln>
+            <a:noFill/>
+          </a:ln>
+        </p:spPr>
+        <p:txBody>
+          <a:bodyPr/>
+          <a:lstStyle/>
+          <a:p>
+            <a:endParaRPr lang="en-US"/>
+          </a:p>
+        </p:txBody>
+      </p:sp>
+      <p:sp>
+        <p:nvSpPr>
+          <p:cNvPr id="92" name="Flow 93"/>
+          <p:cNvSpPr/>
+          <p:nvPr/>
+        </p:nvSpPr>
+        <p:spPr>
+          <a:xfrm>
+            <a:off x="8826500" y="4279900"/>
+            <a:ext cx="254000" cy="228600"/>
+          </a:xfrm>
+          <a:prstGeom prst="downArrow">
+            <a:avLst>
+              <a:gd name="adj1" fmla="val 45000"/>
+              <a:gd name="adj2" fmla="val 55000"/>
+            </a:avLst>
+          </a:prstGeom>
+          <a:solidFill>
+            <a:srgbClr val="8A8A96"/>
+          </a:solidFill>
+          <a:ln>
+            <a:noFill/>
+          </a:ln>
+        </p:spPr>
+        <p:txBody>
+          <a:bodyPr/>
+          <a:lstStyle/>
+          <a:p>
+            <a:endParaRPr lang="en-US"/>
+          </a:p>
+        </p:txBody>
+      </p:sp>
+    </p:spTree>
+    <p:extLst>
+      <p:ext uri="{BB962C8B-B14F-4D97-AF65-F5344CB8AC3E}">
+        <p14:creationId xmlns:p14="http://schemas.microsoft.com/office/powerpoint/2010/main" val="4215799560"/>
+      </p:ext>
+    </p:extLst>
+  </p:cSld>
+  <p:clrMapOvr>
+    <a:masterClrMapping/>
+  </p:clrMapOvr>
+</p:sld>
+</file>
+
+<file path=ppt/slides/slide47.xml><?xml version="1.0" encoding="utf-8"?>
+<p:sld xmlns:a="http://schemas.openxmlformats.org/drawingml/2006/main" xmlns:r="http://schemas.openxmlformats.org/officeDocument/2006/relationships" xmlns:p="http://schemas.openxmlformats.org/presentationml/2006/main">
+  <p:cSld>
+    <p:spTree>
+      <p:nvGrpSpPr>
+        <p:cNvPr id="1" name=""/>
+        <p:cNvGrpSpPr/>
+        <p:nvPr/>
+      </p:nvGrpSpPr>
+      <p:grpSpPr>
+        <a:xfrm>
+          <a:off x="0" y="0"/>
+          <a:ext cx="0" cy="0"/>
+          <a:chOff x="0" y="0"/>
+          <a:chExt cx="0" cy="0"/>
+        </a:xfrm>
+      </p:grpSpPr>
+      <p:sp>
+        <p:nvSpPr>
+          <p:cNvPr id="2" name="Title 1">
+            <a:extLst>
+              <a:ext uri="{FF2B5EF4-FFF2-40B4-BE49-F238E27FC236}">
+                <a16:creationId xmlns:a16="http://schemas.microsoft.com/office/drawing/2014/main" id="{6C273228-99B4-483C-0710-45CB61BB0408}"/>
+              </a:ext>
+            </a:extLst>
+          </p:cNvPr>
+          <p:cNvSpPr>
+            <a:spLocks noGrp="1"/>
+          </p:cNvSpPr>
+          <p:nvPr>
+            <p:ph type="title"/>
+          </p:nvPr>
+        </p:nvSpPr>
+        <p:spPr/>
+        <p:txBody>
+          <a:bodyPr/>
+          <a:lstStyle/>
+          <a:p>
+            <a:pPr algn="ctr">
+              <a:buNone/>
+            </a:pPr>
+            <a:r>
+              <a:rPr lang="en-US" sz="4000" dirty="0">
+                <a:solidFill>
+                  <a:srgbClr val="2E3192"/>
+                </a:solidFill>
+                <a:latin typeface="Arial"/>
+              </a:rPr>
+              <a:t>Which one do you want?</a:t>
+            </a:r>
+          </a:p>
+        </p:txBody>
+      </p:sp>
+      <p:sp>
+        <p:nvSpPr>
+          <p:cNvPr id="3" name="Content Placeholder 2">
+            <a:extLst>
+              <a:ext uri="{FF2B5EF4-FFF2-40B4-BE49-F238E27FC236}">
+                <a16:creationId xmlns:a16="http://schemas.microsoft.com/office/drawing/2014/main" id="{F8E8B2A3-E2F7-7A28-F487-0BD3C964844D}"/>
+              </a:ext>
+            </a:extLst>
+          </p:cNvPr>
+          <p:cNvSpPr>
+            <a:spLocks noGrp="1"/>
+          </p:cNvSpPr>
+          <p:nvPr>
+            <p:ph sz="half" idx="1"/>
+          </p:nvPr>
+        </p:nvSpPr>
+        <p:spPr/>
+        <p:txBody>
+          <a:bodyPr/>
+          <a:lstStyle/>
+          <a:p>
+            <a:pPr marL="0" indent="0">
+              <a:spcBef>
+                <a:spcPts val="0"/>
+              </a:spcBef>
+              <a:buNone/>
+            </a:pPr>
+            <a:r>
+              <a:rPr lang="en-US" sz="2000" b="1" dirty="0">
+                <a:solidFill>
+                  <a:srgbClr val="202040"/>
+                </a:solidFill>
+                <a:latin typeface="Arial"/>
+              </a:rPr>
+              <a:t>Reach for trees when…</a:t>
+            </a:r>
+          </a:p>
+          <a:p>
+            <a:pPr marL="342900" indent="-342900">
+              <a:spcBef>
+                <a:spcPts val="1200"/>
+              </a:spcBef>
+              <a:buFont typeface="Arial"/>
+              <a:buChar char="•"/>
+            </a:pPr>
+            <a:r>
+              <a:rPr lang="en-US" sz="1900" dirty="0">
+                <a:solidFill>
+                  <a:srgbClr val="202040"/>
+                </a:solidFill>
+                <a:latin typeface="Arial"/>
+              </a:rPr>
+              <a:t>A map or a forecast is the actual deliverable.</a:t>
+            </a:r>
+          </a:p>
+          <a:p>
+            <a:pPr marL="342900" indent="-342900">
+              <a:spcBef>
+                <a:spcPts val="1200"/>
+              </a:spcBef>
+              <a:buFont typeface="Arial"/>
+              <a:buChar char="•"/>
+            </a:pPr>
+            <a:r>
+              <a:rPr lang="en-US" sz="1900" dirty="0">
+                <a:solidFill>
+                  <a:srgbClr val="202040"/>
+                </a:solidFill>
+                <a:latin typeface="Arial"/>
+              </a:rPr>
+              <a:t>You have many predictors and little idea which matter.</a:t>
+            </a:r>
+          </a:p>
+          <a:p>
+            <a:pPr marL="342900" indent="-342900">
+              <a:spcBef>
+                <a:spcPts val="1200"/>
+              </a:spcBef>
+              <a:buFont typeface="Arial"/>
+              <a:buChar char="•"/>
+            </a:pPr>
+            <a:r>
+              <a:rPr lang="en-US" sz="1900" dirty="0">
+                <a:solidFill>
+                  <a:srgbClr val="202040"/>
+                </a:solidFill>
+                <a:latin typeface="Arial"/>
+              </a:rPr>
+              <a:t>You expect thresholds or interactions you cannot specify.</a:t>
+            </a:r>
+          </a:p>
+          <a:p>
+            <a:pPr marL="342900" indent="-342900">
+              <a:spcBef>
+                <a:spcPts val="1200"/>
+              </a:spcBef>
+              <a:buFont typeface="Arial"/>
+              <a:buChar char="•"/>
+            </a:pPr>
+            <a:r>
+              <a:rPr lang="en-US" sz="1900" dirty="0">
+                <a:solidFill>
+                  <a:srgbClr val="202040"/>
+                </a:solidFill>
+                <a:latin typeface="Arial"/>
+              </a:rPr>
+              <a:t>You want a check on whether your GLM is missing something.</a:t>
+            </a:r>
+          </a:p>
+        </p:txBody>
+      </p:sp>
+      <p:sp>
+        <p:nvSpPr>
+          <p:cNvPr id="4" name="Content Placeholder 3">
+            <a:extLst>
+              <a:ext uri="{FF2B5EF4-FFF2-40B4-BE49-F238E27FC236}">
+                <a16:creationId xmlns:a16="http://schemas.microsoft.com/office/drawing/2014/main" id="{557441C8-C39E-38E9-E1F4-15B49EE93ADD}"/>
+              </a:ext>
+            </a:extLst>
+          </p:cNvPr>
+          <p:cNvSpPr>
+            <a:spLocks noGrp="1"/>
+          </p:cNvSpPr>
+          <p:nvPr>
+            <p:ph sz="half" idx="2"/>
+          </p:nvPr>
+        </p:nvSpPr>
+        <p:spPr/>
+        <p:txBody>
+          <a:bodyPr/>
+          <a:lstStyle/>
+          <a:p>
+            <a:pPr marL="0" indent="0">
+              <a:spcBef>
+                <a:spcPts val="0"/>
+              </a:spcBef>
+              <a:buNone/>
+            </a:pPr>
+            <a:r>
+              <a:rPr lang="en-US" sz="2000" b="1" dirty="0">
+                <a:solidFill>
+                  <a:srgbClr val="202040"/>
+                </a:solidFill>
+                <a:latin typeface="Arial"/>
+              </a:rPr>
+              <a:t>Stay with a GLM when…</a:t>
+            </a:r>
+          </a:p>
+          <a:p>
+            <a:pPr marL="342900" indent="-342900">
+              <a:spcBef>
+                <a:spcPts val="1200"/>
+              </a:spcBef>
+              <a:buFont typeface="Arial"/>
+              <a:buChar char="•"/>
+            </a:pPr>
+            <a:r>
+              <a:rPr lang="en-US" sz="1900" dirty="0">
+                <a:solidFill>
+                  <a:srgbClr val="202040"/>
+                </a:solidFill>
+                <a:latin typeface="Arial"/>
+              </a:rPr>
+              <a:t>You need an effect size with a confidence interval.</a:t>
+            </a:r>
+          </a:p>
+          <a:p>
+            <a:pPr marL="342900" indent="-342900">
+              <a:spcBef>
+                <a:spcPts val="1200"/>
+              </a:spcBef>
+              <a:buFont typeface="Arial"/>
+              <a:buChar char="•"/>
+            </a:pPr>
+            <a:r>
+              <a:rPr lang="en-US" sz="1900" dirty="0">
+                <a:solidFill>
+                  <a:srgbClr val="202040"/>
+                </a:solidFill>
+                <a:latin typeface="Arial"/>
+              </a:rPr>
+              <a:t>You have a hypothesis to test.</a:t>
+            </a:r>
+          </a:p>
+          <a:p>
+            <a:pPr marL="342900" indent="-342900">
+              <a:spcBef>
+                <a:spcPts val="1200"/>
+              </a:spcBef>
+              <a:buFont typeface="Arial"/>
+              <a:buChar char="•"/>
+            </a:pPr>
+            <a:r>
+              <a:rPr lang="en-US" sz="1900" dirty="0">
+                <a:solidFill>
+                  <a:srgbClr val="202040"/>
+                </a:solidFill>
+                <a:latin typeface="Arial"/>
+              </a:rPr>
+              <a:t>You are asking why, not just what.</a:t>
+            </a:r>
+          </a:p>
+          <a:p>
+            <a:pPr marL="342900" indent="-342900">
+              <a:spcBef>
+                <a:spcPts val="1200"/>
+              </a:spcBef>
+              <a:buFont typeface="Arial"/>
+              <a:buChar char="•"/>
+            </a:pPr>
+            <a:r>
+              <a:rPr lang="en-US" sz="1900" dirty="0">
+                <a:solidFill>
+                  <a:srgbClr val="202040"/>
+                </a:solidFill>
+                <a:latin typeface="Arial"/>
+              </a:rPr>
+              <a:t>You need to predict beyond the range of your data.</a:t>
+            </a:r>
+          </a:p>
+        </p:txBody>
+      </p:sp>
+    </p:spTree>
+    <p:extLst>
+      <p:ext uri="{BB962C8B-B14F-4D97-AF65-F5344CB8AC3E}">
+        <p14:creationId xmlns:p14="http://schemas.microsoft.com/office/powerpoint/2010/main" val="3017816619"/>
+      </p:ext>
+    </p:extLst>
+  </p:cSld>
+  <p:clrMapOvr>
+    <a:masterClrMapping/>
+  </p:clrMapOvr>
+</p:sld>
+</file>
+
+<file path=ppt/slides/slide48.xml><?xml version="1.0" encoding="utf-8"?>
+<p:sld xmlns:a="http://schemas.openxmlformats.org/drawingml/2006/main" xmlns:r="http://schemas.openxmlformats.org/officeDocument/2006/relationships" xmlns:p="http://schemas.openxmlformats.org/presentationml/2006/main">
+  <p:cSld>
+    <p:spTree>
+      <p:nvGrpSpPr>
+        <p:cNvPr id="1" name=""/>
+        <p:cNvGrpSpPr/>
+        <p:nvPr/>
+      </p:nvGrpSpPr>
+      <p:grpSpPr>
+        <a:xfrm>
+          <a:off x="0" y="0"/>
+          <a:ext cx="0" cy="0"/>
+          <a:chOff x="0" y="0"/>
+          <a:chExt cx="0" cy="0"/>
+        </a:xfrm>
+      </p:grpSpPr>
+      <p:sp>
+        <p:nvSpPr>
           <p:cNvPr id="2" name="Title 1"/>
           <p:cNvSpPr>
             <a:spLocks noGrp="1"/>
@@ -27383,21 +29870,132 @@
         </p:nvSpPr>
         <p:spPr>
           <a:xfrm>
-            <a:off x="466411" y="-117196"/>
-            <a:ext cx="10515600" cy="1325563"/>
+            <a:off x="7734300" y="440072"/>
+            <a:ext cx="4610100" cy="1325563"/>
           </a:xfrm>
         </p:spPr>
         <p:txBody>
-          <a:bodyPr/>
+          <a:bodyPr>
+            <a:normAutofit/>
+          </a:bodyPr>
           <a:lstStyle/>
           <a:p>
             <a:r>
-              <a:rPr lang="en-US" dirty="0"/>
-              <a:t>Recommended Readings</a:t>
-            </a:r>
+              <a:rPr lang="en-US" sz="3200" dirty="0"/>
+              <a:t>Don’t take my word for it</a:t>
+            </a:r>
+            <a:r>
+              <a:rPr lang="mr-IN" sz="3200" dirty="0"/>
+              <a:t>…</a:t>
+            </a:r>
+            <a:endParaRPr lang="en-US" sz="3200" dirty="0"/>
           </a:p>
         </p:txBody>
       </p:sp>
+      <p:pic>
+        <p:nvPicPr>
+          <p:cNvPr id="4" name="Content Placeholder 3"/>
+          <p:cNvPicPr>
+            <a:picLocks noGrp="1" noChangeAspect="1"/>
+          </p:cNvPicPr>
+          <p:nvPr>
+            <p:ph idx="1"/>
+          </p:nvPr>
+        </p:nvPicPr>
+        <p:blipFill>
+          <a:blip r:embed="rId2">
+            <a:extLst>
+              <a:ext uri="{28A0092B-C50C-407E-A947-70E740481C1C}">
+                <a14:useLocalDpi xmlns:a14="http://schemas.microsoft.com/office/drawing/2010/main" val="0"/>
+              </a:ext>
+            </a:extLst>
+          </a:blip>
+          <a:stretch>
+            <a:fillRect/>
+          </a:stretch>
+        </p:blipFill>
+        <p:spPr>
+          <a:xfrm>
+            <a:off x="-105790" y="0"/>
+            <a:ext cx="7687690" cy="2590800"/>
+          </a:xfrm>
+        </p:spPr>
+      </p:pic>
+      <p:sp>
+        <p:nvSpPr>
+          <p:cNvPr id="5" name="TextBox 4"/>
+          <p:cNvSpPr txBox="1"/>
+          <p:nvPr/>
+        </p:nvSpPr>
+        <p:spPr>
+          <a:xfrm>
+            <a:off x="468351" y="3107470"/>
+            <a:ext cx="11318488" cy="1200329"/>
+          </a:xfrm>
+          <a:prstGeom prst="rect">
+            <a:avLst/>
+          </a:prstGeom>
+          <a:noFill/>
+        </p:spPr>
+        <p:txBody>
+          <a:bodyPr wrap="square" rtlCol="0">
+            <a:spAutoFit/>
+          </a:bodyPr>
+          <a:lstStyle/>
+          <a:p>
+            <a:r>
+              <a:rPr lang="en-US" dirty="0"/>
+              <a:t>One way to avoid some of the problems associated with model selection is to “just say no” to data-driven model selection—in other words, ﬁt a single pre-speciﬁed model, one in which all explanatory variables are chosen prior to looking at their relationship with the response variable, and then use this model for inference (Harrell 2001, </a:t>
+            </a:r>
+            <a:r>
+              <a:rPr lang="en-US" dirty="0" err="1"/>
+              <a:t>Babyak</a:t>
+            </a:r>
+            <a:r>
+              <a:rPr lang="en-US" dirty="0"/>
+              <a:t> 2004, Whittingham et al. 2006, </a:t>
+            </a:r>
+            <a:r>
+              <a:rPr lang="en-US" dirty="0" err="1"/>
+              <a:t>Guidice</a:t>
+            </a:r>
+            <a:r>
+              <a:rPr lang="en-US" dirty="0"/>
+              <a:t> et al. 2012).</a:t>
+            </a:r>
+          </a:p>
+        </p:txBody>
+      </p:sp>
+    </p:spTree>
+    <p:extLst>
+      <p:ext uri="{BB962C8B-B14F-4D97-AF65-F5344CB8AC3E}">
+        <p14:creationId xmlns:p14="http://schemas.microsoft.com/office/powerpoint/2010/main" val="1130442753"/>
+      </p:ext>
+    </p:extLst>
+  </p:cSld>
+  <p:clrMapOvr>
+    <a:masterClrMapping/>
+  </p:clrMapOvr>
+</p:sld>
+</file>
+
+<file path=ppt/slides/slide49.xml><?xml version="1.0" encoding="utf-8"?>
+<p:sld xmlns:a="http://schemas.openxmlformats.org/drawingml/2006/main" xmlns:r="http://schemas.openxmlformats.org/officeDocument/2006/relationships" xmlns:p="http://schemas.openxmlformats.org/presentationml/2006/main">
+  <p:cSld>
+    <p:spTree>
+      <p:nvGrpSpPr>
+        <p:cNvPr id="1" name=""/>
+        <p:cNvGrpSpPr/>
+        <p:nvPr/>
+      </p:nvGrpSpPr>
+      <p:grpSpPr>
+        <a:xfrm>
+          <a:off x="0" y="0"/>
+          <a:ext cx="0" cy="0"/>
+          <a:chOff x="0" y="0"/>
+          <a:chExt cx="0" cy="0"/>
+        </a:xfrm>
+      </p:grpSpPr>
       <p:sp>
         <p:nvSpPr>
           <p:cNvPr id="3" name="Content Placeholder 2"/>
@@ -27410,179 +30008,148 @@
         </p:nvSpPr>
         <p:spPr>
           <a:xfrm>
-            <a:off x="466411" y="1453835"/>
-            <a:ext cx="10817888" cy="4585224"/>
+            <a:off x="838200" y="2933699"/>
+            <a:ext cx="10515600" cy="3167063"/>
           </a:xfrm>
         </p:spPr>
         <p:txBody>
-          <a:bodyPr>
-            <a:normAutofit fontScale="85000" lnSpcReduction="20000"/>
+          <a:bodyPr/>
+          <a:lstStyle/>
+          <a:p>
+            <a:r>
+              <a:rPr lang="en-US" dirty="0"/>
+              <a:t>“If researchers want to accurately estimate the strength of multiple competing ecological processes along with reliable confidence intervals, their best hope is to use full (maximal) statistical models after making principled, </a:t>
+            </a:r>
+            <a:r>
+              <a:rPr lang="en-US" i="1" dirty="0"/>
+              <a:t>a priori </a:t>
+            </a:r>
+            <a:r>
+              <a:rPr lang="en-US" dirty="0"/>
+              <a:t>decisions about which predictors to include. “</a:t>
+            </a:r>
+          </a:p>
+          <a:p>
+            <a:endParaRPr lang="en-US" dirty="0"/>
+          </a:p>
+        </p:txBody>
+      </p:sp>
+      <p:pic>
+        <p:nvPicPr>
+          <p:cNvPr id="6" name="Picture 5" descr="Multi-panel plot of relative probability of selection versus canopy cover, distance to road, distance to water, and ruggedness, one row per species, with fitted curves and shaded confidence bands."/>
+          <p:cNvPicPr>
+            <a:picLocks noChangeAspect="1"/>
+          </p:cNvPicPr>
+          <p:nvPr/>
+        </p:nvPicPr>
+        <p:blipFill>
+          <a:blip r:embed="rId2"/>
+          <a:stretch>
+            <a:fillRect/>
+          </a:stretch>
+        </p:blipFill>
+        <p:spPr>
+          <a:xfrm>
+            <a:off x="-9525" y="0"/>
+            <a:ext cx="6459257" cy="2206645"/>
+          </a:xfrm>
+          <a:prstGeom prst="rect">
+            <a:avLst/>
+          </a:prstGeom>
+        </p:spPr>
+      </p:pic>
+      <p:sp>
+        <p:nvSpPr>
+          <p:cNvPr id="7" name="Title 1"/>
+          <p:cNvSpPr txBox="1">
+            <a:spLocks/>
+          </p:cNvSpPr>
+          <p:nvPr/>
+        </p:nvSpPr>
+        <p:spPr>
+          <a:xfrm>
+            <a:off x="7734300" y="440072"/>
+            <a:ext cx="4610100" cy="1325563"/>
+          </a:xfrm>
+          <a:prstGeom prst="rect">
+            <a:avLst/>
+          </a:prstGeom>
+        </p:spPr>
+        <p:txBody>
+          <a:bodyPr vert="horz" lIns="91440" tIns="45720" rIns="91440" bIns="45720" rtlCol="0" anchor="ctr">
+            <a:normAutofit/>
+          </a:bodyPr>
+          <a:lstStyle>
+            <a:lvl1pPr algn="l" defTabSz="914400" rtl="0" eaLnBrk="1" latinLnBrk="0" hangingPunct="1">
+              <a:lnSpc>
+                <a:spcPct val="90000"/>
+              </a:lnSpc>
+              <a:spcBef>
+                <a:spcPct val="0"/>
+              </a:spcBef>
+              <a:buNone/>
+              <a:defRPr sz="4400" kern="1200">
+                <a:solidFill>
+                  <a:schemeClr val="tx1"/>
+                </a:solidFill>
+                <a:latin typeface="+mj-lt"/>
+                <a:ea typeface="+mj-ea"/>
+                <a:cs typeface="+mj-cs"/>
+              </a:defRPr>
+            </a:lvl1pPr>
+          </a:lstStyle>
+          <a:p>
+            <a:r>
+              <a:rPr lang="en-US" sz="3200"/>
+              <a:t>Don’t take my word for it</a:t>
+            </a:r>
+            <a:r>
+              <a:rPr lang="mr-IN" sz="3200"/>
+              <a:t>…</a:t>
+            </a:r>
+            <a:endParaRPr lang="en-US" sz="3200" dirty="0"/>
+          </a:p>
+        </p:txBody>
+      </p:sp>
+      <p:sp>
+        <p:nvSpPr>
+          <p:cNvPr id="2" name="TextBox 1">
+            <a:extLst>
+              <a:ext uri="{FF2B5EF4-FFF2-40B4-BE49-F238E27FC236}">
+                <a16:creationId xmlns:a16="http://schemas.microsoft.com/office/drawing/2014/main" id="{D4209813-2DE1-51FF-FDDB-74CC992238B0}"/>
+              </a:ext>
+            </a:extLst>
+          </p:cNvPr>
+          <p:cNvSpPr txBox="1"/>
+          <p:nvPr/>
+        </p:nvSpPr>
+        <p:spPr>
+          <a:xfrm>
+            <a:off x="838200" y="6417928"/>
+            <a:ext cx="10155922" cy="369332"/>
+          </a:xfrm>
+          <a:prstGeom prst="rect">
+            <a:avLst/>
+          </a:prstGeom>
+          <a:noFill/>
+        </p:spPr>
+        <p:txBody>
+          <a:bodyPr wrap="none" rtlCol="0">
+            <a:spAutoFit/>
           </a:bodyPr>
           <a:lstStyle/>
           <a:p>
             <a:r>
-              <a:rPr lang="en-US" dirty="0" err="1"/>
-              <a:t>Aho</a:t>
-            </a:r>
-            <a:r>
               <a:rPr lang="en-US" dirty="0"/>
-              <a:t> et al. 2014 “Model selection for ecologists: The worldviews of AIC and BIC”. Ecology</a:t>
-            </a:r>
-          </a:p>
-          <a:p>
-            <a:r>
-              <a:rPr lang="en-US" dirty="0" err="1"/>
-              <a:t>Shmueli</a:t>
-            </a:r>
-            <a:r>
-              <a:rPr lang="en-US" dirty="0"/>
-              <a:t> 2010 “To explain or to predict”. Statistical Science</a:t>
-            </a:r>
-          </a:p>
-          <a:p>
-            <a:r>
-              <a:rPr lang="en-US" dirty="0" err="1"/>
-              <a:t>Murtaugh</a:t>
-            </a:r>
-            <a:r>
-              <a:rPr lang="en-US" dirty="0"/>
-              <a:t> 2007 “Simplicity and complexity in ecological data analysis”. Ecology</a:t>
-            </a:r>
-          </a:p>
-          <a:p>
-            <a:r>
-              <a:rPr lang="en-US" dirty="0"/>
-              <a:t>Arnold </a:t>
-            </a:r>
-            <a:r>
-              <a:rPr lang="en-US" dirty="0">
-                <a:latin typeface="Calibri" panose="020F0502020204030204" pitchFamily="34" charset="0"/>
-                <a:cs typeface="Calibri" panose="020F0502020204030204" pitchFamily="34" charset="0"/>
-              </a:rPr>
-              <a:t>2010 “</a:t>
-            </a:r>
-            <a:r>
-              <a:rPr lang="en-US" i="0" dirty="0">
-                <a:solidFill>
-                  <a:srgbClr val="1C1D1E"/>
-                </a:solidFill>
-                <a:effectLst/>
-                <a:highlight>
-                  <a:srgbClr val="FFFFFF"/>
-                </a:highlight>
-                <a:latin typeface="Calibri" panose="020F0502020204030204" pitchFamily="34" charset="0"/>
-                <a:cs typeface="Calibri" panose="020F0502020204030204" pitchFamily="34" charset="0"/>
-              </a:rPr>
-              <a:t>Uninformative Parameters and Model Selection Using Akaike's Information Criterion” JWM</a:t>
-            </a:r>
-          </a:p>
-          <a:p>
-            <a:r>
-              <a:rPr lang="en-US" dirty="0">
-                <a:latin typeface="Calibri" panose="020F0502020204030204" pitchFamily="34" charset="0"/>
-                <a:cs typeface="Calibri" panose="020F0502020204030204" pitchFamily="34" charset="0"/>
-              </a:rPr>
-              <a:t>”Murtaugh </a:t>
-            </a:r>
-            <a:r>
-              <a:rPr lang="en-US" dirty="0"/>
-              <a:t>2014 “In defense of P-values”. Ecology</a:t>
-            </a:r>
-          </a:p>
-          <a:p>
-            <a:r>
-              <a:rPr lang="en-US" dirty="0" err="1"/>
-              <a:t>Fieberg</a:t>
-            </a:r>
-            <a:r>
-              <a:rPr lang="en-US" dirty="0"/>
-              <a:t> and Johnson 2015 “MMI: </a:t>
-            </a:r>
-            <a:r>
-              <a:rPr lang="en-US" dirty="0" err="1"/>
-              <a:t>Multimodel</a:t>
-            </a:r>
-            <a:r>
-              <a:rPr lang="en-US" dirty="0"/>
-              <a:t> Inference or Models </a:t>
-            </a:r>
-            <a:r>
-              <a:rPr lang="en-US" dirty="0">
-                <a:latin typeface="Calibri" panose="020F0502020204030204" pitchFamily="34" charset="0"/>
-                <a:cs typeface="Calibri" panose="020F0502020204030204" pitchFamily="34" charset="0"/>
-              </a:rPr>
-              <a:t>With Management Implications?”. Journal of Wildlife Management </a:t>
-            </a:r>
-          </a:p>
-          <a:p>
-            <a:r>
-              <a:rPr lang="en-US" dirty="0">
-                <a:latin typeface="Calibri" panose="020F0502020204030204" pitchFamily="34" charset="0"/>
-                <a:cs typeface="Calibri" panose="020F0502020204030204" pitchFamily="34" charset="0"/>
-              </a:rPr>
-              <a:t>Sutherland et al. 2023 “Practical advice on variable selection and reporting using Akaike information criterion. Proceedings B</a:t>
-            </a:r>
-          </a:p>
-          <a:p>
-            <a:r>
-              <a:rPr lang="en-US" dirty="0" err="1">
-                <a:latin typeface="Calibri" panose="020F0502020204030204" pitchFamily="34" charset="0"/>
-                <a:cs typeface="Calibri" panose="020F0502020204030204" pitchFamily="34" charset="0"/>
-              </a:rPr>
-              <a:t>Bolker</a:t>
-            </a:r>
-            <a:r>
-              <a:rPr lang="en-US" dirty="0">
-                <a:latin typeface="Calibri" panose="020F0502020204030204" pitchFamily="34" charset="0"/>
-                <a:cs typeface="Calibri" panose="020F0502020204030204" pitchFamily="34" charset="0"/>
-              </a:rPr>
-              <a:t> 2024 “</a:t>
-            </a:r>
-            <a:r>
-              <a:rPr lang="en-US" i="0" dirty="0" err="1">
-                <a:solidFill>
-                  <a:srgbClr val="000000"/>
-                </a:solidFill>
-                <a:effectLst/>
-                <a:highlight>
-                  <a:srgbClr val="FFFFFF"/>
-                </a:highlight>
-                <a:latin typeface="Calibri" panose="020F0502020204030204" pitchFamily="34" charset="0"/>
-                <a:cs typeface="Calibri" panose="020F0502020204030204" pitchFamily="34" charset="0"/>
-              </a:rPr>
-              <a:t>Multimodel</a:t>
-            </a:r>
-            <a:r>
-              <a:rPr lang="en-US" i="0" dirty="0">
-                <a:solidFill>
-                  <a:srgbClr val="000000"/>
-                </a:solidFill>
-                <a:effectLst/>
-                <a:highlight>
-                  <a:srgbClr val="FFFFFF"/>
-                </a:highlight>
-                <a:latin typeface="Calibri" panose="020F0502020204030204" pitchFamily="34" charset="0"/>
-                <a:cs typeface="Calibri" panose="020F0502020204030204" pitchFamily="34" charset="0"/>
-              </a:rPr>
-              <a:t> Approaches Are Not the Best Way to Understand Multifactorial Systems</a:t>
-            </a:r>
-            <a:r>
-              <a:rPr lang="en-US" dirty="0">
-                <a:latin typeface="Calibri" panose="020F0502020204030204" pitchFamily="34" charset="0"/>
-                <a:cs typeface="Calibri" panose="020F0502020204030204" pitchFamily="34" charset="0"/>
-              </a:rPr>
-              <a:t>”. Entropy</a:t>
-            </a:r>
-          </a:p>
-          <a:p>
-            <a:endParaRPr lang="en-US" dirty="0"/>
+              <a:t>Left as a preprint for years until Bolker finally submitted it to a journal after we chatted about this problem</a:t>
+            </a:r>
           </a:p>
         </p:txBody>
       </p:sp>
     </p:spTree>
     <p:extLst>
       <p:ext uri="{BB962C8B-B14F-4D97-AF65-F5344CB8AC3E}">
-        <p14:creationId xmlns:p14="http://schemas.microsoft.com/office/powerpoint/2010/main" val="333524267"/>
+        <p14:creationId xmlns:p14="http://schemas.microsoft.com/office/powerpoint/2010/main" val="618075164"/>
       </p:ext>
     </p:extLst>
   </p:cSld>
@@ -27592,7 +30159,465 @@
 </p:sld>
 </file>
 
-<file path=ppt/slides/slide44.xml><?xml version="1.0" encoding="utf-8"?>
+<file path=ppt/slides/slide5.xml><?xml version="1.0" encoding="utf-8"?>
+<p:sld xmlns:a="http://schemas.openxmlformats.org/drawingml/2006/main" xmlns:r="http://schemas.openxmlformats.org/officeDocument/2006/relationships" xmlns:p="http://schemas.openxmlformats.org/presentationml/2006/main">
+  <p:cSld>
+    <p:spTree>
+      <p:nvGrpSpPr>
+        <p:cNvPr id="1" name="">
+          <a:extLst>
+            <a:ext uri="{FF2B5EF4-FFF2-40B4-BE49-F238E27FC236}">
+              <a16:creationId xmlns:a16="http://schemas.microsoft.com/office/drawing/2014/main" id="{D908C135-D483-82D1-6E59-58FAECF6E0E4}"/>
+            </a:ext>
+          </a:extLst>
+        </p:cNvPr>
+        <p:cNvGrpSpPr/>
+        <p:nvPr/>
+      </p:nvGrpSpPr>
+      <p:grpSpPr>
+        <a:xfrm>
+          <a:off x="0" y="0"/>
+          <a:ext cx="0" cy="0"/>
+          <a:chOff x="0" y="0"/>
+          <a:chExt cx="0" cy="0"/>
+        </a:xfrm>
+      </p:grpSpPr>
+      <p:sp>
+        <p:nvSpPr>
+          <p:cNvPr id="2" name="Title 1">
+            <a:extLst>
+              <a:ext uri="{FF2B5EF4-FFF2-40B4-BE49-F238E27FC236}">
+                <a16:creationId xmlns:a16="http://schemas.microsoft.com/office/drawing/2014/main" id="{4E56792E-7439-7DB1-6307-908ECCFBA886}"/>
+              </a:ext>
+            </a:extLst>
+          </p:cNvPr>
+          <p:cNvSpPr>
+            <a:spLocks noGrp="1"/>
+          </p:cNvSpPr>
+          <p:nvPr>
+            <p:ph type="title"/>
+          </p:nvPr>
+        </p:nvSpPr>
+        <p:spPr/>
+        <p:txBody>
+          <a:bodyPr/>
+          <a:lstStyle/>
+          <a:p>
+            <a:pPr algn="ctr"/>
+            <a:r>
+              <a:rPr lang="en-US" sz="4000" dirty="0">
+                <a:solidFill>
+                  <a:srgbClr val="2E3192"/>
+                </a:solidFill>
+                <a:latin typeface="Arial"/>
+              </a:rPr>
+              <a:t>Fit?</a:t>
+            </a:r>
+          </a:p>
+        </p:txBody>
+      </p:sp>
+      <p:sp>
+        <p:nvSpPr>
+          <p:cNvPr id="3" name="Content Placeholder 2">
+            <a:extLst>
+              <a:ext uri="{FF2B5EF4-FFF2-40B4-BE49-F238E27FC236}">
+                <a16:creationId xmlns:a16="http://schemas.microsoft.com/office/drawing/2014/main" id="{97EC3889-C678-9C45-24A6-C1F5396A85B4}"/>
+              </a:ext>
+            </a:extLst>
+          </p:cNvPr>
+          <p:cNvSpPr>
+            <a:spLocks noGrp="1"/>
+          </p:cNvSpPr>
+          <p:nvPr>
+            <p:ph idx="1"/>
+          </p:nvPr>
+        </p:nvSpPr>
+        <p:spPr/>
+        <p:txBody>
+          <a:bodyPr/>
+          <a:lstStyle/>
+          <a:p>
+            <a:pPr marL="457200" indent="-457200">
+              <a:spcBef>
+                <a:spcPts val="1200"/>
+              </a:spcBef>
+              <a:buFont typeface="Arial"/>
+              <a:buChar char="•"/>
+            </a:pPr>
+            <a:r>
+              <a:rPr lang="en-US" sz="2200" dirty="0">
+                <a:solidFill>
+                  <a:srgbClr val="202040"/>
+                </a:solidFill>
+                <a:latin typeface="Arial"/>
+              </a:rPr>
+              <a:t>Compare “fit” of different models</a:t>
+            </a:r>
+          </a:p>
+          <a:p>
+            <a:pPr marL="457200" indent="-457200">
+              <a:spcBef>
+                <a:spcPts val="1200"/>
+              </a:spcBef>
+              <a:buFont typeface="Arial"/>
+              <a:buChar char="•"/>
+            </a:pPr>
+            <a:r>
+              <a:rPr lang="en-US" sz="2200" dirty="0">
+                <a:solidFill>
+                  <a:srgbClr val="202040"/>
+                </a:solidFill>
+                <a:latin typeface="Arial"/>
+              </a:rPr>
+              <a:t>Define “fit” — (maximum) </a:t>
+            </a:r>
+            <a:r>
+              <a:rPr lang="en-US" sz="2200" b="1" dirty="0">
+                <a:solidFill>
+                  <a:srgbClr val="202040"/>
+                </a:solidFill>
+                <a:latin typeface="Arial"/>
+              </a:rPr>
+              <a:t>likelihood</a:t>
+            </a:r>
+            <a:r>
+              <a:rPr lang="en-US" sz="2200" dirty="0">
+                <a:solidFill>
+                  <a:srgbClr val="202040"/>
+                </a:solidFill>
+                <a:latin typeface="Arial"/>
+              </a:rPr>
+              <a:t>?</a:t>
+            </a:r>
+          </a:p>
+          <a:p>
+            <a:pPr marL="457200" indent="-457200">
+              <a:spcBef>
+                <a:spcPts val="1200"/>
+              </a:spcBef>
+              <a:buFont typeface="Arial"/>
+              <a:buChar char="•"/>
+            </a:pPr>
+            <a:r>
+              <a:rPr lang="en-US" sz="2200" dirty="0">
+                <a:solidFill>
+                  <a:srgbClr val="202040"/>
+                </a:solidFill>
+                <a:latin typeface="Arial"/>
+              </a:rPr>
+              <a:t>Increases when adding more variables</a:t>
+            </a:r>
+          </a:p>
+          <a:p>
+            <a:pPr marL="457200" indent="-457200">
+              <a:spcBef>
+                <a:spcPts val="1200"/>
+              </a:spcBef>
+              <a:buFont typeface="Arial"/>
+              <a:buChar char="•"/>
+            </a:pPr>
+            <a:r>
+              <a:rPr lang="en-US" sz="2200" dirty="0">
+                <a:solidFill>
+                  <a:srgbClr val="202040"/>
+                </a:solidFill>
+                <a:latin typeface="Arial"/>
+              </a:rPr>
+              <a:t>Need to </a:t>
+            </a:r>
+            <a:r>
+              <a:rPr lang="en-US" sz="2200" b="1" dirty="0">
+                <a:solidFill>
+                  <a:srgbClr val="202040"/>
+                </a:solidFill>
+                <a:latin typeface="Arial"/>
+              </a:rPr>
+              <a:t>penalise</a:t>
+            </a:r>
+            <a:r>
+              <a:rPr lang="en-US" sz="2200" dirty="0">
+                <a:solidFill>
+                  <a:srgbClr val="202040"/>
+                </a:solidFill>
+                <a:latin typeface="Arial"/>
+              </a:rPr>
+              <a:t> fit somehow (to avoid overfitting)</a:t>
+            </a:r>
+          </a:p>
+          <a:p>
+            <a:pPr marL="457200" indent="-457200">
+              <a:spcBef>
+                <a:spcPts val="1200"/>
+              </a:spcBef>
+              <a:buFont typeface="Arial"/>
+              <a:buChar char="•"/>
+            </a:pPr>
+            <a:r>
+              <a:rPr lang="en-US" sz="2200" dirty="0">
+                <a:solidFill>
+                  <a:srgbClr val="202040"/>
+                </a:solidFill>
+                <a:latin typeface="Arial"/>
+              </a:rPr>
+              <a:t>Choice between different approaches reflects choice of penalty</a:t>
+            </a:r>
+          </a:p>
+          <a:p>
+            <a:pPr marL="914400" indent="-457200">
+              <a:spcBef>
+                <a:spcPts val="1200"/>
+              </a:spcBef>
+              <a:buFont typeface="Arial"/>
+              <a:buChar char="–"/>
+            </a:pPr>
+            <a:r>
+              <a:rPr lang="en-US" sz="2000" dirty="0">
+                <a:solidFill>
+                  <a:srgbClr val="202040"/>
+                </a:solidFill>
+                <a:latin typeface="Arial"/>
+              </a:rPr>
+              <a:t>sometimes just </a:t>
+            </a:r>
+            <a:r>
+              <a:rPr lang="en-US" sz="2000" b="1" dirty="0">
+                <a:solidFill>
+                  <a:srgbClr val="202040"/>
+                </a:solidFill>
+                <a:latin typeface="Arial"/>
+              </a:rPr>
+              <a:t>strength</a:t>
+            </a:r>
+            <a:r>
+              <a:rPr lang="en-US" sz="2000" dirty="0">
+                <a:solidFill>
+                  <a:srgbClr val="202040"/>
+                </a:solidFill>
+                <a:latin typeface="Arial"/>
+              </a:rPr>
+              <a:t> of penalty</a:t>
+            </a:r>
+          </a:p>
+          <a:p>
+            <a:pPr marL="457200" indent="-457200">
+              <a:spcBef>
+                <a:spcPts val="1200"/>
+              </a:spcBef>
+              <a:buFont typeface="Arial"/>
+              <a:buChar char="•"/>
+            </a:pPr>
+            <a:r>
+              <a:rPr lang="en-US" sz="2200" dirty="0">
+                <a:solidFill>
+                  <a:srgbClr val="202040"/>
+                </a:solidFill>
+                <a:latin typeface="Arial"/>
+              </a:rPr>
+              <a:t>Three ways of comparing likelihoods…</a:t>
+            </a:r>
+          </a:p>
+        </p:txBody>
+      </p:sp>
+    </p:spTree>
+    <p:extLst>
+      <p:ext uri="{BB962C8B-B14F-4D97-AF65-F5344CB8AC3E}">
+        <p14:creationId xmlns:p14="http://schemas.microsoft.com/office/powerpoint/2010/main" val="3685508012"/>
+      </p:ext>
+    </p:extLst>
+  </p:cSld>
+  <p:clrMapOvr>
+    <a:masterClrMapping/>
+  </p:clrMapOvr>
+</p:sld>
+</file>
+
+<file path=ppt/slides/slide50.xml><?xml version="1.0" encoding="utf-8"?>
+<p:sld xmlns:a="http://schemas.openxmlformats.org/drawingml/2006/main" xmlns:r="http://schemas.openxmlformats.org/officeDocument/2006/relationships" xmlns:p="http://schemas.openxmlformats.org/presentationml/2006/main">
+  <p:cSld>
+    <p:spTree>
+      <p:nvGrpSpPr>
+        <p:cNvPr id="1" name=""/>
+        <p:cNvGrpSpPr/>
+        <p:nvPr/>
+      </p:nvGrpSpPr>
+      <p:grpSpPr>
+        <a:xfrm>
+          <a:off x="0" y="0"/>
+          <a:ext cx="0" cy="0"/>
+          <a:chOff x="0" y="0"/>
+          <a:chExt cx="0" cy="0"/>
+        </a:xfrm>
+      </p:grpSpPr>
+      <p:pic>
+        <p:nvPicPr>
+          <p:cNvPr id="5" name="Content Placeholder 4"/>
+          <p:cNvPicPr>
+            <a:picLocks noGrp="1" noChangeAspect="1"/>
+          </p:cNvPicPr>
+          <p:nvPr>
+            <p:ph idx="1"/>
+          </p:nvPr>
+        </p:nvPicPr>
+        <p:blipFill>
+          <a:blip r:embed="rId2">
+            <a:extLst>
+              <a:ext uri="{28A0092B-C50C-407E-A947-70E740481C1C}">
+                <a14:useLocalDpi xmlns:a14="http://schemas.microsoft.com/office/drawing/2010/main" val="0"/>
+              </a:ext>
+            </a:extLst>
+          </a:blip>
+          <a:stretch>
+            <a:fillRect/>
+          </a:stretch>
+        </p:blipFill>
+        <p:spPr>
+          <a:xfrm>
+            <a:off x="508000" y="0"/>
+            <a:ext cx="9613900" cy="3467100"/>
+          </a:xfrm>
+        </p:spPr>
+      </p:pic>
+      <p:sp>
+        <p:nvSpPr>
+          <p:cNvPr id="6" name="Rectangle 5"/>
+          <p:cNvSpPr/>
+          <p:nvPr/>
+        </p:nvSpPr>
+        <p:spPr>
+          <a:xfrm>
+            <a:off x="104775" y="3638550"/>
+            <a:ext cx="12087225" cy="923330"/>
+          </a:xfrm>
+          <a:prstGeom prst="rect">
+            <a:avLst/>
+          </a:prstGeom>
+        </p:spPr>
+        <p:txBody>
+          <a:bodyPr wrap="square">
+            <a:spAutoFit/>
+          </a:bodyPr>
+          <a:lstStyle/>
+          <a:p>
+            <a:r>
+              <a:rPr lang="en-US" dirty="0">
+                <a:solidFill>
+                  <a:srgbClr val="1C1D1E"/>
+                </a:solidFill>
+                <a:latin typeface="Calibri" charset="0"/>
+                <a:ea typeface="Calibri" charset="0"/>
+                <a:cs typeface="Calibri" charset="0"/>
+              </a:rPr>
+              <a:t>The associated sums of AIC model weights recommended to assess relative importance of individual predictors are really a measure of relative importance of models, with little information about contributions by individual predictors compared to other measures of relative importance based on effects size or variance reduction.</a:t>
+            </a:r>
+            <a:endParaRPr lang="en-US" dirty="0">
+              <a:latin typeface="Calibri" charset="0"/>
+              <a:ea typeface="Calibri" charset="0"/>
+              <a:cs typeface="Calibri" charset="0"/>
+            </a:endParaRPr>
+          </a:p>
+        </p:txBody>
+      </p:sp>
+      <p:sp>
+        <p:nvSpPr>
+          <p:cNvPr id="7" name="TextBox 6"/>
+          <p:cNvSpPr txBox="1"/>
+          <p:nvPr/>
+        </p:nvSpPr>
+        <p:spPr>
+          <a:xfrm>
+            <a:off x="71322" y="4804785"/>
+            <a:ext cx="12058650" cy="1754326"/>
+          </a:xfrm>
+          <a:prstGeom prst="rect">
+            <a:avLst/>
+          </a:prstGeom>
+          <a:noFill/>
+        </p:spPr>
+        <p:txBody>
+          <a:bodyPr wrap="square" rtlCol="0">
+            <a:spAutoFit/>
+          </a:bodyPr>
+          <a:lstStyle/>
+          <a:p>
+            <a:r>
+              <a:rPr lang="en-US" dirty="0"/>
+              <a:t>The standardized estimates or equivalently the </a:t>
+            </a:r>
+            <a:r>
+              <a:rPr lang="en-US" i="1" dirty="0"/>
+              <a:t>t</a:t>
+            </a:r>
+            <a:r>
+              <a:rPr lang="en-US" dirty="0"/>
+              <a:t> statistics on unstandardized estimates also can be used to provide more informative measures of relative importance than sums of AIC weights. Finally, I illustrate how seriously compromised statistical interpretations and predictions can be for all three of these flawed practices by critiquing their use in a recent species distribution modeling technique developed for predicting Greater Sage‐Grouse (</a:t>
+            </a:r>
+            <a:r>
+              <a:rPr lang="en-US" i="1" dirty="0" err="1"/>
+              <a:t>Centrocercus</a:t>
+            </a:r>
+            <a:r>
+              <a:rPr lang="en-US" i="1" dirty="0"/>
+              <a:t> </a:t>
+            </a:r>
+            <a:r>
+              <a:rPr lang="en-US" i="1" dirty="0" err="1"/>
+              <a:t>urophasianus</a:t>
+            </a:r>
+            <a:r>
+              <a:rPr lang="en-US" dirty="0"/>
+              <a:t>) distribution in Colorado, USA. These model averaging issues are common in other ecological literature and ought to be discontinued if we are to make effective scientific contributions to ecological knowledge and conservation of natural resources.</a:t>
+            </a:r>
+          </a:p>
+        </p:txBody>
+      </p:sp>
+      <p:sp>
+        <p:nvSpPr>
+          <p:cNvPr id="8" name="Title 1"/>
+          <p:cNvSpPr>
+            <a:spLocks noGrp="1"/>
+          </p:cNvSpPr>
+          <p:nvPr>
+            <p:ph type="title"/>
+          </p:nvPr>
+        </p:nvSpPr>
+        <p:spPr>
+          <a:xfrm>
+            <a:off x="7734300" y="138990"/>
+            <a:ext cx="4610100" cy="1325563"/>
+          </a:xfrm>
+        </p:spPr>
+        <p:txBody>
+          <a:bodyPr>
+            <a:normAutofit/>
+          </a:bodyPr>
+          <a:lstStyle/>
+          <a:p>
+            <a:r>
+              <a:rPr lang="en-US" sz="3200" dirty="0"/>
+              <a:t>Don’t take my word for it</a:t>
+            </a:r>
+            <a:r>
+              <a:rPr lang="mr-IN" sz="3200" dirty="0"/>
+              <a:t>…</a:t>
+            </a:r>
+            <a:endParaRPr lang="en-US" sz="3200" dirty="0"/>
+          </a:p>
+        </p:txBody>
+      </p:sp>
+    </p:spTree>
+    <p:extLst>
+      <p:ext uri="{BB962C8B-B14F-4D97-AF65-F5344CB8AC3E}">
+        <p14:creationId xmlns:p14="http://schemas.microsoft.com/office/powerpoint/2010/main" val="676740780"/>
+      </p:ext>
+    </p:extLst>
+  </p:cSld>
+  <p:clrMapOvr>
+    <a:masterClrMapping/>
+  </p:clrMapOvr>
+</p:sld>
+</file>
+
+<file path=ppt/slides/slide51.xml><?xml version="1.0" encoding="utf-8"?>
 <p:sld xmlns:a="http://schemas.openxmlformats.org/drawingml/2006/main" xmlns:r="http://schemas.openxmlformats.org/officeDocument/2006/relationships" xmlns:p="http://schemas.openxmlformats.org/presentationml/2006/main">
   <p:cSld>
     <p:spTree>
@@ -27676,7 +30701,7 @@
 </p:sld>
 </file>
 
-<file path=ppt/slides/slide45.xml><?xml version="1.0" encoding="utf-8"?>
+<file path=ppt/slides/slide52.xml><?xml version="1.0" encoding="utf-8"?>
 <p:sld xmlns:a="http://schemas.openxmlformats.org/drawingml/2006/main" xmlns:r="http://schemas.openxmlformats.org/officeDocument/2006/relationships" xmlns:p="http://schemas.openxmlformats.org/presentationml/2006/main">
   <p:cSld>
     <p:spTree>
@@ -27705,132 +30730,21 @@
         </p:nvSpPr>
         <p:spPr>
           <a:xfrm>
-            <a:off x="7734300" y="440072"/>
-            <a:ext cx="4610100" cy="1325563"/>
+            <a:off x="466411" y="-117196"/>
+            <a:ext cx="10515600" cy="1325563"/>
           </a:xfrm>
         </p:spPr>
         <p:txBody>
-          <a:bodyPr>
-            <a:normAutofit/>
-          </a:bodyPr>
+          <a:bodyPr/>
           <a:lstStyle/>
           <a:p>
             <a:r>
-              <a:rPr lang="en-US" sz="3200" dirty="0"/>
-              <a:t>Don’t take my word for it</a:t>
-            </a:r>
-            <a:r>
-              <a:rPr lang="mr-IN" sz="3200" dirty="0"/>
-              <a:t>…</a:t>
-            </a:r>
-            <a:endParaRPr lang="en-US" sz="3200" dirty="0"/>
+              <a:rPr lang="en-US" dirty="0"/>
+              <a:t>Recommended Readings</a:t>
+            </a:r>
           </a:p>
         </p:txBody>
       </p:sp>
-      <p:pic>
-        <p:nvPicPr>
-          <p:cNvPr id="4" name="Content Placeholder 3"/>
-          <p:cNvPicPr>
-            <a:picLocks noGrp="1" noChangeAspect="1"/>
-          </p:cNvPicPr>
-          <p:nvPr>
-            <p:ph idx="1"/>
-          </p:nvPr>
-        </p:nvPicPr>
-        <p:blipFill>
-          <a:blip r:embed="rId2">
-            <a:extLst>
-              <a:ext uri="{28A0092B-C50C-407E-A947-70E740481C1C}">
-                <a14:useLocalDpi xmlns:a14="http://schemas.microsoft.com/office/drawing/2010/main" val="0"/>
-              </a:ext>
-            </a:extLst>
-          </a:blip>
-          <a:stretch>
-            <a:fillRect/>
-          </a:stretch>
-        </p:blipFill>
-        <p:spPr>
-          <a:xfrm>
-            <a:off x="-105790" y="0"/>
-            <a:ext cx="7687690" cy="2590800"/>
-          </a:xfrm>
-        </p:spPr>
-      </p:pic>
-      <p:sp>
-        <p:nvSpPr>
-          <p:cNvPr id="5" name="TextBox 4"/>
-          <p:cNvSpPr txBox="1"/>
-          <p:nvPr/>
-        </p:nvSpPr>
-        <p:spPr>
-          <a:xfrm>
-            <a:off x="468351" y="3107470"/>
-            <a:ext cx="11318488" cy="1200329"/>
-          </a:xfrm>
-          <a:prstGeom prst="rect">
-            <a:avLst/>
-          </a:prstGeom>
-          <a:noFill/>
-        </p:spPr>
-        <p:txBody>
-          <a:bodyPr wrap="square" rtlCol="0">
-            <a:spAutoFit/>
-          </a:bodyPr>
-          <a:lstStyle/>
-          <a:p>
-            <a:r>
-              <a:rPr lang="en-US" dirty="0"/>
-              <a:t>One way to avoid some of the problems associated with model selection is to “just say no” to data-driven model selection—in other words, ﬁt a single pre-speciﬁed model, one in which all explanatory variables are chosen prior to looking at their relationship with the response variable, and then use this model for inference (Harrell 2001, </a:t>
-            </a:r>
-            <a:r>
-              <a:rPr lang="en-US" dirty="0" err="1"/>
-              <a:t>Babyak</a:t>
-            </a:r>
-            <a:r>
-              <a:rPr lang="en-US" dirty="0"/>
-              <a:t> 2004, Whittingham et al. 2006, </a:t>
-            </a:r>
-            <a:r>
-              <a:rPr lang="en-US" dirty="0" err="1"/>
-              <a:t>Guidice</a:t>
-            </a:r>
-            <a:r>
-              <a:rPr lang="en-US" dirty="0"/>
-              <a:t> et al. 2012).</a:t>
-            </a:r>
-          </a:p>
-        </p:txBody>
-      </p:sp>
-    </p:spTree>
-    <p:extLst>
-      <p:ext uri="{BB962C8B-B14F-4D97-AF65-F5344CB8AC3E}">
-        <p14:creationId xmlns:p14="http://schemas.microsoft.com/office/powerpoint/2010/main" val="1130442753"/>
-      </p:ext>
-    </p:extLst>
-  </p:cSld>
-  <p:clrMapOvr>
-    <a:masterClrMapping/>
-  </p:clrMapOvr>
-</p:sld>
-</file>
-
-<file path=ppt/slides/slide46.xml><?xml version="1.0" encoding="utf-8"?>
-<p:sld xmlns:a="http://schemas.openxmlformats.org/drawingml/2006/main" xmlns:r="http://schemas.openxmlformats.org/officeDocument/2006/relationships" xmlns:p="http://schemas.openxmlformats.org/presentationml/2006/main">
-  <p:cSld>
-    <p:spTree>
-      <p:nvGrpSpPr>
-        <p:cNvPr id="1" name=""/>
-        <p:cNvGrpSpPr/>
-        <p:nvPr/>
-      </p:nvGrpSpPr>
-      <p:grpSpPr>
-        <a:xfrm>
-          <a:off x="0" y="0"/>
-          <a:ext cx="0" cy="0"/>
-          <a:chOff x="0" y="0"/>
-          <a:chExt cx="0" cy="0"/>
-        </a:xfrm>
-      </p:grpSpPr>
       <p:sp>
         <p:nvSpPr>
           <p:cNvPr id="3" name="Content Placeholder 2"/>
@@ -27843,606 +30757,179 @@
         </p:nvSpPr>
         <p:spPr>
           <a:xfrm>
-            <a:off x="838200" y="2933699"/>
-            <a:ext cx="10515600" cy="3167063"/>
+            <a:off x="466411" y="1453835"/>
+            <a:ext cx="10817888" cy="4585224"/>
           </a:xfrm>
         </p:spPr>
         <p:txBody>
-          <a:bodyPr/>
-          <a:lstStyle/>
-          <a:p>
-            <a:r>
-              <a:rPr lang="en-US" dirty="0"/>
-              <a:t>“If researchers want to accurately estimate the strength of multiple competing ecological processes along with reliable confidence intervals, their best hope is to use full (maximal) statistical models after making principled, </a:t>
-            </a:r>
-            <a:r>
-              <a:rPr lang="en-US" i="1" dirty="0"/>
-              <a:t>a priori </a:t>
-            </a:r>
-            <a:r>
-              <a:rPr lang="en-US" dirty="0"/>
-              <a:t>decisions about which predictors to include. “</a:t>
-            </a:r>
-          </a:p>
-          <a:p>
-            <a:endParaRPr lang="en-US" dirty="0"/>
-          </a:p>
-        </p:txBody>
-      </p:sp>
-      <p:pic>
-        <p:nvPicPr>
-          <p:cNvPr id="6" name="Picture 5" descr="Multi-panel plot of relative probability of selection versus canopy cover, distance to road, distance to water, and ruggedness, one row per species, with fitted curves and shaded confidence bands."/>
-          <p:cNvPicPr>
-            <a:picLocks noChangeAspect="1"/>
-          </p:cNvPicPr>
-          <p:nvPr/>
-        </p:nvPicPr>
-        <p:blipFill>
-          <a:blip r:embed="rId2"/>
-          <a:stretch>
-            <a:fillRect/>
-          </a:stretch>
-        </p:blipFill>
-        <p:spPr>
-          <a:xfrm>
-            <a:off x="-9525" y="0"/>
-            <a:ext cx="6459257" cy="2206645"/>
-          </a:xfrm>
-          <a:prstGeom prst="rect">
-            <a:avLst/>
-          </a:prstGeom>
-        </p:spPr>
-      </p:pic>
-      <p:sp>
-        <p:nvSpPr>
-          <p:cNvPr id="7" name="Title 1"/>
-          <p:cNvSpPr txBox="1">
-            <a:spLocks/>
-          </p:cNvSpPr>
-          <p:nvPr/>
-        </p:nvSpPr>
-        <p:spPr>
-          <a:xfrm>
-            <a:off x="7734300" y="440072"/>
-            <a:ext cx="4610100" cy="1325563"/>
-          </a:xfrm>
-          <a:prstGeom prst="rect">
-            <a:avLst/>
-          </a:prstGeom>
-        </p:spPr>
-        <p:txBody>
-          <a:bodyPr vert="horz" lIns="91440" tIns="45720" rIns="91440" bIns="45720" rtlCol="0" anchor="ctr">
-            <a:normAutofit/>
-          </a:bodyPr>
-          <a:lstStyle>
-            <a:lvl1pPr algn="l" defTabSz="914400" rtl="0" eaLnBrk="1" latinLnBrk="0" hangingPunct="1">
-              <a:lnSpc>
-                <a:spcPct val="90000"/>
-              </a:lnSpc>
-              <a:spcBef>
-                <a:spcPct val="0"/>
-              </a:spcBef>
-              <a:buNone/>
-              <a:defRPr sz="4400" kern="1200">
-                <a:solidFill>
-                  <a:schemeClr val="tx1"/>
-                </a:solidFill>
-                <a:latin typeface="+mj-lt"/>
-                <a:ea typeface="+mj-ea"/>
-                <a:cs typeface="+mj-cs"/>
-              </a:defRPr>
-            </a:lvl1pPr>
-          </a:lstStyle>
-          <a:p>
-            <a:r>
-              <a:rPr lang="en-US" sz="3200"/>
-              <a:t>Don’t take my word for it</a:t>
-            </a:r>
-            <a:r>
-              <a:rPr lang="mr-IN" sz="3200"/>
-              <a:t>…</a:t>
-            </a:r>
-            <a:endParaRPr lang="en-US" sz="3200" dirty="0"/>
-          </a:p>
-        </p:txBody>
-      </p:sp>
-      <p:sp>
-        <p:nvSpPr>
-          <p:cNvPr id="2" name="TextBox 1">
-            <a:extLst>
-              <a:ext uri="{FF2B5EF4-FFF2-40B4-BE49-F238E27FC236}">
-                <a16:creationId xmlns:a16="http://schemas.microsoft.com/office/drawing/2014/main" id="{D4209813-2DE1-51FF-FDDB-74CC992238B0}"/>
-              </a:ext>
-            </a:extLst>
-          </p:cNvPr>
-          <p:cNvSpPr txBox="1"/>
-          <p:nvPr/>
-        </p:nvSpPr>
-        <p:spPr>
-          <a:xfrm>
-            <a:off x="838200" y="6417928"/>
-            <a:ext cx="10155922" cy="369332"/>
-          </a:xfrm>
-          <a:prstGeom prst="rect">
-            <a:avLst/>
-          </a:prstGeom>
-          <a:noFill/>
-        </p:spPr>
-        <p:txBody>
-          <a:bodyPr wrap="none" rtlCol="0">
-            <a:spAutoFit/>
+          <a:bodyPr>
+            <a:normAutofit fontScale="85000" lnSpcReduction="20000"/>
           </a:bodyPr>
           <a:lstStyle/>
           <a:p>
             <a:r>
+              <a:rPr lang="en-US" dirty="0" err="1"/>
+              <a:t>Aho</a:t>
+            </a:r>
+            <a:r>
               <a:rPr lang="en-US" dirty="0"/>
-              <a:t>Left as a preprint for years until Bolker finally submitted it to a journal after we chatted about this problem</a:t>
-            </a:r>
+              <a:t> et al. 2014 “Model selection for ecologists: The worldviews of AIC and BIC”. Ecology</a:t>
+            </a:r>
+          </a:p>
+          <a:p>
+            <a:r>
+              <a:rPr lang="en-US" dirty="0" err="1"/>
+              <a:t>Shmueli</a:t>
+            </a:r>
+            <a:r>
+              <a:rPr lang="en-US" dirty="0"/>
+              <a:t> 2010 “To explain or to predict”. Statistical Science</a:t>
+            </a:r>
+          </a:p>
+          <a:p>
+            <a:r>
+              <a:rPr lang="en-US" dirty="0" err="1"/>
+              <a:t>Murtaugh</a:t>
+            </a:r>
+            <a:r>
+              <a:rPr lang="en-US" dirty="0"/>
+              <a:t> 2007 “Simplicity and complexity in ecological data analysis”. Ecology</a:t>
+            </a:r>
+          </a:p>
+          <a:p>
+            <a:r>
+              <a:rPr lang="en-US" dirty="0"/>
+              <a:t>Arnold </a:t>
+            </a:r>
+            <a:r>
+              <a:rPr lang="en-US" dirty="0">
+                <a:latin typeface="Calibri" panose="020F0502020204030204" pitchFamily="34" charset="0"/>
+                <a:cs typeface="Calibri" panose="020F0502020204030204" pitchFamily="34" charset="0"/>
+              </a:rPr>
+              <a:t>2010 “</a:t>
+            </a:r>
+            <a:r>
+              <a:rPr lang="en-US" i="0" dirty="0">
+                <a:solidFill>
+                  <a:srgbClr val="1C1D1E"/>
+                </a:solidFill>
+                <a:effectLst/>
+                <a:highlight>
+                  <a:srgbClr val="FFFFFF"/>
+                </a:highlight>
+                <a:latin typeface="Calibri" panose="020F0502020204030204" pitchFamily="34" charset="0"/>
+                <a:cs typeface="Calibri" panose="020F0502020204030204" pitchFamily="34" charset="0"/>
+              </a:rPr>
+              <a:t>Uninformative Parameters and Model Selection Using Akaike's Information Criterion” JWM</a:t>
+            </a:r>
+          </a:p>
+          <a:p>
+            <a:r>
+              <a:rPr lang="en-US" dirty="0">
+                <a:latin typeface="Calibri" panose="020F0502020204030204" pitchFamily="34" charset="0"/>
+                <a:cs typeface="Calibri" panose="020F0502020204030204" pitchFamily="34" charset="0"/>
+              </a:rPr>
+              <a:t>”Murtaugh </a:t>
+            </a:r>
+            <a:r>
+              <a:rPr lang="en-US" dirty="0"/>
+              <a:t>2014 “In defense of P-values”. Ecology</a:t>
+            </a:r>
+          </a:p>
+          <a:p>
+            <a:r>
+              <a:rPr lang="en-US" dirty="0" err="1"/>
+              <a:t>Fieberg</a:t>
+            </a:r>
+            <a:r>
+              <a:rPr lang="en-US" dirty="0"/>
+              <a:t> and Johnson 2015 “MMI: </a:t>
+            </a:r>
+            <a:r>
+              <a:rPr lang="en-US" dirty="0" err="1"/>
+              <a:t>Multimodel</a:t>
+            </a:r>
+            <a:r>
+              <a:rPr lang="en-US" dirty="0"/>
+              <a:t> Inference or Models </a:t>
+            </a:r>
+            <a:r>
+              <a:rPr lang="en-US" dirty="0">
+                <a:latin typeface="Calibri" panose="020F0502020204030204" pitchFamily="34" charset="0"/>
+                <a:cs typeface="Calibri" panose="020F0502020204030204" pitchFamily="34" charset="0"/>
+              </a:rPr>
+              <a:t>With Management Implications?”. Journal of Wildlife Management </a:t>
+            </a:r>
+          </a:p>
+          <a:p>
+            <a:r>
+              <a:rPr lang="en-US" dirty="0">
+                <a:latin typeface="Calibri" panose="020F0502020204030204" pitchFamily="34" charset="0"/>
+                <a:cs typeface="Calibri" panose="020F0502020204030204" pitchFamily="34" charset="0"/>
+              </a:rPr>
+              <a:t>Sutherland et al. 2023 “Practical advice on variable selection and reporting using Akaike information criterion. Proceedings B</a:t>
+            </a:r>
+          </a:p>
+          <a:p>
+            <a:r>
+              <a:rPr lang="en-US" dirty="0" err="1">
+                <a:latin typeface="Calibri" panose="020F0502020204030204" pitchFamily="34" charset="0"/>
+                <a:cs typeface="Calibri" panose="020F0502020204030204" pitchFamily="34" charset="0"/>
+              </a:rPr>
+              <a:t>Bolker</a:t>
+            </a:r>
+            <a:r>
+              <a:rPr lang="en-US" dirty="0">
+                <a:latin typeface="Calibri" panose="020F0502020204030204" pitchFamily="34" charset="0"/>
+                <a:cs typeface="Calibri" panose="020F0502020204030204" pitchFamily="34" charset="0"/>
+              </a:rPr>
+              <a:t> 2024 “</a:t>
+            </a:r>
+            <a:r>
+              <a:rPr lang="en-US" i="0" dirty="0" err="1">
+                <a:solidFill>
+                  <a:srgbClr val="000000"/>
+                </a:solidFill>
+                <a:effectLst/>
+                <a:highlight>
+                  <a:srgbClr val="FFFFFF"/>
+                </a:highlight>
+                <a:latin typeface="Calibri" panose="020F0502020204030204" pitchFamily="34" charset="0"/>
+                <a:cs typeface="Calibri" panose="020F0502020204030204" pitchFamily="34" charset="0"/>
+              </a:rPr>
+              <a:t>Multimodel</a:t>
+            </a:r>
+            <a:r>
+              <a:rPr lang="en-US" i="0" dirty="0">
+                <a:solidFill>
+                  <a:srgbClr val="000000"/>
+                </a:solidFill>
+                <a:effectLst/>
+                <a:highlight>
+                  <a:srgbClr val="FFFFFF"/>
+                </a:highlight>
+                <a:latin typeface="Calibri" panose="020F0502020204030204" pitchFamily="34" charset="0"/>
+                <a:cs typeface="Calibri" panose="020F0502020204030204" pitchFamily="34" charset="0"/>
+              </a:rPr>
+              <a:t> Approaches Are Not the Best Way to Understand Multifactorial Systems</a:t>
+            </a:r>
+            <a:r>
+              <a:rPr lang="en-US" dirty="0">
+                <a:latin typeface="Calibri" panose="020F0502020204030204" pitchFamily="34" charset="0"/>
+                <a:cs typeface="Calibri" panose="020F0502020204030204" pitchFamily="34" charset="0"/>
+              </a:rPr>
+              <a:t>”. Entropy</a:t>
+            </a:r>
+          </a:p>
+          <a:p>
+            <a:endParaRPr lang="en-US" dirty="0"/>
           </a:p>
         </p:txBody>
       </p:sp>
     </p:spTree>
     <p:extLst>
       <p:ext uri="{BB962C8B-B14F-4D97-AF65-F5344CB8AC3E}">
-        <p14:creationId xmlns:p14="http://schemas.microsoft.com/office/powerpoint/2010/main" val="618075164"/>
-      </p:ext>
-    </p:extLst>
-  </p:cSld>
-  <p:clrMapOvr>
-    <a:masterClrMapping/>
-  </p:clrMapOvr>
-</p:sld>
-</file>
-
-<file path=ppt/slides/slide47.xml><?xml version="1.0" encoding="utf-8"?>
-<p:sld xmlns:a="http://schemas.openxmlformats.org/drawingml/2006/main" xmlns:r="http://schemas.openxmlformats.org/officeDocument/2006/relationships" xmlns:p="http://schemas.openxmlformats.org/presentationml/2006/main">
-  <p:cSld>
-    <p:spTree>
-      <p:nvGrpSpPr>
-        <p:cNvPr id="1" name=""/>
-        <p:cNvGrpSpPr/>
-        <p:nvPr/>
-      </p:nvGrpSpPr>
-      <p:grpSpPr>
-        <a:xfrm>
-          <a:off x="0" y="0"/>
-          <a:ext cx="0" cy="0"/>
-          <a:chOff x="0" y="0"/>
-          <a:chExt cx="0" cy="0"/>
-        </a:xfrm>
-      </p:grpSpPr>
-      <p:pic>
-        <p:nvPicPr>
-          <p:cNvPr id="5" name="Content Placeholder 4"/>
-          <p:cNvPicPr>
-            <a:picLocks noGrp="1" noChangeAspect="1"/>
-          </p:cNvPicPr>
-          <p:nvPr>
-            <p:ph idx="1"/>
-          </p:nvPr>
-        </p:nvPicPr>
-        <p:blipFill>
-          <a:blip r:embed="rId2">
-            <a:extLst>
-              <a:ext uri="{28A0092B-C50C-407E-A947-70E740481C1C}">
-                <a14:useLocalDpi xmlns:a14="http://schemas.microsoft.com/office/drawing/2010/main" val="0"/>
-              </a:ext>
-            </a:extLst>
-          </a:blip>
-          <a:stretch>
-            <a:fillRect/>
-          </a:stretch>
-        </p:blipFill>
-        <p:spPr>
-          <a:xfrm>
-            <a:off x="508000" y="0"/>
-            <a:ext cx="9613900" cy="3467100"/>
-          </a:xfrm>
-        </p:spPr>
-      </p:pic>
-      <p:sp>
-        <p:nvSpPr>
-          <p:cNvPr id="6" name="Rectangle 5"/>
-          <p:cNvSpPr/>
-          <p:nvPr/>
-        </p:nvSpPr>
-        <p:spPr>
-          <a:xfrm>
-            <a:off x="104775" y="3638550"/>
-            <a:ext cx="12087225" cy="923330"/>
-          </a:xfrm>
-          <a:prstGeom prst="rect">
-            <a:avLst/>
-          </a:prstGeom>
-        </p:spPr>
-        <p:txBody>
-          <a:bodyPr wrap="square">
-            <a:spAutoFit/>
-          </a:bodyPr>
-          <a:lstStyle/>
-          <a:p>
-            <a:r>
-              <a:rPr lang="en-US" dirty="0">
-                <a:solidFill>
-                  <a:srgbClr val="1C1D1E"/>
-                </a:solidFill>
-                <a:latin typeface="Calibri" charset="0"/>
-                <a:ea typeface="Calibri" charset="0"/>
-                <a:cs typeface="Calibri" charset="0"/>
-              </a:rPr>
-              <a:t>The associated sums of AIC model weights recommended to assess relative importance of individual predictors are really a measure of relative importance of models, with little information about contributions by individual predictors compared to other measures of relative importance based on effects size or variance reduction.</a:t>
-            </a:r>
-            <a:endParaRPr lang="en-US" dirty="0">
-              <a:latin typeface="Calibri" charset="0"/>
-              <a:ea typeface="Calibri" charset="0"/>
-              <a:cs typeface="Calibri" charset="0"/>
-            </a:endParaRPr>
-          </a:p>
-        </p:txBody>
-      </p:sp>
-      <p:sp>
-        <p:nvSpPr>
-          <p:cNvPr id="7" name="TextBox 6"/>
-          <p:cNvSpPr txBox="1"/>
-          <p:nvPr/>
-        </p:nvSpPr>
-        <p:spPr>
-          <a:xfrm>
-            <a:off x="71322" y="4804785"/>
-            <a:ext cx="12058650" cy="1754326"/>
-          </a:xfrm>
-          <a:prstGeom prst="rect">
-            <a:avLst/>
-          </a:prstGeom>
-          <a:noFill/>
-        </p:spPr>
-        <p:txBody>
-          <a:bodyPr wrap="square" rtlCol="0">
-            <a:spAutoFit/>
-          </a:bodyPr>
-          <a:lstStyle/>
-          <a:p>
-            <a:r>
-              <a:rPr lang="en-US" dirty="0"/>
-              <a:t>The standardized estimates or equivalently the </a:t>
-            </a:r>
-            <a:r>
-              <a:rPr lang="en-US" i="1" dirty="0"/>
-              <a:t>t</a:t>
-            </a:r>
-            <a:r>
-              <a:rPr lang="en-US" dirty="0"/>
-              <a:t> statistics on unstandardized estimates also can be used to provide more informative measures of relative importance than sums of AIC weights. Finally, I illustrate how seriously compromised statistical interpretations and predictions can be for all three of these flawed practices by critiquing their use in a recent species distribution modeling technique developed for predicting Greater Sage‐Grouse (</a:t>
-            </a:r>
-            <a:r>
-              <a:rPr lang="en-US" i="1" dirty="0" err="1"/>
-              <a:t>Centrocercus</a:t>
-            </a:r>
-            <a:r>
-              <a:rPr lang="en-US" i="1" dirty="0"/>
-              <a:t> </a:t>
-            </a:r>
-            <a:r>
-              <a:rPr lang="en-US" i="1" dirty="0" err="1"/>
-              <a:t>urophasianus</a:t>
-            </a:r>
-            <a:r>
-              <a:rPr lang="en-US" dirty="0"/>
-              <a:t>) distribution in Colorado, USA. These model averaging issues are common in other ecological literature and ought to be discontinued if we are to make effective scientific contributions to ecological knowledge and conservation of natural resources.</a:t>
-            </a:r>
-          </a:p>
-        </p:txBody>
-      </p:sp>
-      <p:sp>
-        <p:nvSpPr>
-          <p:cNvPr id="8" name="Title 1"/>
-          <p:cNvSpPr>
-            <a:spLocks noGrp="1"/>
-          </p:cNvSpPr>
-          <p:nvPr>
-            <p:ph type="title"/>
-          </p:nvPr>
-        </p:nvSpPr>
-        <p:spPr>
-          <a:xfrm>
-            <a:off x="7734300" y="138990"/>
-            <a:ext cx="4610100" cy="1325563"/>
-          </a:xfrm>
-        </p:spPr>
-        <p:txBody>
-          <a:bodyPr>
-            <a:normAutofit/>
-          </a:bodyPr>
-          <a:lstStyle/>
-          <a:p>
-            <a:r>
-              <a:rPr lang="en-US" sz="3200" dirty="0"/>
-              <a:t>Don’t take my word for it</a:t>
-            </a:r>
-            <a:r>
-              <a:rPr lang="mr-IN" sz="3200" dirty="0"/>
-              <a:t>…</a:t>
-            </a:r>
-            <a:endParaRPr lang="en-US" sz="3200" dirty="0"/>
-          </a:p>
-        </p:txBody>
-      </p:sp>
-    </p:spTree>
-    <p:extLst>
-      <p:ext uri="{BB962C8B-B14F-4D97-AF65-F5344CB8AC3E}">
-        <p14:creationId xmlns:p14="http://schemas.microsoft.com/office/powerpoint/2010/main" val="676740780"/>
-      </p:ext>
-    </p:extLst>
-  </p:cSld>
-  <p:clrMapOvr>
-    <a:masterClrMapping/>
-  </p:clrMapOvr>
-</p:sld>
-</file>
-
-<file path=ppt/slides/slide5.xml><?xml version="1.0" encoding="utf-8"?>
-<p:sld xmlns:a="http://schemas.openxmlformats.org/drawingml/2006/main" xmlns:r="http://schemas.openxmlformats.org/officeDocument/2006/relationships" xmlns:p="http://schemas.openxmlformats.org/presentationml/2006/main">
-  <p:cSld>
-    <p:spTree>
-      <p:nvGrpSpPr>
-        <p:cNvPr id="1" name="">
-          <a:extLst>
-            <a:ext uri="{FF2B5EF4-FFF2-40B4-BE49-F238E27FC236}">
-              <a16:creationId xmlns:a16="http://schemas.microsoft.com/office/drawing/2014/main" id="{D908C135-D483-82D1-6E59-58FAECF6E0E4}"/>
-            </a:ext>
-          </a:extLst>
-        </p:cNvPr>
-        <p:cNvGrpSpPr/>
-        <p:nvPr/>
-      </p:nvGrpSpPr>
-      <p:grpSpPr>
-        <a:xfrm>
-          <a:off x="0" y="0"/>
-          <a:ext cx="0" cy="0"/>
-          <a:chOff x="0" y="0"/>
-          <a:chExt cx="0" cy="0"/>
-        </a:xfrm>
-      </p:grpSpPr>
-      <p:sp>
-        <p:nvSpPr>
-          <p:cNvPr id="2" name="Title 1">
-            <a:extLst>
-              <a:ext uri="{FF2B5EF4-FFF2-40B4-BE49-F238E27FC236}">
-                <a16:creationId xmlns:a16="http://schemas.microsoft.com/office/drawing/2014/main" id="{4E56792E-7439-7DB1-6307-908ECCFBA886}"/>
-              </a:ext>
-            </a:extLst>
-          </p:cNvPr>
-          <p:cNvSpPr>
-            <a:spLocks noGrp="1"/>
-          </p:cNvSpPr>
-          <p:nvPr>
-            <p:ph type="title"/>
-          </p:nvPr>
-        </p:nvSpPr>
-        <p:spPr/>
-        <p:txBody>
-          <a:bodyPr/>
-          <a:lstStyle/>
-          <a:p>
-            <a:pPr algn="ctr"/>
-            <a:r>
-              <a:rPr lang="en-US" sz="4000" dirty="0">
-                <a:solidFill>
-                  <a:srgbClr val="2E3192"/>
-                </a:solidFill>
-                <a:latin typeface="Arial"/>
-              </a:rPr>
-              <a:t>Fit?</a:t>
-            </a:r>
-          </a:p>
-        </p:txBody>
-      </p:sp>
-      <p:sp>
-        <p:nvSpPr>
-          <p:cNvPr id="3" name="Content Placeholder 2">
-            <a:extLst>
-              <a:ext uri="{FF2B5EF4-FFF2-40B4-BE49-F238E27FC236}">
-                <a16:creationId xmlns:a16="http://schemas.microsoft.com/office/drawing/2014/main" id="{97EC3889-C678-9C45-24A6-C1F5396A85B4}"/>
-              </a:ext>
-            </a:extLst>
-          </p:cNvPr>
-          <p:cNvSpPr>
-            <a:spLocks noGrp="1"/>
-          </p:cNvSpPr>
-          <p:nvPr>
-            <p:ph idx="1"/>
-          </p:nvPr>
-        </p:nvSpPr>
-        <p:spPr/>
-        <p:txBody>
-          <a:bodyPr/>
-          <a:lstStyle/>
-          <a:p>
-            <a:pPr marL="457200" indent="-457200">
-              <a:spcBef>
-                <a:spcPts val="1200"/>
-              </a:spcBef>
-              <a:buFont typeface="Arial"/>
-              <a:buChar char="•"/>
-            </a:pPr>
-            <a:r>
-              <a:rPr lang="en-US" sz="2200" dirty="0">
-                <a:solidFill>
-                  <a:srgbClr val="202040"/>
-                </a:solidFill>
-                <a:latin typeface="Arial"/>
-              </a:rPr>
-              <a:t>Compare “fit” of different models</a:t>
-            </a:r>
-          </a:p>
-          <a:p>
-            <a:pPr marL="457200" indent="-457200">
-              <a:spcBef>
-                <a:spcPts val="1200"/>
-              </a:spcBef>
-              <a:buFont typeface="Arial"/>
-              <a:buChar char="•"/>
-            </a:pPr>
-            <a:r>
-              <a:rPr lang="en-US" sz="2200" dirty="0">
-                <a:solidFill>
-                  <a:srgbClr val="202040"/>
-                </a:solidFill>
-                <a:latin typeface="Arial"/>
-              </a:rPr>
-              <a:t>Define “fit” — (maximum) </a:t>
-            </a:r>
-            <a:r>
-              <a:rPr lang="en-US" sz="2200" b="1" dirty="0">
-                <a:solidFill>
-                  <a:srgbClr val="202040"/>
-                </a:solidFill>
-                <a:latin typeface="Arial"/>
-              </a:rPr>
-              <a:t>likelihood</a:t>
-            </a:r>
-            <a:r>
-              <a:rPr lang="en-US" sz="2200" dirty="0">
-                <a:solidFill>
-                  <a:srgbClr val="202040"/>
-                </a:solidFill>
-                <a:latin typeface="Arial"/>
-              </a:rPr>
-              <a:t>?</a:t>
-            </a:r>
-          </a:p>
-          <a:p>
-            <a:pPr marL="457200" indent="-457200">
-              <a:spcBef>
-                <a:spcPts val="1200"/>
-              </a:spcBef>
-              <a:buFont typeface="Arial"/>
-              <a:buChar char="•"/>
-            </a:pPr>
-            <a:r>
-              <a:rPr lang="en-US" sz="2200" dirty="0">
-                <a:solidFill>
-                  <a:srgbClr val="202040"/>
-                </a:solidFill>
-                <a:latin typeface="Arial"/>
-              </a:rPr>
-              <a:t>Increases when adding more variables</a:t>
-            </a:r>
-          </a:p>
-          <a:p>
-            <a:pPr marL="457200" indent="-457200">
-              <a:spcBef>
-                <a:spcPts val="1200"/>
-              </a:spcBef>
-              <a:buFont typeface="Arial"/>
-              <a:buChar char="•"/>
-            </a:pPr>
-            <a:r>
-              <a:rPr lang="en-US" sz="2200" dirty="0">
-                <a:solidFill>
-                  <a:srgbClr val="202040"/>
-                </a:solidFill>
-                <a:latin typeface="Arial"/>
-              </a:rPr>
-              <a:t>Need to </a:t>
-            </a:r>
-            <a:r>
-              <a:rPr lang="en-US" sz="2200" b="1" dirty="0">
-                <a:solidFill>
-                  <a:srgbClr val="202040"/>
-                </a:solidFill>
-                <a:latin typeface="Arial"/>
-              </a:rPr>
-              <a:t>penalise</a:t>
-            </a:r>
-            <a:r>
-              <a:rPr lang="en-US" sz="2200" dirty="0">
-                <a:solidFill>
-                  <a:srgbClr val="202040"/>
-                </a:solidFill>
-                <a:latin typeface="Arial"/>
-              </a:rPr>
-              <a:t> fit somehow (to avoid overfitting)</a:t>
-            </a:r>
-          </a:p>
-          <a:p>
-            <a:pPr marL="457200" indent="-457200">
-              <a:spcBef>
-                <a:spcPts val="1200"/>
-              </a:spcBef>
-              <a:buFont typeface="Arial"/>
-              <a:buChar char="•"/>
-            </a:pPr>
-            <a:r>
-              <a:rPr lang="en-US" sz="2200" dirty="0">
-                <a:solidFill>
-                  <a:srgbClr val="202040"/>
-                </a:solidFill>
-                <a:latin typeface="Arial"/>
-              </a:rPr>
-              <a:t>Choice between different approaches reflects choice of penalty</a:t>
-            </a:r>
-          </a:p>
-          <a:p>
-            <a:pPr marL="914400" indent="-457200">
-              <a:spcBef>
-                <a:spcPts val="1200"/>
-              </a:spcBef>
-              <a:buFont typeface="Arial"/>
-              <a:buChar char="–"/>
-            </a:pPr>
-            <a:r>
-              <a:rPr lang="en-US" sz="2000" dirty="0">
-                <a:solidFill>
-                  <a:srgbClr val="202040"/>
-                </a:solidFill>
-                <a:latin typeface="Arial"/>
-              </a:rPr>
-              <a:t>sometimes just </a:t>
-            </a:r>
-            <a:r>
-              <a:rPr lang="en-US" sz="2000" b="1" dirty="0">
-                <a:solidFill>
-                  <a:srgbClr val="202040"/>
-                </a:solidFill>
-                <a:latin typeface="Arial"/>
-              </a:rPr>
-              <a:t>strength</a:t>
-            </a:r>
-            <a:r>
-              <a:rPr lang="en-US" sz="2000" dirty="0">
-                <a:solidFill>
-                  <a:srgbClr val="202040"/>
-                </a:solidFill>
-                <a:latin typeface="Arial"/>
-              </a:rPr>
-              <a:t> of penalty</a:t>
-            </a:r>
-          </a:p>
-          <a:p>
-            <a:pPr marL="457200" indent="-457200">
-              <a:spcBef>
-                <a:spcPts val="1200"/>
-              </a:spcBef>
-              <a:buFont typeface="Arial"/>
-              <a:buChar char="•"/>
-            </a:pPr>
-            <a:r>
-              <a:rPr lang="en-US" sz="2200" dirty="0">
-                <a:solidFill>
-                  <a:srgbClr val="202040"/>
-                </a:solidFill>
-                <a:latin typeface="Arial"/>
-              </a:rPr>
-              <a:t>Three ways of comparing likelihoods…</a:t>
-            </a:r>
-          </a:p>
-        </p:txBody>
-      </p:sp>
-    </p:spTree>
-    <p:extLst>
-      <p:ext uri="{BB962C8B-B14F-4D97-AF65-F5344CB8AC3E}">
-        <p14:creationId xmlns:p14="http://schemas.microsoft.com/office/powerpoint/2010/main" val="3685508012"/>
+        <p14:creationId xmlns:p14="http://schemas.microsoft.com/office/powerpoint/2010/main" val="333524267"/>
       </p:ext>
     </p:extLst>
   </p:cSld>
@@ -28783,6 +31270,90 @@
                 <a:latin typeface="Cambria"/>
               </a:rPr>
               <a:t>−2 log ℓ(θ̂₁) + 2 log ℓ(θ̂₂)   ~   χ² with df = p₂ − p₁</a:t>
+            </a:r>
+          </a:p>
+        </p:txBody>
+      </p:sp>
+      <p:sp>
+        <p:nvSpPr>
+          <p:cNvPr id="4" name="TextBox 3">
+            <a:extLst>
+              <a:ext uri="{FF2B5EF4-FFF2-40B4-BE49-F238E27FC236}">
+                <a16:creationId xmlns:a16="http://schemas.microsoft.com/office/drawing/2014/main" id="{9A408CA3-B491-37F5-5BD4-AAB27B796D72}"/>
+              </a:ext>
+            </a:extLst>
+          </p:cNvPr>
+          <p:cNvSpPr txBox="1"/>
+          <p:nvPr/>
+        </p:nvSpPr>
+        <p:spPr>
+          <a:xfrm>
+            <a:off x="1612012" y="5604014"/>
+            <a:ext cx="1119217" cy="707886"/>
+          </a:xfrm>
+          <a:prstGeom prst="rect">
+            <a:avLst/>
+          </a:prstGeom>
+          <a:noFill/>
+        </p:spPr>
+        <p:txBody>
+          <a:bodyPr wrap="none" rtlCol="0">
+            <a:spAutoFit/>
+          </a:bodyPr>
+          <a:lstStyle/>
+          <a:p>
+            <a:r>
+              <a:rPr lang="en-US" sz="2000" dirty="0"/>
+              <a:t>Reduced</a:t>
+            </a:r>
+          </a:p>
+          <a:p>
+            <a:r>
+              <a:rPr lang="en-US" sz="2000" dirty="0"/>
+              <a:t>(simpler)</a:t>
+            </a:r>
+          </a:p>
+        </p:txBody>
+      </p:sp>
+      <p:sp>
+        <p:nvSpPr>
+          <p:cNvPr id="5" name="TextBox 4">
+            <a:extLst>
+              <a:ext uri="{FF2B5EF4-FFF2-40B4-BE49-F238E27FC236}">
+                <a16:creationId xmlns:a16="http://schemas.microsoft.com/office/drawing/2014/main" id="{902C259D-4C7B-0C53-93DA-F4E6EA5FFD0D}"/>
+              </a:ext>
+            </a:extLst>
+          </p:cNvPr>
+          <p:cNvSpPr txBox="1"/>
+          <p:nvPr/>
+        </p:nvSpPr>
+        <p:spPr>
+          <a:xfrm>
+            <a:off x="3357557" y="5604014"/>
+            <a:ext cx="1217385" cy="707886"/>
+          </a:xfrm>
+          <a:prstGeom prst="rect">
+            <a:avLst/>
+          </a:prstGeom>
+          <a:noFill/>
+        </p:spPr>
+        <p:txBody>
+          <a:bodyPr wrap="none" rtlCol="0">
+            <a:spAutoFit/>
+          </a:bodyPr>
+          <a:lstStyle/>
+          <a:p>
+            <a:pPr algn="ctr"/>
+            <a:r>
+              <a:rPr lang="en-US" sz="2000" dirty="0"/>
+              <a:t>Full</a:t>
+            </a:r>
+          </a:p>
+          <a:p>
+            <a:pPr algn="ctr"/>
+            <a:r>
+              <a:rPr lang="en-US" sz="2000" dirty="0"/>
+              <a:t>(complex)</a:t>
             </a:r>
           </a:p>
         </p:txBody>

--- a/Day3_MixedModels_ModelSelection/FW536_Day3_Afternoon_hypothesis test and model selection_accessible.pptx
+++ b/Day3_MixedModels_ModelSelection/FW536_Day3_Afternoon_hypothesis test and model selection_accessible.pptx
@@ -27548,7 +27548,7 @@
                 </a:solidFill>
                 <a:latin typeface="Arial"/>
               </a:rPr>
-              <a:t>But it can only compare the models you wrote down \u2014 and every one of them is a straight-line combination of the terms you chose.</a:t>
+              <a:t>But it can only compare the models you wrote down — and every one of them is a straight-line combination of the terms you chose.</a:t>
             </a:r>
           </a:p>
           <a:p>

--- a/Day3_MixedModels_ModelSelection/FW536_Day3_Afternoon_hypothesis test and model selection_accessible.pptx
+++ b/Day3_MixedModels_ModelSelection/FW536_Day3_Afternoon_hypothesis test and model selection_accessible.pptx
@@ -248,7 +248,7 @@
           <a:p>
             <a:fld id="{44D06378-EEEF-5A4B-8DAF-16D302AF37FE}" type="datetimeFigureOut">
               <a:rPr lang="en-US" smtClean="0"/>
-              <a:t>8/31/26</a:t>
+              <a:t>9/1/26</a:t>
             </a:fld>
             <a:endParaRPr lang="en-US"/>
           </a:p>
@@ -655,7 +655,7 @@
               </a14:hiddenEffects>
             </a:ext>
             <a:ext uri="{FAA26D3D-D897-4be2-8F04-BA451C77F1D7}">
-              <ma14:placeholderFlag xmlns:ma14="http://schemas.microsoft.com/office/mac/drawingml/2011/main" xmlns="" val="1"/>
+              <ma14:placeholderFlag xmlns="" xmlns:ma14="http://schemas.microsoft.com/office/mac/drawingml/2011/main" val="1"/>
             </a:ext>
           </a:extLst>
         </p:spPr>
@@ -740,7 +740,7 @@
               </a14:hiddenEffects>
             </a:ext>
             <a:ext uri="{FAA26D3D-D897-4be2-8F04-BA451C77F1D7}">
-              <ma14:placeholderFlag xmlns:ma14="http://schemas.microsoft.com/office/mac/drawingml/2011/main" xmlns="" val="1"/>
+              <ma14:placeholderFlag xmlns="" xmlns:ma14="http://schemas.microsoft.com/office/mac/drawingml/2011/main" val="1"/>
             </a:ext>
           </a:extLst>
         </p:spPr>
@@ -825,7 +825,7 @@
               </a14:hiddenEffects>
             </a:ext>
             <a:ext uri="{FAA26D3D-D897-4be2-8F04-BA451C77F1D7}">
-              <ma14:placeholderFlag xmlns:ma14="http://schemas.microsoft.com/office/mac/drawingml/2011/main" xmlns="" val="1"/>
+              <ma14:placeholderFlag xmlns="" xmlns:ma14="http://schemas.microsoft.com/office/mac/drawingml/2011/main" val="1"/>
             </a:ext>
           </a:extLst>
         </p:spPr>
@@ -910,7 +910,7 @@
               </a14:hiddenEffects>
             </a:ext>
             <a:ext uri="{FAA26D3D-D897-4be2-8F04-BA451C77F1D7}">
-              <ma14:placeholderFlag xmlns:ma14="http://schemas.microsoft.com/office/mac/drawingml/2011/main" xmlns="" val="1"/>
+              <ma14:placeholderFlag xmlns="" xmlns:ma14="http://schemas.microsoft.com/office/mac/drawingml/2011/main" val="1"/>
             </a:ext>
           </a:extLst>
         </p:spPr>
@@ -995,7 +995,7 @@
               </a14:hiddenEffects>
             </a:ext>
             <a:ext uri="{FAA26D3D-D897-4be2-8F04-BA451C77F1D7}">
-              <ma14:placeholderFlag xmlns:ma14="http://schemas.microsoft.com/office/mac/drawingml/2011/main" xmlns="" val="1"/>
+              <ma14:placeholderFlag xmlns="" xmlns:ma14="http://schemas.microsoft.com/office/mac/drawingml/2011/main" val="1"/>
             </a:ext>
           </a:extLst>
         </p:spPr>
@@ -1080,7 +1080,7 @@
               </a14:hiddenEffects>
             </a:ext>
             <a:ext uri="{FAA26D3D-D897-4be2-8F04-BA451C77F1D7}">
-              <ma14:placeholderFlag xmlns:ma14="http://schemas.microsoft.com/office/mac/drawingml/2011/main" xmlns="" val="1"/>
+              <ma14:placeholderFlag xmlns="" xmlns:ma14="http://schemas.microsoft.com/office/mac/drawingml/2011/main" val="1"/>
             </a:ext>
           </a:extLst>
         </p:spPr>
@@ -1165,7 +1165,7 @@
               </a14:hiddenEffects>
             </a:ext>
             <a:ext uri="{FAA26D3D-D897-4be2-8F04-BA451C77F1D7}">
-              <ma14:placeholderFlag xmlns:ma14="http://schemas.microsoft.com/office/mac/drawingml/2011/main" xmlns="" val="1"/>
+              <ma14:placeholderFlag xmlns="" xmlns:ma14="http://schemas.microsoft.com/office/mac/drawingml/2011/main" val="1"/>
             </a:ext>
           </a:extLst>
         </p:spPr>
@@ -1250,7 +1250,7 @@
               </a14:hiddenEffects>
             </a:ext>
             <a:ext uri="{FAA26D3D-D897-4be2-8F04-BA451C77F1D7}">
-              <ma14:placeholderFlag xmlns:ma14="http://schemas.microsoft.com/office/mac/drawingml/2011/main" xmlns="" val="1"/>
+              <ma14:placeholderFlag xmlns="" xmlns:ma14="http://schemas.microsoft.com/office/mac/drawingml/2011/main" val="1"/>
             </a:ext>
           </a:extLst>
         </p:spPr>
@@ -1353,7 +1353,7 @@
               </a14:hiddenEffects>
             </a:ext>
             <a:ext uri="{FAA26D3D-D897-4be2-8F04-BA451C77F1D7}">
-              <ma14:placeholderFlag xmlns:ma14="http://schemas.microsoft.com/office/mac/drawingml/2011/main" xmlns="" val="1"/>
+              <ma14:placeholderFlag xmlns="" xmlns:ma14="http://schemas.microsoft.com/office/mac/drawingml/2011/main" val="1"/>
             </a:ext>
           </a:extLst>
         </p:spPr>
@@ -1438,7 +1438,7 @@
               </a14:hiddenEffects>
             </a:ext>
             <a:ext uri="{FAA26D3D-D897-4be2-8F04-BA451C77F1D7}">
-              <ma14:placeholderFlag xmlns:ma14="http://schemas.microsoft.com/office/mac/drawingml/2011/main" xmlns="" val="1"/>
+              <ma14:placeholderFlag xmlns="" xmlns:ma14="http://schemas.microsoft.com/office/mac/drawingml/2011/main" val="1"/>
             </a:ext>
           </a:extLst>
         </p:spPr>
@@ -1523,7 +1523,7 @@
               </a14:hiddenEffects>
             </a:ext>
             <a:ext uri="{FAA26D3D-D897-4be2-8F04-BA451C77F1D7}">
-              <ma14:placeholderFlag xmlns:ma14="http://schemas.microsoft.com/office/mac/drawingml/2011/main" xmlns="" val="1"/>
+              <ma14:placeholderFlag xmlns="" xmlns:ma14="http://schemas.microsoft.com/office/mac/drawingml/2011/main" val="1"/>
             </a:ext>
           </a:extLst>
         </p:spPr>
@@ -1608,7 +1608,7 @@
               </a14:hiddenEffects>
             </a:ext>
             <a:ext uri="{FAA26D3D-D897-4be2-8F04-BA451C77F1D7}">
-              <ma14:placeholderFlag xmlns:ma14="http://schemas.microsoft.com/office/mac/drawingml/2011/main" xmlns="" val="1"/>
+              <ma14:placeholderFlag xmlns="" xmlns:ma14="http://schemas.microsoft.com/office/mac/drawingml/2011/main" val="1"/>
             </a:ext>
           </a:extLst>
         </p:spPr>
@@ -1767,7 +1767,7 @@
           <a:p>
             <a:fld id="{72473B21-E302-D241-B3CE-A2BEEB9F76FE}" type="datetimeFigureOut">
               <a:rPr lang="en-US" smtClean="0"/>
-              <a:t>8/31/26</a:t>
+              <a:t>9/1/26</a:t>
             </a:fld>
             <a:endParaRPr lang="en-US"/>
           </a:p>
@@ -1935,7 +1935,7 @@
           <a:p>
             <a:fld id="{72473B21-E302-D241-B3CE-A2BEEB9F76FE}" type="datetimeFigureOut">
               <a:rPr lang="en-US" smtClean="0"/>
-              <a:t>8/31/26</a:t>
+              <a:t>9/1/26</a:t>
             </a:fld>
             <a:endParaRPr lang="en-US"/>
           </a:p>
@@ -2113,7 +2113,7 @@
           <a:p>
             <a:fld id="{72473B21-E302-D241-B3CE-A2BEEB9F76FE}" type="datetimeFigureOut">
               <a:rPr lang="en-US" smtClean="0"/>
-              <a:t>8/31/26</a:t>
+              <a:t>9/1/26</a:t>
             </a:fld>
             <a:endParaRPr lang="en-US"/>
           </a:p>
@@ -2595,7 +2595,7 @@
           <a:p>
             <a:fld id="{72473B21-E302-D241-B3CE-A2BEEB9F76FE}" type="datetimeFigureOut">
               <a:rPr lang="en-US" smtClean="0"/>
-              <a:t>8/31/26</a:t>
+              <a:t>9/1/26</a:t>
             </a:fld>
             <a:endParaRPr lang="en-US"/>
           </a:p>
@@ -2840,7 +2840,7 @@
           <a:p>
             <a:fld id="{72473B21-E302-D241-B3CE-A2BEEB9F76FE}" type="datetimeFigureOut">
               <a:rPr lang="en-US" smtClean="0"/>
-              <a:t>8/31/26</a:t>
+              <a:t>9/1/26</a:t>
             </a:fld>
             <a:endParaRPr lang="en-US"/>
           </a:p>
@@ -3069,7 +3069,7 @@
           <a:p>
             <a:fld id="{72473B21-E302-D241-B3CE-A2BEEB9F76FE}" type="datetimeFigureOut">
               <a:rPr lang="en-US" smtClean="0"/>
-              <a:t>8/31/26</a:t>
+              <a:t>9/1/26</a:t>
             </a:fld>
             <a:endParaRPr lang="en-US"/>
           </a:p>
@@ -3433,7 +3433,7 @@
           <a:p>
             <a:fld id="{72473B21-E302-D241-B3CE-A2BEEB9F76FE}" type="datetimeFigureOut">
               <a:rPr lang="en-US" smtClean="0"/>
-              <a:t>8/31/26</a:t>
+              <a:t>9/1/26</a:t>
             </a:fld>
             <a:endParaRPr lang="en-US"/>
           </a:p>
@@ -3550,7 +3550,7 @@
           <a:p>
             <a:fld id="{72473B21-E302-D241-B3CE-A2BEEB9F76FE}" type="datetimeFigureOut">
               <a:rPr lang="en-US" smtClean="0"/>
-              <a:t>8/31/26</a:t>
+              <a:t>9/1/26</a:t>
             </a:fld>
             <a:endParaRPr lang="en-US"/>
           </a:p>
@@ -3645,7 +3645,7 @@
           <a:p>
             <a:fld id="{72473B21-E302-D241-B3CE-A2BEEB9F76FE}" type="datetimeFigureOut">
               <a:rPr lang="en-US" smtClean="0"/>
-              <a:t>8/31/26</a:t>
+              <a:t>9/1/26</a:t>
             </a:fld>
             <a:endParaRPr lang="en-US"/>
           </a:p>
@@ -3920,7 +3920,7 @@
           <a:p>
             <a:fld id="{72473B21-E302-D241-B3CE-A2BEEB9F76FE}" type="datetimeFigureOut">
               <a:rPr lang="en-US" smtClean="0"/>
-              <a:t>8/31/26</a:t>
+              <a:t>9/1/26</a:t>
             </a:fld>
             <a:endParaRPr lang="en-US"/>
           </a:p>
@@ -4172,7 +4172,7 @@
           <a:p>
             <a:fld id="{72473B21-E302-D241-B3CE-A2BEEB9F76FE}" type="datetimeFigureOut">
               <a:rPr lang="en-US" smtClean="0"/>
-              <a:t>8/31/26</a:t>
+              <a:t>9/1/26</a:t>
             </a:fld>
             <a:endParaRPr lang="en-US"/>
           </a:p>
@@ -4383,7 +4383,7 @@
           <a:p>
             <a:fld id="{72473B21-E302-D241-B3CE-A2BEEB9F76FE}" type="datetimeFigureOut">
               <a:rPr lang="en-US" smtClean="0"/>
-              <a:t>8/31/26</a:t>
+              <a:t>9/1/26</a:t>
             </a:fld>
             <a:endParaRPr lang="en-US"/>
           </a:p>
@@ -14715,78 +14715,191 @@
       </p:sp>
       <p:sp>
         <p:nvSpPr>
-          <p:cNvPr id="3" name="Content Placeholder 2">
-            <a:extLst>
-              <a:ext uri="{FF2B5EF4-FFF2-40B4-BE49-F238E27FC236}">
-                <a16:creationId xmlns:a16="http://schemas.microsoft.com/office/drawing/2014/main" id="{9735A929-1D30-A180-B146-E80D26B97D97}"/>
-              </a:ext>
-            </a:extLst>
-          </p:cNvPr>
-          <p:cNvSpPr>
-            <a:spLocks noGrp="1"/>
-          </p:cNvSpPr>
-          <p:nvPr>
-            <p:ph idx="1"/>
-          </p:nvPr>
+          <p:cNvPr id="11" name="TextBox 10"/>
+          <p:cNvSpPr txBox="1"/>
+          <p:nvPr/>
         </p:nvSpPr>
         <p:spPr>
           <a:xfrm>
-            <a:off x="643312" y="1966039"/>
-            <a:ext cx="10515600" cy="4351338"/>
+            <a:off x="640080" y="914400"/>
+            <a:ext cx="10908792" cy="457200"/>
           </a:xfrm>
+          <a:prstGeom prst="rect">
+            <a:avLst/>
+          </a:prstGeom>
+          <a:noFill/>
         </p:spPr>
         <p:txBody>
-          <a:bodyPr>
-            <a:normAutofit/>
+          <a:bodyPr wrap="square" lIns="0" rIns="0" tIns="0" bIns="0">
+            <a:spAutoFit/>
           </a:bodyPr>
           <a:lstStyle/>
           <a:p>
-            <a:r>
-              <a:rPr lang="en-US" u="sng" dirty="0"/>
+            <a:pPr algn="l">
+              <a:spcAft>
+                <a:spcPts val="0"/>
+              </a:spcAft>
+            </a:pPr>
+            <a:r>
+              <a:rPr sz="2500" b="1">
+                <a:solidFill>
+                  <a:srgbClr val="2E3A46"/>
+                </a:solidFill>
+                <a:latin typeface="Calibri"/>
+              </a:rPr>
               <a:t>Interpretation of relative AIC is not symmetric</a:t>
             </a:r>
           </a:p>
-          <a:p>
-            <a:pPr lvl="1"/>
-            <a:r>
-              <a:rPr lang="en-US" dirty="0"/>
-              <a:t>More complex model only “significantly better” if its AIC score is &gt;2 units </a:t>
-            </a:r>
-            <a:r>
-              <a:rPr lang="en-US" b="1" dirty="0"/>
-              <a:t>smaller</a:t>
-            </a:r>
-            <a:r>
-              <a:rPr lang="en-US" dirty="0"/>
-              <a:t>.</a:t>
-            </a:r>
-          </a:p>
-          <a:p>
-            <a:pPr lvl="1"/>
-            <a:r>
-              <a:rPr lang="en-US" dirty="0"/>
-              <a:t>Otherwise simpler and complex model are competitive</a:t>
-            </a:r>
-          </a:p>
-          <a:p>
-            <a:r>
-              <a:rPr lang="en-US" dirty="0"/>
-              <a:t>Penalty for adding parameter is 2 units and fit improves with complexity, so models with random data as predictor will be within 2 AIC. The complex model has no support even if within 2 AIC units</a:t>
-            </a:r>
-          </a:p>
-          <a:p>
-            <a:r>
-              <a:rPr lang="en-US" b="1" dirty="0"/>
-              <a:t>The 2 AIC convention is about whether a more complex model with </a:t>
-            </a:r>
-            <a:r>
-              <a:rPr lang="en-US" b="1" i="1" dirty="0"/>
-              <a:t>lower </a:t>
-            </a:r>
-            <a:r>
-              <a:rPr lang="en-US" b="1" dirty="0"/>
-              <a:t>AIC is better enough relative to simpler model (in the sense that the parameters are informative)</a:t>
-            </a:r>
+        </p:txBody>
+      </p:sp>
+      <p:sp>
+        <p:nvSpPr>
+          <p:cNvPr id="12" name="Rounded Rectangle 11"/>
+          <p:cNvSpPr/>
+          <p:nvPr/>
+        </p:nvSpPr>
+        <p:spPr>
+          <a:xfrm>
+            <a:off x="640080" y="1463040"/>
+            <a:ext cx="5285232" cy="1051560"/>
+          </a:xfrm>
+          <a:prstGeom prst="roundRect">
+            <a:avLst>
+              <a:gd name="adj" fmla="val 4000"/>
+            </a:avLst>
+          </a:prstGeom>
+          <a:solidFill>
+            <a:srgbClr val="F2F2F2"/>
+          </a:solidFill>
+          <a:ln w="12700">
+            <a:solidFill>
+              <a:srgbClr val="D9D9D9"/>
+            </a:solidFill>
+          </a:ln>
+          <a:effectLst/>
+        </p:spPr>
+        <p:style>
+          <a:lnRef idx="1">
+            <a:schemeClr val="accent1"/>
+          </a:lnRef>
+          <a:fillRef idx="3">
+            <a:schemeClr val="accent1"/>
+          </a:fillRef>
+          <a:effectRef idx="2">
+            <a:schemeClr val="accent1"/>
+          </a:effectRef>
+          <a:fontRef idx="minor">
+            <a:schemeClr val="lt1"/>
+          </a:fontRef>
+        </p:style>
+        <p:txBody>
+          <a:bodyPr rtlCol="0" anchor="ctr"/>
+          <a:lstStyle/>
+          <a:p>
+            <a:pPr algn="ctr"/>
+          </a:p>
+        </p:txBody>
+      </p:sp>
+      <p:sp>
+        <p:nvSpPr>
+          <p:cNvPr id="13" name="TextBox 12"/>
+          <p:cNvSpPr txBox="1"/>
+          <p:nvPr/>
+        </p:nvSpPr>
+        <p:spPr>
+          <a:xfrm>
+            <a:off x="841247" y="1572768"/>
+            <a:ext cx="4882896" cy="868680"/>
+          </a:xfrm>
+          <a:prstGeom prst="rect">
+            <a:avLst/>
+          </a:prstGeom>
+          <a:noFill/>
+        </p:spPr>
+        <p:txBody>
+          <a:bodyPr wrap="square" lIns="0" rIns="0" tIns="0" bIns="0">
+            <a:spAutoFit/>
+          </a:bodyPr>
+          <a:lstStyle/>
+          <a:p>
+            <a:pPr algn="l">
+              <a:spcAft>
+                <a:spcPts val="0"/>
+              </a:spcAft>
+            </a:pPr>
+            <a:r>
+              <a:rPr sz="1200" b="1">
+                <a:solidFill>
+                  <a:srgbClr val="C0504D"/>
+                </a:solidFill>
+                <a:latin typeface="Calibri"/>
+              </a:rPr>
+              <a:t>THE CLAIM</a:t>
+            </a:r>
+          </a:p>
+          <a:p>
+            <a:pPr algn="l">
+              <a:spcAft>
+                <a:spcPts val="0"/>
+              </a:spcAft>
+            </a:pPr>
+            <a:r>
+              <a:rPr sz="1650" b="0">
+                <a:solidFill>
+                  <a:srgbClr val="2E3A46"/>
+                </a:solidFill>
+                <a:latin typeface="Calibri"/>
+              </a:rPr>
+              <a:t>Two models within 2 AIC units of each other are “competitive.”</a:t>
+            </a:r>
+          </a:p>
+        </p:txBody>
+      </p:sp>
+      <p:sp>
+        <p:nvSpPr>
+          <p:cNvPr id="14" name="Rounded Rectangle 13"/>
+          <p:cNvSpPr/>
+          <p:nvPr/>
+        </p:nvSpPr>
+        <p:spPr>
+          <a:xfrm>
+            <a:off x="6263640" y="1463040"/>
+            <a:ext cx="5285232" cy="1051560"/>
+          </a:xfrm>
+          <a:prstGeom prst="roundRect">
+            <a:avLst>
+              <a:gd name="adj" fmla="val 4000"/>
+            </a:avLst>
+          </a:prstGeom>
+          <a:solidFill>
+            <a:srgbClr val="E8F1E6"/>
+          </a:solidFill>
+          <a:ln w="12700">
+            <a:solidFill>
+              <a:srgbClr val="C5D9C0"/>
+            </a:solidFill>
+          </a:ln>
+          <a:effectLst/>
+        </p:spPr>
+        <p:style>
+          <a:lnRef idx="1">
+            <a:schemeClr val="accent1"/>
+          </a:lnRef>
+          <a:fillRef idx="3">
+            <a:schemeClr val="accent1"/>
+          </a:fillRef>
+          <a:effectRef idx="2">
+            <a:schemeClr val="accent1"/>
+          </a:effectRef>
+          <a:fontRef idx="minor">
+            <a:schemeClr val="lt1"/>
+          </a:fontRef>
+        </p:style>
+        <p:txBody>
+          <a:bodyPr rtlCol="0" anchor="ctr"/>
+          <a:lstStyle/>
+          <a:p>
+            <a:pPr algn="ctr"/>
           </a:p>
         </p:txBody>
       </p:sp>
@@ -14798,8 +14911,8 @@
         </p:nvSpPr>
         <p:spPr>
           <a:xfrm>
-            <a:off x="3458743" y="1134853"/>
-            <a:ext cx="4884738" cy="603250"/>
+            <a:off x="6464807" y="1572768"/>
+            <a:ext cx="4882896" cy="868680"/>
           </a:xfrm>
           <a:prstGeom prst="rect">
             <a:avLst/>
@@ -14807,46 +14920,1270 @@
           <a:noFill/>
         </p:spPr>
         <p:txBody>
-          <a:bodyPr wrap="square" lIns="0" tIns="0" rIns="0" bIns="0" anchor="ctr">
+          <a:bodyPr wrap="square" lIns="0" rIns="0" tIns="0" bIns="0">
             <a:spAutoFit/>
           </a:bodyPr>
           <a:lstStyle/>
           <a:p>
-            <a:r>
-              <a:rPr sz="2600" b="0">
-                <a:latin typeface="Cambria"/>
+            <a:pPr algn="l">
+              <a:spcAft>
+                <a:spcPts val="0"/>
+              </a:spcAft>
+            </a:pPr>
+            <a:r>
+              <a:rPr sz="1200" b="1">
+                <a:solidFill>
+                  <a:srgbClr val="548235"/>
+                </a:solidFill>
+                <a:latin typeface="Calibri"/>
               </a:rPr>
-              <a:t>AIC</a:t>
-            </a:r>
-            <a:r>
-              <a:rPr sz="2600" b="0" baseline="-25000">
-                <a:latin typeface="Cambria"/>
+              <a:t>WHY IT FAILS</a:t>
+            </a:r>
+          </a:p>
+          <a:p>
+            <a:pPr algn="l">
+              <a:spcAft>
+                <a:spcPts val="0"/>
+              </a:spcAft>
+            </a:pPr>
+            <a:r>
+              <a:rPr sz="1650" b="0">
+                <a:solidFill>
+                  <a:srgbClr val="2E3A46"/>
+                </a:solidFill>
+                <a:latin typeface="Calibri"/>
               </a:rPr>
-              <a:t>i</a:t>
-            </a:r>
-            <a:r>
-              <a:rPr sz="2600" b="0">
-                <a:latin typeface="Cambria"/>
+              <a:t>Within 2 units is exactly where a pure-noise parameter always lands. It is the floor, not evidence.</a:t>
+            </a:r>
+          </a:p>
+        </p:txBody>
+      </p:sp>
+      <p:sp>
+        <p:nvSpPr>
+          <p:cNvPr id="16" name="TextBox 15"/>
+          <p:cNvSpPr txBox="1"/>
+          <p:nvPr/>
+        </p:nvSpPr>
+        <p:spPr>
+          <a:xfrm>
+            <a:off x="640080" y="2542032"/>
+            <a:ext cx="5669280" cy="347472"/>
+          </a:xfrm>
+          <a:prstGeom prst="rect">
+            <a:avLst/>
+          </a:prstGeom>
+          <a:noFill/>
+        </p:spPr>
+        <p:txBody>
+          <a:bodyPr wrap="square" lIns="0" rIns="0" tIns="0" bIns="0">
+            <a:spAutoFit/>
+          </a:bodyPr>
+          <a:lstStyle/>
+          <a:p>
+            <a:pPr algn="l">
+              <a:spcAft>
+                <a:spcPts val="0"/>
+              </a:spcAft>
+            </a:pPr>
+            <a:r>
+              <a:rPr sz="1900" b="1">
+                <a:solidFill>
+                  <a:srgbClr val="2E3A46"/>
+                </a:solidFill>
+                <a:latin typeface="Calibri"/>
               </a:rPr>
-              <a:t> = −2 log L</a:t>
-            </a:r>
-            <a:r>
-              <a:rPr sz="2600" b="0" baseline="-25000">
-                <a:latin typeface="Cambria"/>
+              <a:t>ΔAIC = AIC(complex) − AIC(simple) = 2 − χ²₁</a:t>
+            </a:r>
+          </a:p>
+        </p:txBody>
+      </p:sp>
+      <p:sp>
+        <p:nvSpPr>
+          <p:cNvPr id="17" name="TextBox 16"/>
+          <p:cNvSpPr txBox="1"/>
+          <p:nvPr/>
+        </p:nvSpPr>
+        <p:spPr>
+          <a:xfrm>
+            <a:off x="640080" y="2926080"/>
+            <a:ext cx="6035040" cy="292608"/>
+          </a:xfrm>
+          <a:prstGeom prst="rect">
+            <a:avLst/>
+          </a:prstGeom>
+          <a:noFill/>
+        </p:spPr>
+        <p:txBody>
+          <a:bodyPr wrap="square" lIns="0" rIns="0" tIns="0" bIns="0">
+            <a:spAutoFit/>
+          </a:bodyPr>
+          <a:lstStyle/>
+          <a:p>
+            <a:pPr algn="l">
+              <a:spcAft>
+                <a:spcPts val="0"/>
+              </a:spcAft>
+            </a:pPr>
+            <a:r>
+              <a:rPr sz="1350" b="0">
+                <a:solidFill>
+                  <a:srgbClr val="6B7A85"/>
+                </a:solidFill>
+                <a:latin typeface="Calibri"/>
               </a:rPr>
-              <a:t>i</a:t>
-            </a:r>
-            <a:r>
-              <a:rPr sz="2600" b="0">
-                <a:latin typeface="Cambria"/>
+              <a:t>χ²₁ = likelihood-ratio statistic for the one extra parameter</a:t>
+            </a:r>
+          </a:p>
+        </p:txBody>
+      </p:sp>
+      <p:sp>
+        <p:nvSpPr>
+          <p:cNvPr id="18" name="Rectangle 17"/>
+          <p:cNvSpPr/>
+          <p:nvPr/>
+        </p:nvSpPr>
+        <p:spPr>
+          <a:xfrm>
+            <a:off x="822960" y="3310128"/>
+            <a:ext cx="4217212" cy="658368"/>
+          </a:xfrm>
+          <a:prstGeom prst="rect">
+            <a:avLst/>
+          </a:prstGeom>
+          <a:solidFill>
+            <a:srgbClr val="548235"/>
+          </a:solidFill>
+          <a:ln w="19050">
+            <a:solidFill>
+              <a:srgbClr val="FFFFFF"/>
+            </a:solidFill>
+          </a:ln>
+          <a:effectLst/>
+        </p:spPr>
+        <p:style>
+          <a:lnRef idx="1">
+            <a:schemeClr val="accent1"/>
+          </a:lnRef>
+          <a:fillRef idx="3">
+            <a:schemeClr val="accent1"/>
+          </a:fillRef>
+          <a:effectRef idx="2">
+            <a:schemeClr val="accent1"/>
+          </a:effectRef>
+          <a:fontRef idx="minor">
+            <a:schemeClr val="lt1"/>
+          </a:fontRef>
+        </p:style>
+        <p:txBody>
+          <a:bodyPr rtlCol="0" anchor="ctr" wrap="square" tIns="0" bIns="0"/>
+          <a:lstStyle/>
+          <a:p>
+            <a:pPr algn="ctr">
+              <a:spcAft>
+                <a:spcPts val="0"/>
+              </a:spcAft>
+            </a:pPr>
+            <a:r>
+              <a:rPr sz="1500" b="1">
+                <a:solidFill>
+                  <a:srgbClr val="FFFFFF"/>
+                </a:solidFill>
+                <a:latin typeface="Calibri"/>
               </a:rPr>
-              <a:t> + 2 p</a:t>
-            </a:r>
-            <a:r>
-              <a:rPr sz="2600" b="0" baseline="-25000">
-                <a:latin typeface="Cambria"/>
+              <a:t>Real evidence</a:t>
+            </a:r>
+          </a:p>
+          <a:p>
+            <a:pPr algn="ctr"/>
+            <a:r>
+              <a:rPr sz="1150">
+                <a:solidFill>
+                  <a:srgbClr val="FFFFFF"/>
+                </a:solidFill>
+                <a:latin typeface="Calibri"/>
               </a:rPr>
-              <a:t>i</a:t>
+              <a:t>χ²₁ &gt; 4,  p &lt; 0.05</a:t>
+            </a:r>
+          </a:p>
+        </p:txBody>
+      </p:sp>
+      <p:sp>
+        <p:nvSpPr>
+          <p:cNvPr id="19" name="Rectangle 18"/>
+          <p:cNvSpPr/>
+          <p:nvPr/>
+        </p:nvSpPr>
+        <p:spPr>
+          <a:xfrm>
+            <a:off x="5040172" y="3310128"/>
+            <a:ext cx="2108606" cy="658368"/>
+          </a:xfrm>
+          <a:prstGeom prst="rect">
+            <a:avLst/>
+          </a:prstGeom>
+          <a:solidFill>
+            <a:srgbClr val="E08A1E"/>
+          </a:solidFill>
+          <a:ln w="19050">
+            <a:solidFill>
+              <a:srgbClr val="FFFFFF"/>
+            </a:solidFill>
+          </a:ln>
+          <a:effectLst/>
+        </p:spPr>
+        <p:style>
+          <a:lnRef idx="1">
+            <a:schemeClr val="accent1"/>
+          </a:lnRef>
+          <a:fillRef idx="3">
+            <a:schemeClr val="accent1"/>
+          </a:fillRef>
+          <a:effectRef idx="2">
+            <a:schemeClr val="accent1"/>
+          </a:effectRef>
+          <a:fontRef idx="minor">
+            <a:schemeClr val="lt1"/>
+          </a:fontRef>
+        </p:style>
+        <p:txBody>
+          <a:bodyPr rtlCol="0" anchor="ctr" wrap="square" tIns="0" bIns="0"/>
+          <a:lstStyle/>
+          <a:p>
+            <a:pPr algn="ctr">
+              <a:spcAft>
+                <a:spcPts val="0"/>
+              </a:spcAft>
+            </a:pPr>
+            <a:r>
+              <a:rPr sz="1500" b="1">
+                <a:solidFill>
+                  <a:srgbClr val="FFFFFF"/>
+                </a:solidFill>
+                <a:latin typeface="Calibri"/>
+              </a:rPr>
+              <a:t>Weak</a:t>
+            </a:r>
+          </a:p>
+          <a:p>
+            <a:pPr algn="ctr"/>
+            <a:r>
+              <a:rPr sz="1150">
+                <a:solidFill>
+                  <a:srgbClr val="FFFFFF"/>
+                </a:solidFill>
+                <a:latin typeface="Calibri"/>
+              </a:rPr>
+              <a:t>2 &lt; χ²₁ &lt; 4</a:t>
+            </a:r>
+          </a:p>
+        </p:txBody>
+      </p:sp>
+      <p:sp>
+        <p:nvSpPr>
+          <p:cNvPr id="20" name="Rectangle 19"/>
+          <p:cNvSpPr/>
+          <p:nvPr/>
+        </p:nvSpPr>
+        <p:spPr>
+          <a:xfrm>
+            <a:off x="7148779" y="3310128"/>
+            <a:ext cx="2108606" cy="658368"/>
+          </a:xfrm>
+          <a:prstGeom prst="rect">
+            <a:avLst/>
+          </a:prstGeom>
+          <a:solidFill>
+            <a:srgbClr val="C0504D"/>
+          </a:solidFill>
+          <a:ln w="19050">
+            <a:solidFill>
+              <a:srgbClr val="FFFFFF"/>
+            </a:solidFill>
+          </a:ln>
+          <a:effectLst/>
+        </p:spPr>
+        <p:style>
+          <a:lnRef idx="1">
+            <a:schemeClr val="accent1"/>
+          </a:lnRef>
+          <a:fillRef idx="3">
+            <a:schemeClr val="accent1"/>
+          </a:fillRef>
+          <a:effectRef idx="2">
+            <a:schemeClr val="accent1"/>
+          </a:effectRef>
+          <a:fontRef idx="minor">
+            <a:schemeClr val="lt1"/>
+          </a:fontRef>
+        </p:style>
+        <p:txBody>
+          <a:bodyPr rtlCol="0" anchor="ctr" wrap="square" tIns="0" bIns="0"/>
+          <a:lstStyle/>
+          <a:p>
+            <a:pPr algn="ctr">
+              <a:spcAft>
+                <a:spcPts val="0"/>
+              </a:spcAft>
+            </a:pPr>
+            <a:r>
+              <a:rPr sz="1500" b="1">
+                <a:solidFill>
+                  <a:srgbClr val="FFFFFF"/>
+                </a:solidFill>
+                <a:latin typeface="Calibri"/>
+              </a:rPr>
+              <a:t>No evidence</a:t>
+            </a:r>
+          </a:p>
+          <a:p>
+            <a:pPr algn="ctr"/>
+            <a:r>
+              <a:rPr sz="1150">
+                <a:solidFill>
+                  <a:srgbClr val="FFFFFF"/>
+                </a:solidFill>
+                <a:latin typeface="Calibri"/>
+              </a:rPr>
+              <a:t>0 &lt; χ²₁ &lt; 2</a:t>
+            </a:r>
+          </a:p>
+        </p:txBody>
+      </p:sp>
+      <p:sp>
+        <p:nvSpPr>
+          <p:cNvPr id="21" name="Rectangle 20"/>
+          <p:cNvSpPr/>
+          <p:nvPr/>
+        </p:nvSpPr>
+        <p:spPr>
+          <a:xfrm>
+            <a:off x="9257385" y="3310128"/>
+            <a:ext cx="2108606" cy="658368"/>
+          </a:xfrm>
+          <a:prstGeom prst="rect">
+            <a:avLst/>
+          </a:prstGeom>
+          <a:solidFill>
+            <a:srgbClr val="F7F7F7"/>
+          </a:solidFill>
+          <a:ln w="15875">
+            <a:solidFill>
+              <a:srgbClr val="BFBFBF"/>
+            </a:solidFill>
+            <a:prstDash val="dash"/>
+          </a:ln>
+          <a:effectLst/>
+        </p:spPr>
+        <p:style>
+          <a:lnRef idx="1">
+            <a:schemeClr val="accent1"/>
+          </a:lnRef>
+          <a:fillRef idx="3">
+            <a:schemeClr val="accent1"/>
+          </a:fillRef>
+          <a:effectRef idx="2">
+            <a:schemeClr val="accent1"/>
+          </a:effectRef>
+          <a:fontRef idx="minor">
+            <a:schemeClr val="lt1"/>
+          </a:fontRef>
+        </p:style>
+        <p:txBody>
+          <a:bodyPr rtlCol="0" anchor="ctr" wrap="square" tIns="0" bIns="0"/>
+          <a:lstStyle/>
+          <a:p>
+            <a:pPr algn="ctr">
+              <a:spcAft>
+                <a:spcPts val="0"/>
+              </a:spcAft>
+            </a:pPr>
+            <a:r>
+              <a:rPr sz="1400" b="1" i="1">
+                <a:solidFill>
+                  <a:srgbClr val="6B7A85"/>
+                </a:solidFill>
+                <a:latin typeface="Calibri"/>
+              </a:rPr>
+              <a:t>cannot happen</a:t>
+            </a:r>
+          </a:p>
+        </p:txBody>
+      </p:sp>
+      <p:sp>
+        <p:nvSpPr>
+          <p:cNvPr id="22" name="Rectangle 21"/>
+          <p:cNvSpPr/>
+          <p:nvPr/>
+        </p:nvSpPr>
+        <p:spPr>
+          <a:xfrm>
+            <a:off x="9237268" y="3127248"/>
+            <a:ext cx="40233" cy="1024128"/>
+          </a:xfrm>
+          <a:prstGeom prst="rect">
+            <a:avLst/>
+          </a:prstGeom>
+          <a:solidFill>
+            <a:srgbClr val="2E3A46"/>
+          </a:solidFill>
+          <a:ln>
+            <a:noFill/>
+          </a:ln>
+          <a:effectLst/>
+        </p:spPr>
+        <p:style>
+          <a:lnRef idx="1">
+            <a:schemeClr val="accent1"/>
+          </a:lnRef>
+          <a:fillRef idx="3">
+            <a:schemeClr val="accent1"/>
+          </a:fillRef>
+          <a:effectRef idx="2">
+            <a:schemeClr val="accent1"/>
+          </a:effectRef>
+          <a:fontRef idx="minor">
+            <a:schemeClr val="lt1"/>
+          </a:fontRef>
+        </p:style>
+        <p:txBody>
+          <a:bodyPr rtlCol="0" anchor="ctr"/>
+          <a:lstStyle/>
+          <a:p>
+            <a:pPr algn="ctr"/>
+          </a:p>
+        </p:txBody>
+      </p:sp>
+      <p:sp>
+        <p:nvSpPr>
+          <p:cNvPr id="23" name="TextBox 22"/>
+          <p:cNvSpPr txBox="1"/>
+          <p:nvPr/>
+        </p:nvSpPr>
+        <p:spPr>
+          <a:xfrm>
+            <a:off x="5965545" y="2523744"/>
+            <a:ext cx="3291840" cy="310896"/>
+          </a:xfrm>
+          <a:prstGeom prst="rect">
+            <a:avLst/>
+          </a:prstGeom>
+          <a:noFill/>
+        </p:spPr>
+        <p:txBody>
+          <a:bodyPr wrap="square" lIns="0" rIns="0" tIns="0" bIns="0">
+            <a:spAutoFit/>
+          </a:bodyPr>
+          <a:lstStyle/>
+          <a:p>
+            <a:pPr algn="r">
+              <a:spcAft>
+                <a:spcPts val="0"/>
+              </a:spcAft>
+            </a:pPr>
+            <a:r>
+              <a:rPr sz="1350" b="1">
+                <a:solidFill>
+                  <a:srgbClr val="2E3A46"/>
+                </a:solidFill>
+                <a:latin typeface="Calibri"/>
+              </a:rPr>
+              <a:t>hard ceiling at ΔAIC = 2  ▼</a:t>
+            </a:r>
+          </a:p>
+        </p:txBody>
+      </p:sp>
+      <p:sp>
+        <p:nvSpPr>
+          <p:cNvPr id="24" name="Rectangle 23"/>
+          <p:cNvSpPr/>
+          <p:nvPr/>
+        </p:nvSpPr>
+        <p:spPr>
+          <a:xfrm>
+            <a:off x="816559" y="3968496"/>
+            <a:ext cx="12801" cy="91440"/>
+          </a:xfrm>
+          <a:prstGeom prst="rect">
+            <a:avLst/>
+          </a:prstGeom>
+          <a:solidFill>
+            <a:srgbClr val="9AA5AD"/>
+          </a:solidFill>
+          <a:ln>
+            <a:noFill/>
+          </a:ln>
+          <a:effectLst/>
+        </p:spPr>
+        <p:style>
+          <a:lnRef idx="1">
+            <a:schemeClr val="accent1"/>
+          </a:lnRef>
+          <a:fillRef idx="3">
+            <a:schemeClr val="accent1"/>
+          </a:fillRef>
+          <a:effectRef idx="2">
+            <a:schemeClr val="accent1"/>
+          </a:effectRef>
+          <a:fontRef idx="minor">
+            <a:schemeClr val="lt1"/>
+          </a:fontRef>
+        </p:style>
+        <p:txBody>
+          <a:bodyPr rtlCol="0" anchor="ctr"/>
+          <a:lstStyle/>
+          <a:p>
+            <a:pPr algn="ctr"/>
+          </a:p>
+        </p:txBody>
+      </p:sp>
+      <p:sp>
+        <p:nvSpPr>
+          <p:cNvPr id="25" name="TextBox 24"/>
+          <p:cNvSpPr txBox="1"/>
+          <p:nvPr/>
+        </p:nvSpPr>
+        <p:spPr>
+          <a:xfrm>
+            <a:off x="365760" y="4078224"/>
+            <a:ext cx="914400" cy="256032"/>
+          </a:xfrm>
+          <a:prstGeom prst="rect">
+            <a:avLst/>
+          </a:prstGeom>
+          <a:noFill/>
+        </p:spPr>
+        <p:txBody>
+          <a:bodyPr wrap="square" lIns="0" rIns="0" tIns="0" bIns="0">
+            <a:spAutoFit/>
+          </a:bodyPr>
+          <a:lstStyle/>
+          <a:p>
+            <a:pPr algn="ctr">
+              <a:spcAft>
+                <a:spcPts val="0"/>
+              </a:spcAft>
+            </a:pPr>
+            <a:r>
+              <a:rPr sz="1300" b="0">
+                <a:solidFill>
+                  <a:srgbClr val="6B7A85"/>
+                </a:solidFill>
+                <a:latin typeface="Calibri"/>
+              </a:rPr>
+              <a:t>-6</a:t>
+            </a:r>
+          </a:p>
+        </p:txBody>
+      </p:sp>
+      <p:sp>
+        <p:nvSpPr>
+          <p:cNvPr id="26" name="Rectangle 25"/>
+          <p:cNvSpPr/>
+          <p:nvPr/>
+        </p:nvSpPr>
+        <p:spPr>
+          <a:xfrm>
+            <a:off x="2925165" y="3968496"/>
+            <a:ext cx="12801" cy="91440"/>
+          </a:xfrm>
+          <a:prstGeom prst="rect">
+            <a:avLst/>
+          </a:prstGeom>
+          <a:solidFill>
+            <a:srgbClr val="9AA5AD"/>
+          </a:solidFill>
+          <a:ln>
+            <a:noFill/>
+          </a:ln>
+          <a:effectLst/>
+        </p:spPr>
+        <p:style>
+          <a:lnRef idx="1">
+            <a:schemeClr val="accent1"/>
+          </a:lnRef>
+          <a:fillRef idx="3">
+            <a:schemeClr val="accent1"/>
+          </a:fillRef>
+          <a:effectRef idx="2">
+            <a:schemeClr val="accent1"/>
+          </a:effectRef>
+          <a:fontRef idx="minor">
+            <a:schemeClr val="lt1"/>
+          </a:fontRef>
+        </p:style>
+        <p:txBody>
+          <a:bodyPr rtlCol="0" anchor="ctr"/>
+          <a:lstStyle/>
+          <a:p>
+            <a:pPr algn="ctr"/>
+          </a:p>
+        </p:txBody>
+      </p:sp>
+      <p:sp>
+        <p:nvSpPr>
+          <p:cNvPr id="27" name="TextBox 26"/>
+          <p:cNvSpPr txBox="1"/>
+          <p:nvPr/>
+        </p:nvSpPr>
+        <p:spPr>
+          <a:xfrm>
+            <a:off x="2474366" y="4078224"/>
+            <a:ext cx="914400" cy="256032"/>
+          </a:xfrm>
+          <a:prstGeom prst="rect">
+            <a:avLst/>
+          </a:prstGeom>
+          <a:noFill/>
+        </p:spPr>
+        <p:txBody>
+          <a:bodyPr wrap="square" lIns="0" rIns="0" tIns="0" bIns="0">
+            <a:spAutoFit/>
+          </a:bodyPr>
+          <a:lstStyle/>
+          <a:p>
+            <a:pPr algn="ctr">
+              <a:spcAft>
+                <a:spcPts val="0"/>
+              </a:spcAft>
+            </a:pPr>
+            <a:r>
+              <a:rPr sz="1300" b="0">
+                <a:solidFill>
+                  <a:srgbClr val="6B7A85"/>
+                </a:solidFill>
+                <a:latin typeface="Calibri"/>
+              </a:rPr>
+              <a:t>-4</a:t>
+            </a:r>
+          </a:p>
+        </p:txBody>
+      </p:sp>
+      <p:sp>
+        <p:nvSpPr>
+          <p:cNvPr id="28" name="Rectangle 27"/>
+          <p:cNvSpPr/>
+          <p:nvPr/>
+        </p:nvSpPr>
+        <p:spPr>
+          <a:xfrm>
+            <a:off x="5033772" y="3968496"/>
+            <a:ext cx="12801" cy="91440"/>
+          </a:xfrm>
+          <a:prstGeom prst="rect">
+            <a:avLst/>
+          </a:prstGeom>
+          <a:solidFill>
+            <a:srgbClr val="9AA5AD"/>
+          </a:solidFill>
+          <a:ln>
+            <a:noFill/>
+          </a:ln>
+          <a:effectLst/>
+        </p:spPr>
+        <p:style>
+          <a:lnRef idx="1">
+            <a:schemeClr val="accent1"/>
+          </a:lnRef>
+          <a:fillRef idx="3">
+            <a:schemeClr val="accent1"/>
+          </a:fillRef>
+          <a:effectRef idx="2">
+            <a:schemeClr val="accent1"/>
+          </a:effectRef>
+          <a:fontRef idx="minor">
+            <a:schemeClr val="lt1"/>
+          </a:fontRef>
+        </p:style>
+        <p:txBody>
+          <a:bodyPr rtlCol="0" anchor="ctr"/>
+          <a:lstStyle/>
+          <a:p>
+            <a:pPr algn="ctr"/>
+          </a:p>
+        </p:txBody>
+      </p:sp>
+      <p:sp>
+        <p:nvSpPr>
+          <p:cNvPr id="29" name="TextBox 28"/>
+          <p:cNvSpPr txBox="1"/>
+          <p:nvPr/>
+        </p:nvSpPr>
+        <p:spPr>
+          <a:xfrm>
+            <a:off x="4582972" y="4078224"/>
+            <a:ext cx="914400" cy="256032"/>
+          </a:xfrm>
+          <a:prstGeom prst="rect">
+            <a:avLst/>
+          </a:prstGeom>
+          <a:noFill/>
+        </p:spPr>
+        <p:txBody>
+          <a:bodyPr wrap="square" lIns="0" rIns="0" tIns="0" bIns="0">
+            <a:spAutoFit/>
+          </a:bodyPr>
+          <a:lstStyle/>
+          <a:p>
+            <a:pPr algn="ctr">
+              <a:spcAft>
+                <a:spcPts val="0"/>
+              </a:spcAft>
+            </a:pPr>
+            <a:r>
+              <a:rPr sz="1300" b="0">
+                <a:solidFill>
+                  <a:srgbClr val="6B7A85"/>
+                </a:solidFill>
+                <a:latin typeface="Calibri"/>
+              </a:rPr>
+              <a:t>-2</a:t>
+            </a:r>
+          </a:p>
+        </p:txBody>
+      </p:sp>
+      <p:sp>
+        <p:nvSpPr>
+          <p:cNvPr id="30" name="Rectangle 29"/>
+          <p:cNvSpPr/>
+          <p:nvPr/>
+        </p:nvSpPr>
+        <p:spPr>
+          <a:xfrm>
+            <a:off x="7142378" y="3968496"/>
+            <a:ext cx="12801" cy="91440"/>
+          </a:xfrm>
+          <a:prstGeom prst="rect">
+            <a:avLst/>
+          </a:prstGeom>
+          <a:solidFill>
+            <a:srgbClr val="9AA5AD"/>
+          </a:solidFill>
+          <a:ln>
+            <a:noFill/>
+          </a:ln>
+          <a:effectLst/>
+        </p:spPr>
+        <p:style>
+          <a:lnRef idx="1">
+            <a:schemeClr val="accent1"/>
+          </a:lnRef>
+          <a:fillRef idx="3">
+            <a:schemeClr val="accent1"/>
+          </a:fillRef>
+          <a:effectRef idx="2">
+            <a:schemeClr val="accent1"/>
+          </a:effectRef>
+          <a:fontRef idx="minor">
+            <a:schemeClr val="lt1"/>
+          </a:fontRef>
+        </p:style>
+        <p:txBody>
+          <a:bodyPr rtlCol="0" anchor="ctr"/>
+          <a:lstStyle/>
+          <a:p>
+            <a:pPr algn="ctr"/>
+          </a:p>
+        </p:txBody>
+      </p:sp>
+      <p:sp>
+        <p:nvSpPr>
+          <p:cNvPr id="31" name="TextBox 30"/>
+          <p:cNvSpPr txBox="1"/>
+          <p:nvPr/>
+        </p:nvSpPr>
+        <p:spPr>
+          <a:xfrm>
+            <a:off x="6691579" y="4078224"/>
+            <a:ext cx="914400" cy="256032"/>
+          </a:xfrm>
+          <a:prstGeom prst="rect">
+            <a:avLst/>
+          </a:prstGeom>
+          <a:noFill/>
+        </p:spPr>
+        <p:txBody>
+          <a:bodyPr wrap="square" lIns="0" rIns="0" tIns="0" bIns="0">
+            <a:spAutoFit/>
+          </a:bodyPr>
+          <a:lstStyle/>
+          <a:p>
+            <a:pPr algn="ctr">
+              <a:spcAft>
+                <a:spcPts val="0"/>
+              </a:spcAft>
+            </a:pPr>
+            <a:r>
+              <a:rPr sz="1300" b="0">
+                <a:solidFill>
+                  <a:srgbClr val="6B7A85"/>
+                </a:solidFill>
+                <a:latin typeface="Calibri"/>
+              </a:rPr>
+              <a:t>0</a:t>
+            </a:r>
+          </a:p>
+        </p:txBody>
+      </p:sp>
+      <p:sp>
+        <p:nvSpPr>
+          <p:cNvPr id="32" name="Rectangle 31"/>
+          <p:cNvSpPr/>
+          <p:nvPr/>
+        </p:nvSpPr>
+        <p:spPr>
+          <a:xfrm>
+            <a:off x="9250984" y="3968496"/>
+            <a:ext cx="12801" cy="91440"/>
+          </a:xfrm>
+          <a:prstGeom prst="rect">
+            <a:avLst/>
+          </a:prstGeom>
+          <a:solidFill>
+            <a:srgbClr val="9AA5AD"/>
+          </a:solidFill>
+          <a:ln>
+            <a:noFill/>
+          </a:ln>
+          <a:effectLst/>
+        </p:spPr>
+        <p:style>
+          <a:lnRef idx="1">
+            <a:schemeClr val="accent1"/>
+          </a:lnRef>
+          <a:fillRef idx="3">
+            <a:schemeClr val="accent1"/>
+          </a:fillRef>
+          <a:effectRef idx="2">
+            <a:schemeClr val="accent1"/>
+          </a:effectRef>
+          <a:fontRef idx="minor">
+            <a:schemeClr val="lt1"/>
+          </a:fontRef>
+        </p:style>
+        <p:txBody>
+          <a:bodyPr rtlCol="0" anchor="ctr"/>
+          <a:lstStyle/>
+          <a:p>
+            <a:pPr algn="ctr"/>
+          </a:p>
+        </p:txBody>
+      </p:sp>
+      <p:sp>
+        <p:nvSpPr>
+          <p:cNvPr id="33" name="TextBox 32"/>
+          <p:cNvSpPr txBox="1"/>
+          <p:nvPr/>
+        </p:nvSpPr>
+        <p:spPr>
+          <a:xfrm>
+            <a:off x="8800185" y="4078224"/>
+            <a:ext cx="914400" cy="256032"/>
+          </a:xfrm>
+          <a:prstGeom prst="rect">
+            <a:avLst/>
+          </a:prstGeom>
+          <a:noFill/>
+        </p:spPr>
+        <p:txBody>
+          <a:bodyPr wrap="square" lIns="0" rIns="0" tIns="0" bIns="0">
+            <a:spAutoFit/>
+          </a:bodyPr>
+          <a:lstStyle/>
+          <a:p>
+            <a:pPr algn="ctr">
+              <a:spcAft>
+                <a:spcPts val="0"/>
+              </a:spcAft>
+            </a:pPr>
+            <a:r>
+              <a:rPr sz="1300" b="0">
+                <a:solidFill>
+                  <a:srgbClr val="6B7A85"/>
+                </a:solidFill>
+                <a:latin typeface="Calibri"/>
+              </a:rPr>
+              <a:t>+2</a:t>
+            </a:r>
+          </a:p>
+        </p:txBody>
+      </p:sp>
+      <p:sp>
+        <p:nvSpPr>
+          <p:cNvPr id="34" name="Rectangle 33"/>
+          <p:cNvSpPr/>
+          <p:nvPr/>
+        </p:nvSpPr>
+        <p:spPr>
+          <a:xfrm>
+            <a:off x="11359591" y="3968496"/>
+            <a:ext cx="12801" cy="91440"/>
+          </a:xfrm>
+          <a:prstGeom prst="rect">
+            <a:avLst/>
+          </a:prstGeom>
+          <a:solidFill>
+            <a:srgbClr val="9AA5AD"/>
+          </a:solidFill>
+          <a:ln>
+            <a:noFill/>
+          </a:ln>
+          <a:effectLst/>
+        </p:spPr>
+        <p:style>
+          <a:lnRef idx="1">
+            <a:schemeClr val="accent1"/>
+          </a:lnRef>
+          <a:fillRef idx="3">
+            <a:schemeClr val="accent1"/>
+          </a:fillRef>
+          <a:effectRef idx="2">
+            <a:schemeClr val="accent1"/>
+          </a:effectRef>
+          <a:fontRef idx="minor">
+            <a:schemeClr val="lt1"/>
+          </a:fontRef>
+        </p:style>
+        <p:txBody>
+          <a:bodyPr rtlCol="0" anchor="ctr"/>
+          <a:lstStyle/>
+          <a:p>
+            <a:pPr algn="ctr"/>
+          </a:p>
+        </p:txBody>
+      </p:sp>
+      <p:sp>
+        <p:nvSpPr>
+          <p:cNvPr id="35" name="TextBox 34"/>
+          <p:cNvSpPr txBox="1"/>
+          <p:nvPr/>
+        </p:nvSpPr>
+        <p:spPr>
+          <a:xfrm>
+            <a:off x="10908792" y="4078224"/>
+            <a:ext cx="914400" cy="256032"/>
+          </a:xfrm>
+          <a:prstGeom prst="rect">
+            <a:avLst/>
+          </a:prstGeom>
+          <a:noFill/>
+        </p:spPr>
+        <p:txBody>
+          <a:bodyPr wrap="square" lIns="0" rIns="0" tIns="0" bIns="0">
+            <a:spAutoFit/>
+          </a:bodyPr>
+          <a:lstStyle/>
+          <a:p>
+            <a:pPr algn="ctr">
+              <a:spcAft>
+                <a:spcPts val="0"/>
+              </a:spcAft>
+            </a:pPr>
+            <a:r>
+              <a:rPr sz="1300" b="0">
+                <a:solidFill>
+                  <a:srgbClr val="6B7A85"/>
+                </a:solidFill>
+                <a:latin typeface="Calibri"/>
+              </a:rPr>
+              <a:t>+4</a:t>
+            </a:r>
+          </a:p>
+        </p:txBody>
+      </p:sp>
+      <p:sp>
+        <p:nvSpPr>
+          <p:cNvPr id="36" name="TextBox 35"/>
+          <p:cNvSpPr txBox="1"/>
+          <p:nvPr/>
+        </p:nvSpPr>
+        <p:spPr>
+          <a:xfrm>
+            <a:off x="1417320" y="4352544"/>
+            <a:ext cx="3108960" cy="256032"/>
+          </a:xfrm>
+          <a:prstGeom prst="rect">
+            <a:avLst/>
+          </a:prstGeom>
+          <a:noFill/>
+        </p:spPr>
+        <p:txBody>
+          <a:bodyPr wrap="square" lIns="0" rIns="0" tIns="0" bIns="0">
+            <a:spAutoFit/>
+          </a:bodyPr>
+          <a:lstStyle/>
+          <a:p>
+            <a:pPr algn="l">
+              <a:spcAft>
+                <a:spcPts val="0"/>
+              </a:spcAft>
+            </a:pPr>
+            <a:r>
+              <a:rPr sz="1250" b="1">
+                <a:solidFill>
+                  <a:srgbClr val="6B7A85"/>
+                </a:solidFill>
+                <a:latin typeface="Calibri"/>
+              </a:rPr>
+              <a:t>◀  complex model better</a:t>
+            </a:r>
+          </a:p>
+        </p:txBody>
+      </p:sp>
+      <p:sp>
+        <p:nvSpPr>
+          <p:cNvPr id="37" name="TextBox 36"/>
+          <p:cNvSpPr txBox="1"/>
+          <p:nvPr/>
+        </p:nvSpPr>
+        <p:spPr>
+          <a:xfrm>
+            <a:off x="7662672" y="4352544"/>
+            <a:ext cx="3108960" cy="256032"/>
+          </a:xfrm>
+          <a:prstGeom prst="rect">
+            <a:avLst/>
+          </a:prstGeom>
+          <a:noFill/>
+        </p:spPr>
+        <p:txBody>
+          <a:bodyPr wrap="square" lIns="0" rIns="0" tIns="0" bIns="0">
+            <a:spAutoFit/>
+          </a:bodyPr>
+          <a:lstStyle/>
+          <a:p>
+            <a:pPr algn="r">
+              <a:spcAft>
+                <a:spcPts val="0"/>
+              </a:spcAft>
+            </a:pPr>
+            <a:r>
+              <a:rPr sz="1250" b="1">
+                <a:solidFill>
+                  <a:srgbClr val="6B7A85"/>
+                </a:solidFill>
+                <a:latin typeface="Calibri"/>
+              </a:rPr>
+              <a:t>complex model worse  ▶</a:t>
+            </a:r>
+          </a:p>
+        </p:txBody>
+      </p:sp>
+      <p:sp>
+        <p:nvSpPr>
+          <p:cNvPr id="38" name="TextBox 37"/>
+          <p:cNvSpPr txBox="1"/>
+          <p:nvPr/>
+        </p:nvSpPr>
+        <p:spPr>
+          <a:xfrm>
+            <a:off x="877824" y="4700016"/>
+            <a:ext cx="4107484" cy="731520"/>
+          </a:xfrm>
+          <a:prstGeom prst="rect">
+            <a:avLst/>
+          </a:prstGeom>
+          <a:noFill/>
+        </p:spPr>
+        <p:txBody>
+          <a:bodyPr wrap="square" lIns="0" rIns="0" tIns="0" bIns="0">
+            <a:spAutoFit/>
+          </a:bodyPr>
+          <a:lstStyle/>
+          <a:p>
+            <a:pPr algn="l">
+              <a:spcAft>
+                <a:spcPts val="0"/>
+              </a:spcAft>
+            </a:pPr>
+            <a:r>
+              <a:rPr sz="1250" b="0">
+                <a:solidFill>
+                  <a:srgbClr val="2E3A46"/>
+                </a:solidFill>
+                <a:latin typeface="Calibri"/>
+              </a:rPr>
+              <a:t>Complex model wins by more than 2 units. The only zone that is evidence.</a:t>
+            </a:r>
+          </a:p>
+        </p:txBody>
+      </p:sp>
+      <p:sp>
+        <p:nvSpPr>
+          <p:cNvPr id="39" name="TextBox 38"/>
+          <p:cNvSpPr txBox="1"/>
+          <p:nvPr/>
+        </p:nvSpPr>
+        <p:spPr>
+          <a:xfrm>
+            <a:off x="5095036" y="4700016"/>
+            <a:ext cx="1998878" cy="731520"/>
+          </a:xfrm>
+          <a:prstGeom prst="rect">
+            <a:avLst/>
+          </a:prstGeom>
+          <a:noFill/>
+        </p:spPr>
+        <p:txBody>
+          <a:bodyPr wrap="square" lIns="0" rIns="0" tIns="0" bIns="0">
+            <a:spAutoFit/>
+          </a:bodyPr>
+          <a:lstStyle/>
+          <a:p>
+            <a:pPr algn="l">
+              <a:spcAft>
+                <a:spcPts val="0"/>
+              </a:spcAft>
+            </a:pPr>
+            <a:r>
+              <a:rPr sz="1250" b="0">
+                <a:solidFill>
+                  <a:srgbClr val="2E3A46"/>
+                </a:solidFill>
+                <a:latin typeface="Calibri"/>
+              </a:rPr>
+              <a:t>Complex model ahead, but by less than 2.</a:t>
+            </a:r>
+          </a:p>
+        </p:txBody>
+      </p:sp>
+      <p:sp>
+        <p:nvSpPr>
+          <p:cNvPr id="40" name="TextBox 39"/>
+          <p:cNvSpPr txBox="1"/>
+          <p:nvPr/>
+        </p:nvSpPr>
+        <p:spPr>
+          <a:xfrm>
+            <a:off x="7203643" y="4700016"/>
+            <a:ext cx="1998878" cy="731520"/>
+          </a:xfrm>
+          <a:prstGeom prst="rect">
+            <a:avLst/>
+          </a:prstGeom>
+          <a:noFill/>
+        </p:spPr>
+        <p:txBody>
+          <a:bodyPr wrap="square" lIns="0" rIns="0" tIns="0" bIns="0">
+            <a:spAutoFit/>
+          </a:bodyPr>
+          <a:lstStyle/>
+          <a:p>
+            <a:pPr algn="l">
+              <a:spcAft>
+                <a:spcPts val="0"/>
+              </a:spcAft>
+            </a:pPr>
+            <a:r>
+              <a:rPr sz="1250" b="0">
+                <a:solidFill>
+                  <a:srgbClr val="2E3A46"/>
+                </a:solidFill>
+                <a:latin typeface="Calibri"/>
+              </a:rPr>
+              <a:t>Complex model behind. Pure noise lands here every time.</a:t>
+            </a:r>
+          </a:p>
+        </p:txBody>
+      </p:sp>
+      <p:sp>
+        <p:nvSpPr>
+          <p:cNvPr id="41" name="Rounded Rectangle 40"/>
+          <p:cNvSpPr/>
+          <p:nvPr/>
+        </p:nvSpPr>
+        <p:spPr>
+          <a:xfrm>
+            <a:off x="640080" y="5504688"/>
+            <a:ext cx="10908792" cy="1060704"/>
+          </a:xfrm>
+          <a:prstGeom prst="roundRect">
+            <a:avLst>
+              <a:gd name="adj" fmla="val 4000"/>
+            </a:avLst>
+          </a:prstGeom>
+          <a:solidFill>
+            <a:srgbClr val="FBF3E4"/>
+          </a:solidFill>
+          <a:ln w="12700">
+            <a:solidFill>
+              <a:srgbClr val="EBD5AE"/>
+            </a:solidFill>
+          </a:ln>
+          <a:effectLst/>
+        </p:spPr>
+        <p:style>
+          <a:lnRef idx="1">
+            <a:schemeClr val="accent1"/>
+          </a:lnRef>
+          <a:fillRef idx="3">
+            <a:schemeClr val="accent1"/>
+          </a:fillRef>
+          <a:effectRef idx="2">
+            <a:schemeClr val="accent1"/>
+          </a:effectRef>
+          <a:fontRef idx="minor">
+            <a:schemeClr val="lt1"/>
+          </a:fontRef>
+        </p:style>
+        <p:txBody>
+          <a:bodyPr rtlCol="0" anchor="ctr"/>
+          <a:lstStyle/>
+          <a:p>
+            <a:pPr algn="ctr"/>
+          </a:p>
+        </p:txBody>
+      </p:sp>
+      <p:sp>
+        <p:nvSpPr>
+          <p:cNvPr id="42" name="TextBox 41"/>
+          <p:cNvSpPr txBox="1"/>
+          <p:nvPr/>
+        </p:nvSpPr>
+        <p:spPr>
+          <a:xfrm>
+            <a:off x="868680" y="5614416"/>
+            <a:ext cx="10469880" cy="868680"/>
+          </a:xfrm>
+          <a:prstGeom prst="rect">
+            <a:avLst/>
+          </a:prstGeom>
+          <a:noFill/>
+        </p:spPr>
+        <p:txBody>
+          <a:bodyPr wrap="square" lIns="0" rIns="0" tIns="0" bIns="0">
+            <a:spAutoFit/>
+          </a:bodyPr>
+          <a:lstStyle/>
+          <a:p>
+            <a:pPr algn="l">
+              <a:spcAft>
+                <a:spcPts val="0"/>
+              </a:spcAft>
+            </a:pPr>
+            <a:r>
+              <a:rPr sz="1650" b="1">
+                <a:solidFill>
+                  <a:srgbClr val="2E3A46"/>
+                </a:solidFill>
+                <a:latin typeface="Calibri"/>
+              </a:rPr>
+              <a:t>Because χ²₁ is never negative, ΔAIC can never exceed 2. Landing “within 2” is guaranteed by the arithmetic, not earned by the data.</a:t>
+            </a:r>
+          </a:p>
+          <a:p>
+            <a:pPr algn="l">
+              <a:spcAft>
+                <a:spcPts val="0"/>
+              </a:spcAft>
+            </a:pPr>
+            <a:r>
+              <a:rPr sz="1550" b="0">
+                <a:solidFill>
+                  <a:srgbClr val="5A4A2E"/>
+                </a:solidFill>
+                <a:latin typeface="Calibri"/>
+              </a:rPr>
+              <a:t>On average χ²₁ = 1, so a useless parameter typically sits about 1 AIC unit behind — and 16% of the time χ²₁ exceeds 2, so it takes the lower AIC outright.</a:t>
             </a:r>
           </a:p>
         </p:txBody>
@@ -15947,7 +17284,7 @@
               </a14:hiddenLine>
             </a:ext>
             <a:ext uri="{FAA26D3D-D897-4be2-8F04-BA451C77F1D7}">
-              <ma14:placeholderFlag xmlns:ma14="http://schemas.microsoft.com/office/mac/drawingml/2011/main" xmlns="" val="1"/>
+              <ma14:placeholderFlag xmlns="" xmlns:ma14="http://schemas.microsoft.com/office/mac/drawingml/2011/main" val="1"/>
             </a:ext>
           </a:extLst>
         </p:spPr>
@@ -19493,7 +20830,7 @@
               </a14:hiddenLine>
             </a:ext>
             <a:ext uri="{FAA26D3D-D897-4be2-8F04-BA451C77F1D7}">
-              <ma14:placeholderFlag xmlns:ma14="http://schemas.microsoft.com/office/mac/drawingml/2011/main" xmlns="" val="1"/>
+              <ma14:placeholderFlag xmlns="" xmlns:ma14="http://schemas.microsoft.com/office/mac/drawingml/2011/main" val="1"/>
             </a:ext>
           </a:extLst>
         </p:spPr>
@@ -19713,7 +21050,7 @@
               </a14:hiddenLine>
             </a:ext>
             <a:ext uri="{FAA26D3D-D897-4be2-8F04-BA451C77F1D7}">
-              <ma14:placeholderFlag xmlns:ma14="http://schemas.microsoft.com/office/mac/drawingml/2011/main" xmlns="" val="1"/>
+              <ma14:placeholderFlag xmlns="" xmlns:ma14="http://schemas.microsoft.com/office/mac/drawingml/2011/main" val="1"/>
             </a:ext>
           </a:extLst>
         </p:spPr>
